--- a/final_output.pptx
+++ b/final_output.pptx
@@ -12,6 +12,8 @@
     <p:sldId id="260" r:id="rId11"/>
     <p:sldId id="261" r:id="rId12"/>
     <p:sldId id="262" r:id="rId13"/>
+    <p:sldId id="263" r:id="rId14"/>
+    <p:sldId id="264" r:id="rId15"/>
   </p:sldIdLst>
   <p:sldSz cx="12192000" cy="6858000" type="screen4x3"/>
   <p:notesSz cx="6858000" cy="9144000"/>
@@ -3123,7 +3125,7 @@
           <a:lstStyle/>
           <a:p>
             <a:r>
-              <a:t>The Battle of Giants: Swiggy vs Zomato - A Deep Dive into India's Food Delivery Wars</a:t>
+              <a:t>Tesla vs BYD: A Comparative Analysis of Electric Vehicle Giants</a:t>
             </a:r>
           </a:p>
         </p:txBody>
@@ -3148,317 +3150,10 @@
       <p:grpSpPr/>
       <p:sp>
         <p:nvSpPr>
-          <p:cNvPr id="2" name="Google Shape;171;p32">
+          <p:cNvPr id="2" name="content1">
             <a:extLst>
               <a:ext uri="{FF2B5EF4-FFF2-40B4-BE49-F238E27FC236}">
-                <a16:creationId xmlns:a16="http://schemas.microsoft.com/office/drawing/2014/main" id="{9ACD8CA5-4451-4ED5-B63B-DFEF44E87616}"/>
-              </a:ext>
-            </a:extLst>
-          </p:cNvPr>
-          <p:cNvSpPr txBox="1">
-            <a:spLocks/>
-          </p:cNvSpPr>
-          <p:nvPr/>
-        </p:nvSpPr>
-        <p:spPr>
-          <a:xfrm>
-            <a:off x="5394900" y="1801287"/>
-            <a:ext cx="1160400" cy="577800"/>
-          </a:xfrm>
-          <a:prstGeom prst="rect">
-            <a:avLst/>
-          </a:prstGeom>
-        </p:spPr>
-        <p:txBody>
-          <a:bodyPr spcFirstLastPara="1" wrap="square" lIns="91425" tIns="91425" rIns="91425" bIns="91425" anchor="ctr" anchorCtr="0">
-            <a:noAutofit/>
-          </a:bodyPr>
-          <a:lstStyle>
-            <a:lvl1pPr algn="l" defTabSz="914400" rtl="0" eaLnBrk="1" latinLnBrk="0" hangingPunct="1">
-              <a:lnSpc>
-                <a:spcPct val="90000"/>
-              </a:lnSpc>
-              <a:spcBef>
-                <a:spcPct val="0"/>
-              </a:spcBef>
-              <a:buNone/>
-              <a:defRPr sz="4400" kern="1200">
-                <a:solidFill>
-                  <a:schemeClr val="tx1"/>
-                </a:solidFill>
-                <a:latin typeface="+mj-lt"/>
-                <a:ea typeface="+mj-ea"/>
-                <a:cs typeface="+mj-cs"/>
-              </a:defRPr>
-            </a:lvl1pPr>
-          </a:lstStyle>
-          <a:p>
-            <a:pPr>
-              <a:spcBef>
-                <a:spcPts val="0"/>
-              </a:spcBef>
-            </a:pPr>
-            <a:r>
-              <a:rPr lang="en" dirty="0"/>
-              <a:t>01</a:t>
-            </a:r>
-          </a:p>
-        </p:txBody>
-      </p:sp>
-      <p:sp>
-        <p:nvSpPr>
-          <p:cNvPr id="3" name="Google Shape;173;p32">
-            <a:extLst>
-              <a:ext uri="{FF2B5EF4-FFF2-40B4-BE49-F238E27FC236}">
-                <a16:creationId xmlns:a16="http://schemas.microsoft.com/office/drawing/2014/main" id="{21EBBC7F-3BF9-411A-AC9F-280CDA1EBF71}"/>
-              </a:ext>
-            </a:extLst>
-          </p:cNvPr>
-          <p:cNvSpPr txBox="1">
-            <a:spLocks/>
-          </p:cNvSpPr>
-          <p:nvPr/>
-        </p:nvSpPr>
-        <p:spPr>
-          <a:xfrm>
-            <a:off x="5392252" y="5174471"/>
-            <a:ext cx="1160400" cy="577800"/>
-          </a:xfrm>
-          <a:prstGeom prst="rect">
-            <a:avLst/>
-          </a:prstGeom>
-        </p:spPr>
-        <p:txBody>
-          <a:bodyPr spcFirstLastPara="1" wrap="square" lIns="91425" tIns="91425" rIns="91425" bIns="91425" anchor="ctr" anchorCtr="0">
-            <a:noAutofit/>
-          </a:bodyPr>
-          <a:lstStyle>
-            <a:lvl1pPr algn="l" defTabSz="914400" rtl="0" eaLnBrk="1" latinLnBrk="0" hangingPunct="1">
-              <a:lnSpc>
-                <a:spcPct val="90000"/>
-              </a:lnSpc>
-              <a:spcBef>
-                <a:spcPct val="0"/>
-              </a:spcBef>
-              <a:buNone/>
-              <a:defRPr sz="4400" kern="1200">
-                <a:solidFill>
-                  <a:schemeClr val="tx1"/>
-                </a:solidFill>
-                <a:latin typeface="+mj-lt"/>
-                <a:ea typeface="+mj-ea"/>
-                <a:cs typeface="+mj-cs"/>
-              </a:defRPr>
-            </a:lvl1pPr>
-          </a:lstStyle>
-          <a:p>
-            <a:pPr>
-              <a:spcBef>
-                <a:spcPts val="0"/>
-              </a:spcBef>
-            </a:pPr>
-            <a:r>
-              <a:rPr lang="en" dirty="0"/>
-              <a:t>03</a:t>
-            </a:r>
-          </a:p>
-        </p:txBody>
-      </p:sp>
-      <p:cxnSp>
-        <p:nvCxnSpPr>
-          <p:cNvPr id="4" name="Google Shape;178;p32">
-            <a:extLst>
-              <a:ext uri="{FF2B5EF4-FFF2-40B4-BE49-F238E27FC236}">
-                <a16:creationId xmlns:a16="http://schemas.microsoft.com/office/drawing/2014/main" id="{4D0AF5DD-3304-47B9-9DBD-552A0C712BFC}"/>
-              </a:ext>
-            </a:extLst>
-          </p:cNvPr>
-          <p:cNvCxnSpPr>
-            <a:cxnSpLocks/>
-          </p:cNvCxnSpPr>
-          <p:nvPr/>
-        </p:nvCxnSpPr>
-        <p:spPr>
-          <a:xfrm>
-            <a:off x="5243772" y="1237405"/>
-            <a:ext cx="0" cy="5448907"/>
-          </a:xfrm>
-          <a:prstGeom prst="straightConnector1">
-            <a:avLst/>
-          </a:prstGeom>
-          <a:noFill/>
-          <a:ln w="19050" cap="flat" cmpd="sng">
-            <a:solidFill>
-              <a:schemeClr val="accent1"/>
-            </a:solidFill>
-            <a:prstDash val="solid"/>
-            <a:round/>
-            <a:headEnd type="none" w="med" len="med"/>
-            <a:tailEnd type="none" w="med" len="med"/>
-          </a:ln>
-        </p:spPr>
-      </p:cxnSp>
-      <p:cxnSp>
-        <p:nvCxnSpPr>
-          <p:cNvPr id="5" name="Google Shape;179;p32">
-            <a:extLst>
-              <a:ext uri="{FF2B5EF4-FFF2-40B4-BE49-F238E27FC236}">
-                <a16:creationId xmlns:a16="http://schemas.microsoft.com/office/drawing/2014/main" id="{08C8FDE0-2039-417A-8014-7FD5C8720338}"/>
-              </a:ext>
-            </a:extLst>
-          </p:cNvPr>
-          <p:cNvCxnSpPr/>
-          <p:nvPr/>
-        </p:nvCxnSpPr>
-        <p:spPr>
-          <a:xfrm rot="10800000">
-            <a:off x="4888884" y="2069642"/>
-            <a:ext cx="366000" cy="0"/>
-          </a:xfrm>
-          <a:prstGeom prst="straightConnector1">
-            <a:avLst/>
-          </a:prstGeom>
-          <a:noFill/>
-          <a:ln w="19050" cap="flat" cmpd="sng">
-            <a:solidFill>
-              <a:schemeClr val="accent1"/>
-            </a:solidFill>
-            <a:prstDash val="solid"/>
-            <a:round/>
-            <a:headEnd type="none" w="med" len="med"/>
-            <a:tailEnd type="none" w="med" len="med"/>
-          </a:ln>
-        </p:spPr>
-      </p:cxnSp>
-      <p:cxnSp>
-        <p:nvCxnSpPr>
-          <p:cNvPr id="6" name="Google Shape;180;p32">
-            <a:extLst>
-              <a:ext uri="{FF2B5EF4-FFF2-40B4-BE49-F238E27FC236}">
-                <a16:creationId xmlns:a16="http://schemas.microsoft.com/office/drawing/2014/main" id="{9C247B9B-3CE8-4CA5-BC6D-ED5951DC35A0}"/>
-              </a:ext>
-            </a:extLst>
-          </p:cNvPr>
-          <p:cNvCxnSpPr/>
-          <p:nvPr/>
-        </p:nvCxnSpPr>
-        <p:spPr>
-          <a:xfrm rot="10800000">
-            <a:off x="5243772" y="3757261"/>
-            <a:ext cx="366000" cy="0"/>
-          </a:xfrm>
-          <a:prstGeom prst="straightConnector1">
-            <a:avLst/>
-          </a:prstGeom>
-          <a:noFill/>
-          <a:ln w="19050" cap="flat" cmpd="sng">
-            <a:solidFill>
-              <a:schemeClr val="accent1"/>
-            </a:solidFill>
-            <a:prstDash val="solid"/>
-            <a:round/>
-            <a:headEnd type="none" w="med" len="med"/>
-            <a:tailEnd type="none" w="med" len="med"/>
-          </a:ln>
-        </p:spPr>
-      </p:cxnSp>
-      <p:cxnSp>
-        <p:nvCxnSpPr>
-          <p:cNvPr id="7" name="Google Shape;181;p32">
-            <a:extLst>
-              <a:ext uri="{FF2B5EF4-FFF2-40B4-BE49-F238E27FC236}">
-                <a16:creationId xmlns:a16="http://schemas.microsoft.com/office/drawing/2014/main" id="{B99263AB-A4F5-4E49-AE7F-761BDE140E7D}"/>
-              </a:ext>
-            </a:extLst>
-          </p:cNvPr>
-          <p:cNvCxnSpPr/>
-          <p:nvPr/>
-        </p:nvCxnSpPr>
-        <p:spPr>
-          <a:xfrm rot="10800000">
-            <a:off x="4847631" y="5455878"/>
-            <a:ext cx="366000" cy="0"/>
-          </a:xfrm>
-          <a:prstGeom prst="straightConnector1">
-            <a:avLst/>
-          </a:prstGeom>
-          <a:noFill/>
-          <a:ln w="19050" cap="flat" cmpd="sng">
-            <a:solidFill>
-              <a:schemeClr val="accent1"/>
-            </a:solidFill>
-            <a:prstDash val="solid"/>
-            <a:round/>
-            <a:headEnd type="none" w="med" len="med"/>
-            <a:tailEnd type="none" w="med" len="med"/>
-          </a:ln>
-        </p:spPr>
-      </p:cxnSp>
-      <p:sp>
-        <p:nvSpPr>
-          <p:cNvPr id="8" name="Google Shape;173;p32">
-            <a:extLst>
-              <a:ext uri="{FF2B5EF4-FFF2-40B4-BE49-F238E27FC236}">
-                <a16:creationId xmlns:a16="http://schemas.microsoft.com/office/drawing/2014/main" id="{59DC8F83-EC2B-4C3F-8303-4E92717D5388}"/>
-              </a:ext>
-            </a:extLst>
-          </p:cNvPr>
-          <p:cNvSpPr txBox="1">
-            <a:spLocks/>
-          </p:cNvSpPr>
-          <p:nvPr/>
-        </p:nvSpPr>
-        <p:spPr>
-          <a:xfrm>
-            <a:off x="4137794" y="3529571"/>
-            <a:ext cx="1160400" cy="577800"/>
-          </a:xfrm>
-          <a:prstGeom prst="rect">
-            <a:avLst/>
-          </a:prstGeom>
-        </p:spPr>
-        <p:txBody>
-          <a:bodyPr spcFirstLastPara="1" wrap="square" lIns="91425" tIns="91425" rIns="91425" bIns="91425" anchor="ctr" anchorCtr="0">
-            <a:noAutofit/>
-          </a:bodyPr>
-          <a:lstStyle>
-            <a:lvl1pPr algn="l" defTabSz="914400" rtl="0" eaLnBrk="1" latinLnBrk="0" hangingPunct="1">
-              <a:lnSpc>
-                <a:spcPct val="90000"/>
-              </a:lnSpc>
-              <a:spcBef>
-                <a:spcPct val="0"/>
-              </a:spcBef>
-              <a:buNone/>
-              <a:defRPr sz="4400" kern="1200">
-                <a:solidFill>
-                  <a:schemeClr val="tx1"/>
-                </a:solidFill>
-                <a:latin typeface="+mj-lt"/>
-                <a:ea typeface="+mj-ea"/>
-                <a:cs typeface="+mj-cs"/>
-              </a:defRPr>
-            </a:lvl1pPr>
-          </a:lstStyle>
-          <a:p>
-            <a:pPr>
-              <a:spcBef>
-                <a:spcPts val="0"/>
-              </a:spcBef>
-            </a:pPr>
-            <a:r>
-              <a:rPr lang="en" dirty="0"/>
-              <a:t>02</a:t>
-            </a:r>
-          </a:p>
-        </p:txBody>
-      </p:sp>
-      <p:sp>
-        <p:nvSpPr>
-          <p:cNvPr id="9" name="content3">
-            <a:extLst>
-              <a:ext uri="{FF2B5EF4-FFF2-40B4-BE49-F238E27FC236}">
-                <a16:creationId xmlns:a16="http://schemas.microsoft.com/office/drawing/2014/main" id="{87510014-2DBF-4A05-807A-5F40DAB03A54}"/>
+                <a16:creationId xmlns:a16="http://schemas.microsoft.com/office/drawing/2014/main" id="{4CFE2BC8-54A5-407E-B141-B5EC04BD3417}"/>
               </a:ext>
             </a:extLst>
           </p:cNvPr>
@@ -3467,8 +3162,8 @@
         </p:nvSpPr>
         <p:spPr>
           <a:xfrm>
-            <a:off x="737805" y="5355452"/>
-            <a:ext cx="4144346" cy="646331"/>
+            <a:off x="382842" y="2321170"/>
+            <a:ext cx="8588880" cy="646331"/>
           </a:xfrm>
           <a:prstGeom prst="rect">
             <a:avLst/>
@@ -3487,17 +3182,17 @@
           <a:lstStyle/>
           <a:p>
             <a:r>
-              <a:t>The competitive landscape has evolved, with Zomato's acquisition of Uber Eats India and expansion into tier 2/3 cities contributing to its market dominance, while Swiggy focuses on service quality and innovation to recover market share.</a:t>
-            </a:r>
-          </a:p>
-        </p:txBody>
-      </p:sp>
-      <p:sp>
-        <p:nvSpPr>
-          <p:cNvPr id="10" name="head3">
+              <a:t>In 2023, BYD became the global new energy vehicle sales champion, achieving over 3 million annual sales for the second consecutive year.</a:t>
+            </a:r>
+          </a:p>
+        </p:txBody>
+      </p:sp>
+      <p:sp>
+        <p:nvSpPr>
+          <p:cNvPr id="3" name="head1">
             <a:extLst>
               <a:ext uri="{FF2B5EF4-FFF2-40B4-BE49-F238E27FC236}">
-                <a16:creationId xmlns:a16="http://schemas.microsoft.com/office/drawing/2014/main" id="{4CDE91AD-7D68-479F-B878-760D6B57DF98}"/>
+                <a16:creationId xmlns:a16="http://schemas.microsoft.com/office/drawing/2014/main" id="{AF43DD1A-697B-4E09-8F47-DB6EB5F90E42}"/>
               </a:ext>
             </a:extLst>
           </p:cNvPr>
@@ -3506,8 +3201,8 @@
         </p:nvSpPr>
         <p:spPr>
           <a:xfrm>
-            <a:off x="737805" y="4770677"/>
-            <a:ext cx="4144346" cy="584775"/>
+            <a:off x="382842" y="1659451"/>
+            <a:ext cx="8588880" cy="646331"/>
           </a:xfrm>
           <a:prstGeom prst="rect">
             <a:avLst/>
@@ -3521,17 +3216,17 @@
           <a:lstStyle/>
           <a:p>
             <a:r>
-              <a:t>Strategic Outcomes</a:t>
-            </a:r>
-          </a:p>
-        </p:txBody>
-      </p:sp>
-      <p:sp>
-        <p:nvSpPr>
-          <p:cNvPr id="11" name="content2">
+              <a:t>BYD's Market Leadership</a:t>
+            </a:r>
+          </a:p>
+        </p:txBody>
+      </p:sp>
+      <p:sp>
+        <p:nvSpPr>
+          <p:cNvPr id="5" name="content2">
             <a:extLst>
               <a:ext uri="{FF2B5EF4-FFF2-40B4-BE49-F238E27FC236}">
-                <a16:creationId xmlns:a16="http://schemas.microsoft.com/office/drawing/2014/main" id="{5DFB1118-D534-4F23-8272-FB69C2E9049D}"/>
+                <a16:creationId xmlns:a16="http://schemas.microsoft.com/office/drawing/2014/main" id="{0114294D-3C82-4496-9578-DE3D20CA1765}"/>
               </a:ext>
             </a:extLst>
           </p:cNvPr>
@@ -3540,8 +3235,8 @@
         </p:nvSpPr>
         <p:spPr>
           <a:xfrm>
-            <a:off x="5968367" y="3751471"/>
-            <a:ext cx="4144346" cy="646331"/>
+            <a:off x="402712" y="3940580"/>
+            <a:ext cx="8569010" cy="646331"/>
           </a:xfrm>
           <a:prstGeom prst="rect">
             <a:avLst/>
@@ -3560,17 +3255,17 @@
           <a:lstStyle/>
           <a:p>
             <a:r>
-              <a:t>Both companies have experienced significant growth, but Zomato's IPO in July 2021 provided it with a capital advantage, allowing for aggressive customer acquisition and expansion strategies.</a:t>
-            </a:r>
-          </a:p>
-        </p:txBody>
-      </p:sp>
-      <p:sp>
-        <p:nvSpPr>
-          <p:cNvPr id="12" name="head2">
+              <a:t>BYD's exports surged by 334.2% in 2023, reaching 242,765 units across over 70 countries, enhancing its global market presence.</a:t>
+            </a:r>
+          </a:p>
+        </p:txBody>
+      </p:sp>
+      <p:sp>
+        <p:nvSpPr>
+          <p:cNvPr id="6" name="head2">
             <a:extLst>
               <a:ext uri="{FF2B5EF4-FFF2-40B4-BE49-F238E27FC236}">
-                <a16:creationId xmlns:a16="http://schemas.microsoft.com/office/drawing/2014/main" id="{3E071FFE-7960-4952-BF3A-0FE9A5FDB4EA}"/>
+                <a16:creationId xmlns:a16="http://schemas.microsoft.com/office/drawing/2014/main" id="{EC54FAE9-D0C9-4E6D-BD92-BE588E00A0E5}"/>
               </a:ext>
             </a:extLst>
           </p:cNvPr>
@@ -3579,8 +3274,8 @@
         </p:nvSpPr>
         <p:spPr>
           <a:xfrm>
-            <a:off x="5968367" y="3166696"/>
-            <a:ext cx="4144346" cy="584775"/>
+            <a:off x="388238" y="3281321"/>
+            <a:ext cx="8583484" cy="646331"/>
           </a:xfrm>
           <a:prstGeom prst="rect">
             <a:avLst/>
@@ -3594,17 +3289,17 @@
           <a:lstStyle/>
           <a:p>
             <a:r>
-              <a:t>Growth Trajectories</a:t>
-            </a:r>
-          </a:p>
-        </p:txBody>
-      </p:sp>
-      <p:sp>
-        <p:nvSpPr>
-          <p:cNvPr id="13" name="content1">
+              <a:t>International Expansion</a:t>
+            </a:r>
+          </a:p>
+        </p:txBody>
+      </p:sp>
+      <p:sp>
+        <p:nvSpPr>
+          <p:cNvPr id="7" name="content3">
             <a:extLst>
               <a:ext uri="{FF2B5EF4-FFF2-40B4-BE49-F238E27FC236}">
-                <a16:creationId xmlns:a16="http://schemas.microsoft.com/office/drawing/2014/main" id="{0D56670D-A85A-448F-818D-6D415FB1A2AD}"/>
+                <a16:creationId xmlns:a16="http://schemas.microsoft.com/office/drawing/2014/main" id="{BAB09B8F-FCBE-446C-89AD-F3E542DDA470}"/>
               </a:ext>
             </a:extLst>
           </p:cNvPr>
@@ -3613,8 +3308,8 @@
         </p:nvSpPr>
         <p:spPr>
           <a:xfrm>
-            <a:off x="737805" y="2098358"/>
-            <a:ext cx="4144346" cy="646331"/>
+            <a:off x="382842" y="5566061"/>
+            <a:ext cx="8583484" cy="646331"/>
           </a:xfrm>
           <a:prstGeom prst="rect">
             <a:avLst/>
@@ -3633,17 +3328,17 @@
           <a:lstStyle/>
           <a:p>
             <a:r>
-              <a:t>Zomato and Swiggy dominate the Indian food delivery market, with Zomato holding a 58% market share and Swiggy at 42%. Zomato's recent profitability in FY24 contrasts with Swiggy's ongoing losses, highlighting the competitive dynamics at play.</a:t>
-            </a:r>
-          </a:p>
-        </p:txBody>
-      </p:sp>
-      <p:sp>
-        <p:nvSpPr>
-          <p:cNvPr id="14" name="head1">
+              <a:t>BYD boasts an extensive brand matrix, including the Dynasty and Ocean series, solidifying its position in the global new energy sector.</a:t>
+            </a:r>
+          </a:p>
+        </p:txBody>
+      </p:sp>
+      <p:sp>
+        <p:nvSpPr>
+          <p:cNvPr id="8" name="head3">
             <a:extLst>
               <a:ext uri="{FF2B5EF4-FFF2-40B4-BE49-F238E27FC236}">
-                <a16:creationId xmlns:a16="http://schemas.microsoft.com/office/drawing/2014/main" id="{9A4C4650-475C-4F06-912B-7A535409FDDC}"/>
+                <a16:creationId xmlns:a16="http://schemas.microsoft.com/office/drawing/2014/main" id="{7F46E3E4-B57E-4E3B-ABC9-C8472D45B500}"/>
               </a:ext>
             </a:extLst>
           </p:cNvPr>
@@ -3652,8 +3347,8 @@
         </p:nvSpPr>
         <p:spPr>
           <a:xfrm>
-            <a:off x="737805" y="1513583"/>
-            <a:ext cx="4144346" cy="584775"/>
+            <a:off x="388238" y="4900731"/>
+            <a:ext cx="8588880" cy="646331"/>
           </a:xfrm>
           <a:prstGeom prst="rect">
             <a:avLst/>
@@ -3667,17 +3362,17 @@
           <a:lstStyle/>
           <a:p>
             <a:r>
-              <a:t>Market Positioning</a:t>
-            </a:r>
-          </a:p>
-        </p:txBody>
-      </p:sp>
-      <p:sp>
-        <p:nvSpPr>
-          <p:cNvPr id="15" name="subtopic">
+              <a:t>Diverse Product Portfolio</a:t>
+            </a:r>
+          </a:p>
+        </p:txBody>
+      </p:sp>
+      <p:sp>
+        <p:nvSpPr>
+          <p:cNvPr id="4" name="subtopic">
             <a:extLst>
               <a:ext uri="{FF2B5EF4-FFF2-40B4-BE49-F238E27FC236}">
-                <a16:creationId xmlns:a16="http://schemas.microsoft.com/office/drawing/2014/main" id="{0817A346-3588-46F6-9A91-768330515E36}"/>
+                <a16:creationId xmlns:a16="http://schemas.microsoft.com/office/drawing/2014/main" id="{216BD8E4-BE8C-48D9-AFBB-D6093A341E66}"/>
               </a:ext>
             </a:extLst>
           </p:cNvPr>
@@ -3686,13 +3381,18 @@
         </p:nvSpPr>
         <p:spPr>
           <a:xfrm>
-            <a:off x="318052" y="209886"/>
-            <a:ext cx="10880032" cy="646331"/>
+            <a:off x="382842" y="202185"/>
+            <a:ext cx="10863056" cy="646331"/>
           </a:xfrm>
           <a:prstGeom prst="rect">
             <a:avLst/>
           </a:prstGeom>
           <a:noFill/>
+          <a:ln>
+            <a:solidFill>
+              <a:schemeClr val="bg1"/>
+            </a:solidFill>
+          </a:ln>
         </p:spPr>
         <p:txBody>
           <a:bodyPr wrap="square" rtlCol="0">
@@ -3701,7 +3401,7 @@
           <a:lstStyle/>
           <a:p>
             <a:r>
-              <a:t>The Competitive Landscape: Understanding the Rise of Swiggy and Zomato</a:t>
+              <a:t>Overview of Tesla and BYD: Company Histories and Market Positions</a:t>
             </a:r>
           </a:p>
         </p:txBody>
@@ -3726,317 +3426,10 @@
       <p:grpSpPr/>
       <p:sp>
         <p:nvSpPr>
-          <p:cNvPr id="2" name="Google Shape;171;p32">
+          <p:cNvPr id="2" name="content1">
             <a:extLst>
               <a:ext uri="{FF2B5EF4-FFF2-40B4-BE49-F238E27FC236}">
-                <a16:creationId xmlns:a16="http://schemas.microsoft.com/office/drawing/2014/main" id="{9ACD8CA5-4451-4ED5-B63B-DFEF44E87616}"/>
-              </a:ext>
-            </a:extLst>
-          </p:cNvPr>
-          <p:cNvSpPr txBox="1">
-            <a:spLocks/>
-          </p:cNvSpPr>
-          <p:nvPr/>
-        </p:nvSpPr>
-        <p:spPr>
-          <a:xfrm>
-            <a:off x="5394900" y="1801287"/>
-            <a:ext cx="1160400" cy="577800"/>
-          </a:xfrm>
-          <a:prstGeom prst="rect">
-            <a:avLst/>
-          </a:prstGeom>
-        </p:spPr>
-        <p:txBody>
-          <a:bodyPr spcFirstLastPara="1" wrap="square" lIns="91425" tIns="91425" rIns="91425" bIns="91425" anchor="ctr" anchorCtr="0">
-            <a:noAutofit/>
-          </a:bodyPr>
-          <a:lstStyle>
-            <a:lvl1pPr algn="l" defTabSz="914400" rtl="0" eaLnBrk="1" latinLnBrk="0" hangingPunct="1">
-              <a:lnSpc>
-                <a:spcPct val="90000"/>
-              </a:lnSpc>
-              <a:spcBef>
-                <a:spcPct val="0"/>
-              </a:spcBef>
-              <a:buNone/>
-              <a:defRPr sz="4400" kern="1200">
-                <a:solidFill>
-                  <a:schemeClr val="tx1"/>
-                </a:solidFill>
-                <a:latin typeface="+mj-lt"/>
-                <a:ea typeface="+mj-ea"/>
-                <a:cs typeface="+mj-cs"/>
-              </a:defRPr>
-            </a:lvl1pPr>
-          </a:lstStyle>
-          <a:p>
-            <a:pPr>
-              <a:spcBef>
-                <a:spcPts val="0"/>
-              </a:spcBef>
-            </a:pPr>
-            <a:r>
-              <a:rPr lang="en" dirty="0"/>
-              <a:t>01</a:t>
-            </a:r>
-          </a:p>
-        </p:txBody>
-      </p:sp>
-      <p:sp>
-        <p:nvSpPr>
-          <p:cNvPr id="3" name="Google Shape;173;p32">
-            <a:extLst>
-              <a:ext uri="{FF2B5EF4-FFF2-40B4-BE49-F238E27FC236}">
-                <a16:creationId xmlns:a16="http://schemas.microsoft.com/office/drawing/2014/main" id="{21EBBC7F-3BF9-411A-AC9F-280CDA1EBF71}"/>
-              </a:ext>
-            </a:extLst>
-          </p:cNvPr>
-          <p:cNvSpPr txBox="1">
-            <a:spLocks/>
-          </p:cNvSpPr>
-          <p:nvPr/>
-        </p:nvSpPr>
-        <p:spPr>
-          <a:xfrm>
-            <a:off x="5392252" y="5174471"/>
-            <a:ext cx="1160400" cy="577800"/>
-          </a:xfrm>
-          <a:prstGeom prst="rect">
-            <a:avLst/>
-          </a:prstGeom>
-        </p:spPr>
-        <p:txBody>
-          <a:bodyPr spcFirstLastPara="1" wrap="square" lIns="91425" tIns="91425" rIns="91425" bIns="91425" anchor="ctr" anchorCtr="0">
-            <a:noAutofit/>
-          </a:bodyPr>
-          <a:lstStyle>
-            <a:lvl1pPr algn="l" defTabSz="914400" rtl="0" eaLnBrk="1" latinLnBrk="0" hangingPunct="1">
-              <a:lnSpc>
-                <a:spcPct val="90000"/>
-              </a:lnSpc>
-              <a:spcBef>
-                <a:spcPct val="0"/>
-              </a:spcBef>
-              <a:buNone/>
-              <a:defRPr sz="4400" kern="1200">
-                <a:solidFill>
-                  <a:schemeClr val="tx1"/>
-                </a:solidFill>
-                <a:latin typeface="+mj-lt"/>
-                <a:ea typeface="+mj-ea"/>
-                <a:cs typeface="+mj-cs"/>
-              </a:defRPr>
-            </a:lvl1pPr>
-          </a:lstStyle>
-          <a:p>
-            <a:pPr>
-              <a:spcBef>
-                <a:spcPts val="0"/>
-              </a:spcBef>
-            </a:pPr>
-            <a:r>
-              <a:rPr lang="en" dirty="0"/>
-              <a:t>03</a:t>
-            </a:r>
-          </a:p>
-        </p:txBody>
-      </p:sp>
-      <p:cxnSp>
-        <p:nvCxnSpPr>
-          <p:cNvPr id="4" name="Google Shape;178;p32">
-            <a:extLst>
-              <a:ext uri="{FF2B5EF4-FFF2-40B4-BE49-F238E27FC236}">
-                <a16:creationId xmlns:a16="http://schemas.microsoft.com/office/drawing/2014/main" id="{4D0AF5DD-3304-47B9-9DBD-552A0C712BFC}"/>
-              </a:ext>
-            </a:extLst>
-          </p:cNvPr>
-          <p:cNvCxnSpPr>
-            <a:cxnSpLocks/>
-          </p:cNvCxnSpPr>
-          <p:nvPr/>
-        </p:nvCxnSpPr>
-        <p:spPr>
-          <a:xfrm>
-            <a:off x="5243772" y="1237405"/>
-            <a:ext cx="0" cy="5448907"/>
-          </a:xfrm>
-          <a:prstGeom prst="straightConnector1">
-            <a:avLst/>
-          </a:prstGeom>
-          <a:noFill/>
-          <a:ln w="19050" cap="flat" cmpd="sng">
-            <a:solidFill>
-              <a:schemeClr val="accent1"/>
-            </a:solidFill>
-            <a:prstDash val="solid"/>
-            <a:round/>
-            <a:headEnd type="none" w="med" len="med"/>
-            <a:tailEnd type="none" w="med" len="med"/>
-          </a:ln>
-        </p:spPr>
-      </p:cxnSp>
-      <p:cxnSp>
-        <p:nvCxnSpPr>
-          <p:cNvPr id="5" name="Google Shape;179;p32">
-            <a:extLst>
-              <a:ext uri="{FF2B5EF4-FFF2-40B4-BE49-F238E27FC236}">
-                <a16:creationId xmlns:a16="http://schemas.microsoft.com/office/drawing/2014/main" id="{08C8FDE0-2039-417A-8014-7FD5C8720338}"/>
-              </a:ext>
-            </a:extLst>
-          </p:cNvPr>
-          <p:cNvCxnSpPr/>
-          <p:nvPr/>
-        </p:nvCxnSpPr>
-        <p:spPr>
-          <a:xfrm rot="10800000">
-            <a:off x="4888884" y="2069642"/>
-            <a:ext cx="366000" cy="0"/>
-          </a:xfrm>
-          <a:prstGeom prst="straightConnector1">
-            <a:avLst/>
-          </a:prstGeom>
-          <a:noFill/>
-          <a:ln w="19050" cap="flat" cmpd="sng">
-            <a:solidFill>
-              <a:schemeClr val="accent1"/>
-            </a:solidFill>
-            <a:prstDash val="solid"/>
-            <a:round/>
-            <a:headEnd type="none" w="med" len="med"/>
-            <a:tailEnd type="none" w="med" len="med"/>
-          </a:ln>
-        </p:spPr>
-      </p:cxnSp>
-      <p:cxnSp>
-        <p:nvCxnSpPr>
-          <p:cNvPr id="6" name="Google Shape;180;p32">
-            <a:extLst>
-              <a:ext uri="{FF2B5EF4-FFF2-40B4-BE49-F238E27FC236}">
-                <a16:creationId xmlns:a16="http://schemas.microsoft.com/office/drawing/2014/main" id="{9C247B9B-3CE8-4CA5-BC6D-ED5951DC35A0}"/>
-              </a:ext>
-            </a:extLst>
-          </p:cNvPr>
-          <p:cNvCxnSpPr/>
-          <p:nvPr/>
-        </p:nvCxnSpPr>
-        <p:spPr>
-          <a:xfrm rot="10800000">
-            <a:off x="5243772" y="3757261"/>
-            <a:ext cx="366000" cy="0"/>
-          </a:xfrm>
-          <a:prstGeom prst="straightConnector1">
-            <a:avLst/>
-          </a:prstGeom>
-          <a:noFill/>
-          <a:ln w="19050" cap="flat" cmpd="sng">
-            <a:solidFill>
-              <a:schemeClr val="accent1"/>
-            </a:solidFill>
-            <a:prstDash val="solid"/>
-            <a:round/>
-            <a:headEnd type="none" w="med" len="med"/>
-            <a:tailEnd type="none" w="med" len="med"/>
-          </a:ln>
-        </p:spPr>
-      </p:cxnSp>
-      <p:cxnSp>
-        <p:nvCxnSpPr>
-          <p:cNvPr id="7" name="Google Shape;181;p32">
-            <a:extLst>
-              <a:ext uri="{FF2B5EF4-FFF2-40B4-BE49-F238E27FC236}">
-                <a16:creationId xmlns:a16="http://schemas.microsoft.com/office/drawing/2014/main" id="{B99263AB-A4F5-4E49-AE7F-761BDE140E7D}"/>
-              </a:ext>
-            </a:extLst>
-          </p:cNvPr>
-          <p:cNvCxnSpPr/>
-          <p:nvPr/>
-        </p:nvCxnSpPr>
-        <p:spPr>
-          <a:xfrm rot="10800000">
-            <a:off x="4847631" y="5455878"/>
-            <a:ext cx="366000" cy="0"/>
-          </a:xfrm>
-          <a:prstGeom prst="straightConnector1">
-            <a:avLst/>
-          </a:prstGeom>
-          <a:noFill/>
-          <a:ln w="19050" cap="flat" cmpd="sng">
-            <a:solidFill>
-              <a:schemeClr val="accent1"/>
-            </a:solidFill>
-            <a:prstDash val="solid"/>
-            <a:round/>
-            <a:headEnd type="none" w="med" len="med"/>
-            <a:tailEnd type="none" w="med" len="med"/>
-          </a:ln>
-        </p:spPr>
-      </p:cxnSp>
-      <p:sp>
-        <p:nvSpPr>
-          <p:cNvPr id="8" name="Google Shape;173;p32">
-            <a:extLst>
-              <a:ext uri="{FF2B5EF4-FFF2-40B4-BE49-F238E27FC236}">
-                <a16:creationId xmlns:a16="http://schemas.microsoft.com/office/drawing/2014/main" id="{59DC8F83-EC2B-4C3F-8303-4E92717D5388}"/>
-              </a:ext>
-            </a:extLst>
-          </p:cNvPr>
-          <p:cNvSpPr txBox="1">
-            <a:spLocks/>
-          </p:cNvSpPr>
-          <p:nvPr/>
-        </p:nvSpPr>
-        <p:spPr>
-          <a:xfrm>
-            <a:off x="4137794" y="3529571"/>
-            <a:ext cx="1160400" cy="577800"/>
-          </a:xfrm>
-          <a:prstGeom prst="rect">
-            <a:avLst/>
-          </a:prstGeom>
-        </p:spPr>
-        <p:txBody>
-          <a:bodyPr spcFirstLastPara="1" wrap="square" lIns="91425" tIns="91425" rIns="91425" bIns="91425" anchor="ctr" anchorCtr="0">
-            <a:noAutofit/>
-          </a:bodyPr>
-          <a:lstStyle>
-            <a:lvl1pPr algn="l" defTabSz="914400" rtl="0" eaLnBrk="1" latinLnBrk="0" hangingPunct="1">
-              <a:lnSpc>
-                <a:spcPct val="90000"/>
-              </a:lnSpc>
-              <a:spcBef>
-                <a:spcPct val="0"/>
-              </a:spcBef>
-              <a:buNone/>
-              <a:defRPr sz="4400" kern="1200">
-                <a:solidFill>
-                  <a:schemeClr val="tx1"/>
-                </a:solidFill>
-                <a:latin typeface="+mj-lt"/>
-                <a:ea typeface="+mj-ea"/>
-                <a:cs typeface="+mj-cs"/>
-              </a:defRPr>
-            </a:lvl1pPr>
-          </a:lstStyle>
-          <a:p>
-            <a:pPr>
-              <a:spcBef>
-                <a:spcPts val="0"/>
-              </a:spcBef>
-            </a:pPr>
-            <a:r>
-              <a:rPr lang="en" dirty="0"/>
-              <a:t>02</a:t>
-            </a:r>
-          </a:p>
-        </p:txBody>
-      </p:sp>
-      <p:sp>
-        <p:nvSpPr>
-          <p:cNvPr id="9" name="content3">
-            <a:extLst>
-              <a:ext uri="{FF2B5EF4-FFF2-40B4-BE49-F238E27FC236}">
-                <a16:creationId xmlns:a16="http://schemas.microsoft.com/office/drawing/2014/main" id="{87510014-2DBF-4A05-807A-5F40DAB03A54}"/>
+                <a16:creationId xmlns:a16="http://schemas.microsoft.com/office/drawing/2014/main" id="{4CFE2BC8-54A5-407E-B141-B5EC04BD3417}"/>
               </a:ext>
             </a:extLst>
           </p:cNvPr>
@@ -4045,8 +3438,8 @@
         </p:nvSpPr>
         <p:spPr>
           <a:xfrm>
-            <a:off x="737805" y="5355452"/>
-            <a:ext cx="4144346" cy="646331"/>
+            <a:off x="382842" y="2321170"/>
+            <a:ext cx="8588880" cy="646331"/>
           </a:xfrm>
           <a:prstGeom prst="rect">
             <a:avLst/>
@@ -4065,17 +3458,17 @@
           <a:lstStyle/>
           <a:p>
             <a:r>
-              <a:t>Analysts predict that Swiggy's focus on innovation and service quality may help it close the gap further, potentially reaching 42% by Q1 2025.</a:t>
-            </a:r>
-          </a:p>
-        </p:txBody>
-      </p:sp>
-      <p:sp>
-        <p:nvSpPr>
-          <p:cNvPr id="10" name="head3">
+              <a:t>BYD sold approximately 3 million cars in 2023, with a forecast of 4 million, while Tesla experienced a year-over-year sales decline in early 2024.</a:t>
+            </a:r>
+          </a:p>
+        </p:txBody>
+      </p:sp>
+      <p:sp>
+        <p:nvSpPr>
+          <p:cNvPr id="3" name="head1">
             <a:extLst>
               <a:ext uri="{FF2B5EF4-FFF2-40B4-BE49-F238E27FC236}">
-                <a16:creationId xmlns:a16="http://schemas.microsoft.com/office/drawing/2014/main" id="{4CDE91AD-7D68-479F-B878-760D6B57DF98}"/>
+                <a16:creationId xmlns:a16="http://schemas.microsoft.com/office/drawing/2014/main" id="{AF43DD1A-697B-4E09-8F47-DB6EB5F90E42}"/>
               </a:ext>
             </a:extLst>
           </p:cNvPr>
@@ -4084,8 +3477,8 @@
         </p:nvSpPr>
         <p:spPr>
           <a:xfrm>
-            <a:off x="737805" y="4770677"/>
-            <a:ext cx="4144346" cy="584775"/>
+            <a:off x="382842" y="1659451"/>
+            <a:ext cx="8588880" cy="646331"/>
           </a:xfrm>
           <a:prstGeom prst="rect">
             <a:avLst/>
@@ -4099,17 +3492,17 @@
           <a:lstStyle/>
           <a:p>
             <a:r>
-              <a:t>Future Projections</a:t>
-            </a:r>
-          </a:p>
-        </p:txBody>
-      </p:sp>
-      <p:sp>
-        <p:nvSpPr>
-          <p:cNvPr id="11" name="content2">
+              <a:t>Sales Performance</a:t>
+            </a:r>
+          </a:p>
+        </p:txBody>
+      </p:sp>
+      <p:sp>
+        <p:nvSpPr>
+          <p:cNvPr id="5" name="content2">
             <a:extLst>
               <a:ext uri="{FF2B5EF4-FFF2-40B4-BE49-F238E27FC236}">
-                <a16:creationId xmlns:a16="http://schemas.microsoft.com/office/drawing/2014/main" id="{5DFB1118-D534-4F23-8272-FB69C2E9049D}"/>
+                <a16:creationId xmlns:a16="http://schemas.microsoft.com/office/drawing/2014/main" id="{0114294D-3C82-4496-9578-DE3D20CA1765}"/>
               </a:ext>
             </a:extLst>
           </p:cNvPr>
@@ -4118,8 +3511,8 @@
         </p:nvSpPr>
         <p:spPr>
           <a:xfrm>
-            <a:off x="5968367" y="3751471"/>
-            <a:ext cx="4144346" cy="646331"/>
+            <a:off x="402712" y="3940580"/>
+            <a:ext cx="8569010" cy="646331"/>
           </a:xfrm>
           <a:prstGeom prst="rect">
             <a:avLst/>
@@ -4138,17 +3531,17 @@
           <a:lstStyle/>
           <a:p>
             <a:r>
-              <a:t>The gap between Zomato and Swiggy widened in 2023, with Zomato at 55% and Swiggy at 37%. However, Swiggy has shown signs of recovery, regaining some market share to reach 40% in 2024.</a:t>
-            </a:r>
-          </a:p>
-        </p:txBody>
-      </p:sp>
-      <p:sp>
-        <p:nvSpPr>
-          <p:cNvPr id="12" name="head2">
+              <a:t>BYD drives down costs through vertical integration, enhancing its competitive edge in the EV market.</a:t>
+            </a:r>
+          </a:p>
+        </p:txBody>
+      </p:sp>
+      <p:sp>
+        <p:nvSpPr>
+          <p:cNvPr id="6" name="head2">
             <a:extLst>
               <a:ext uri="{FF2B5EF4-FFF2-40B4-BE49-F238E27FC236}">
-                <a16:creationId xmlns:a16="http://schemas.microsoft.com/office/drawing/2014/main" id="{3E071FFE-7960-4952-BF3A-0FE9A5FDB4EA}"/>
+                <a16:creationId xmlns:a16="http://schemas.microsoft.com/office/drawing/2014/main" id="{EC54FAE9-D0C9-4E6D-BD92-BE588E00A0E5}"/>
               </a:ext>
             </a:extLst>
           </p:cNvPr>
@@ -4157,8 +3550,8 @@
         </p:nvSpPr>
         <p:spPr>
           <a:xfrm>
-            <a:off x="5968367" y="3166696"/>
-            <a:ext cx="4144346" cy="584775"/>
+            <a:off x="388238" y="3281321"/>
+            <a:ext cx="8583484" cy="646331"/>
           </a:xfrm>
           <a:prstGeom prst="rect">
             <a:avLst/>
@@ -4172,17 +3565,17 @@
           <a:lstStyle/>
           <a:p>
             <a:r>
-              <a:t>Recent Trends</a:t>
-            </a:r>
-          </a:p>
-        </p:txBody>
-      </p:sp>
-      <p:sp>
-        <p:nvSpPr>
-          <p:cNvPr id="13" name="content1">
+              <a:t>Vertical Integration</a:t>
+            </a:r>
+          </a:p>
+        </p:txBody>
+      </p:sp>
+      <p:sp>
+        <p:nvSpPr>
+          <p:cNvPr id="7" name="content3">
             <a:extLst>
               <a:ext uri="{FF2B5EF4-FFF2-40B4-BE49-F238E27FC236}">
-                <a16:creationId xmlns:a16="http://schemas.microsoft.com/office/drawing/2014/main" id="{0D56670D-A85A-448F-818D-6D415FB1A2AD}"/>
+                <a16:creationId xmlns:a16="http://schemas.microsoft.com/office/drawing/2014/main" id="{BAB09B8F-FCBE-446C-89AD-F3E542DDA470}"/>
               </a:ext>
             </a:extLst>
           </p:cNvPr>
@@ -4191,8 +3584,8 @@
         </p:nvSpPr>
         <p:spPr>
           <a:xfrm>
-            <a:off x="737805" y="2098358"/>
-            <a:ext cx="4144346" cy="646331"/>
+            <a:off x="382842" y="5566061"/>
+            <a:ext cx="8583484" cy="646331"/>
           </a:xfrm>
           <a:prstGeom prst="rect">
             <a:avLst/>
@@ -4211,17 +3604,17 @@
           <a:lstStyle/>
           <a:p>
             <a:r>
-              <a:t>In 2020, both companies had nearly equal market shares of around 45%. However, Zomato's strategic moves have allowed it to increase its share significantly, reaching 58% by 2024.</a:t>
-            </a:r>
-          </a:p>
-        </p:txBody>
-      </p:sp>
-      <p:sp>
-        <p:nvSpPr>
-          <p:cNvPr id="14" name="head1">
+              <a:t>BYD is one of the largest battery manufacturers, contributing to a significant cost advantage in China's EV sector.</a:t>
+            </a:r>
+          </a:p>
+        </p:txBody>
+      </p:sp>
+      <p:sp>
+        <p:nvSpPr>
+          <p:cNvPr id="8" name="head3">
             <a:extLst>
               <a:ext uri="{FF2B5EF4-FFF2-40B4-BE49-F238E27FC236}">
-                <a16:creationId xmlns:a16="http://schemas.microsoft.com/office/drawing/2014/main" id="{9A4C4650-475C-4F06-912B-7A535409FDDC}"/>
+                <a16:creationId xmlns:a16="http://schemas.microsoft.com/office/drawing/2014/main" id="{7F46E3E4-B57E-4E3B-ABC9-C8472D45B500}"/>
               </a:ext>
             </a:extLst>
           </p:cNvPr>
@@ -4230,8 +3623,8 @@
         </p:nvSpPr>
         <p:spPr>
           <a:xfrm>
-            <a:off x="737805" y="1513583"/>
-            <a:ext cx="4144346" cy="584775"/>
+            <a:off x="388238" y="4900731"/>
+            <a:ext cx="8588880" cy="646331"/>
           </a:xfrm>
           <a:prstGeom prst="rect">
             <a:avLst/>
@@ -4245,17 +3638,17 @@
           <a:lstStyle/>
           <a:p>
             <a:r>
-              <a:t>Historical Market Share</a:t>
-            </a:r>
-          </a:p>
-        </p:txBody>
-      </p:sp>
-      <p:sp>
-        <p:nvSpPr>
-          <p:cNvPr id="15" name="subtopic">
+              <a:t>Battery Manufacturing</a:t>
+            </a:r>
+          </a:p>
+        </p:txBody>
+      </p:sp>
+      <p:sp>
+        <p:nvSpPr>
+          <p:cNvPr id="4" name="subtopic">
             <a:extLst>
               <a:ext uri="{FF2B5EF4-FFF2-40B4-BE49-F238E27FC236}">
-                <a16:creationId xmlns:a16="http://schemas.microsoft.com/office/drawing/2014/main" id="{0817A346-3588-46F6-9A91-768330515E36}"/>
+                <a16:creationId xmlns:a16="http://schemas.microsoft.com/office/drawing/2014/main" id="{216BD8E4-BE8C-48D9-AFBB-D6093A341E66}"/>
               </a:ext>
             </a:extLst>
           </p:cNvPr>
@@ -4264,13 +3657,18 @@
         </p:nvSpPr>
         <p:spPr>
           <a:xfrm>
-            <a:off x="318052" y="209886"/>
-            <a:ext cx="10880032" cy="646331"/>
+            <a:off x="382842" y="202185"/>
+            <a:ext cx="10863056" cy="646331"/>
           </a:xfrm>
           <a:prstGeom prst="rect">
             <a:avLst/>
           </a:prstGeom>
           <a:noFill/>
+          <a:ln>
+            <a:solidFill>
+              <a:schemeClr val="bg1"/>
+            </a:solidFill>
+          </a:ln>
         </p:spPr>
         <p:txBody>
           <a:bodyPr wrap="square" rtlCol="0">
@@ -4279,7 +3677,7 @@
           <a:lstStyle/>
           <a:p>
             <a:r>
-              <a:t>Market Share Dynamics: Zomato's Dominance vs. Swiggy's Recovery</a:t>
+              <a:t>Technological Innovations: Comparing EV Technologies and Features</a:t>
             </a:r>
           </a:p>
         </p:txBody>
@@ -4304,317 +3702,10 @@
       <p:grpSpPr/>
       <p:sp>
         <p:nvSpPr>
-          <p:cNvPr id="2" name="Google Shape;171;p32">
+          <p:cNvPr id="2" name="content1">
             <a:extLst>
               <a:ext uri="{FF2B5EF4-FFF2-40B4-BE49-F238E27FC236}">
-                <a16:creationId xmlns:a16="http://schemas.microsoft.com/office/drawing/2014/main" id="{9ACD8CA5-4451-4ED5-B63B-DFEF44E87616}"/>
-              </a:ext>
-            </a:extLst>
-          </p:cNvPr>
-          <p:cNvSpPr txBox="1">
-            <a:spLocks/>
-          </p:cNvSpPr>
-          <p:nvPr/>
-        </p:nvSpPr>
-        <p:spPr>
-          <a:xfrm>
-            <a:off x="5394900" y="1801287"/>
-            <a:ext cx="1160400" cy="577800"/>
-          </a:xfrm>
-          <a:prstGeom prst="rect">
-            <a:avLst/>
-          </a:prstGeom>
-        </p:spPr>
-        <p:txBody>
-          <a:bodyPr spcFirstLastPara="1" wrap="square" lIns="91425" tIns="91425" rIns="91425" bIns="91425" anchor="ctr" anchorCtr="0">
-            <a:noAutofit/>
-          </a:bodyPr>
-          <a:lstStyle>
-            <a:lvl1pPr algn="l" defTabSz="914400" rtl="0" eaLnBrk="1" latinLnBrk="0" hangingPunct="1">
-              <a:lnSpc>
-                <a:spcPct val="90000"/>
-              </a:lnSpc>
-              <a:spcBef>
-                <a:spcPct val="0"/>
-              </a:spcBef>
-              <a:buNone/>
-              <a:defRPr sz="4400" kern="1200">
-                <a:solidFill>
-                  <a:schemeClr val="tx1"/>
-                </a:solidFill>
-                <a:latin typeface="+mj-lt"/>
-                <a:ea typeface="+mj-ea"/>
-                <a:cs typeface="+mj-cs"/>
-              </a:defRPr>
-            </a:lvl1pPr>
-          </a:lstStyle>
-          <a:p>
-            <a:pPr>
-              <a:spcBef>
-                <a:spcPts val="0"/>
-              </a:spcBef>
-            </a:pPr>
-            <a:r>
-              <a:rPr lang="en" dirty="0"/>
-              <a:t>01</a:t>
-            </a:r>
-          </a:p>
-        </p:txBody>
-      </p:sp>
-      <p:sp>
-        <p:nvSpPr>
-          <p:cNvPr id="3" name="Google Shape;173;p32">
-            <a:extLst>
-              <a:ext uri="{FF2B5EF4-FFF2-40B4-BE49-F238E27FC236}">
-                <a16:creationId xmlns:a16="http://schemas.microsoft.com/office/drawing/2014/main" id="{21EBBC7F-3BF9-411A-AC9F-280CDA1EBF71}"/>
-              </a:ext>
-            </a:extLst>
-          </p:cNvPr>
-          <p:cNvSpPr txBox="1">
-            <a:spLocks/>
-          </p:cNvSpPr>
-          <p:nvPr/>
-        </p:nvSpPr>
-        <p:spPr>
-          <a:xfrm>
-            <a:off x="5392252" y="5174471"/>
-            <a:ext cx="1160400" cy="577800"/>
-          </a:xfrm>
-          <a:prstGeom prst="rect">
-            <a:avLst/>
-          </a:prstGeom>
-        </p:spPr>
-        <p:txBody>
-          <a:bodyPr spcFirstLastPara="1" wrap="square" lIns="91425" tIns="91425" rIns="91425" bIns="91425" anchor="ctr" anchorCtr="0">
-            <a:noAutofit/>
-          </a:bodyPr>
-          <a:lstStyle>
-            <a:lvl1pPr algn="l" defTabSz="914400" rtl="0" eaLnBrk="1" latinLnBrk="0" hangingPunct="1">
-              <a:lnSpc>
-                <a:spcPct val="90000"/>
-              </a:lnSpc>
-              <a:spcBef>
-                <a:spcPct val="0"/>
-              </a:spcBef>
-              <a:buNone/>
-              <a:defRPr sz="4400" kern="1200">
-                <a:solidFill>
-                  <a:schemeClr val="tx1"/>
-                </a:solidFill>
-                <a:latin typeface="+mj-lt"/>
-                <a:ea typeface="+mj-ea"/>
-                <a:cs typeface="+mj-cs"/>
-              </a:defRPr>
-            </a:lvl1pPr>
-          </a:lstStyle>
-          <a:p>
-            <a:pPr>
-              <a:spcBef>
-                <a:spcPts val="0"/>
-              </a:spcBef>
-            </a:pPr>
-            <a:r>
-              <a:rPr lang="en" dirty="0"/>
-              <a:t>03</a:t>
-            </a:r>
-          </a:p>
-        </p:txBody>
-      </p:sp>
-      <p:cxnSp>
-        <p:nvCxnSpPr>
-          <p:cNvPr id="4" name="Google Shape;178;p32">
-            <a:extLst>
-              <a:ext uri="{FF2B5EF4-FFF2-40B4-BE49-F238E27FC236}">
-                <a16:creationId xmlns:a16="http://schemas.microsoft.com/office/drawing/2014/main" id="{4D0AF5DD-3304-47B9-9DBD-552A0C712BFC}"/>
-              </a:ext>
-            </a:extLst>
-          </p:cNvPr>
-          <p:cNvCxnSpPr>
-            <a:cxnSpLocks/>
-          </p:cNvCxnSpPr>
-          <p:nvPr/>
-        </p:nvCxnSpPr>
-        <p:spPr>
-          <a:xfrm>
-            <a:off x="5243772" y="1237405"/>
-            <a:ext cx="0" cy="5448907"/>
-          </a:xfrm>
-          <a:prstGeom prst="straightConnector1">
-            <a:avLst/>
-          </a:prstGeom>
-          <a:noFill/>
-          <a:ln w="19050" cap="flat" cmpd="sng">
-            <a:solidFill>
-              <a:schemeClr val="accent1"/>
-            </a:solidFill>
-            <a:prstDash val="solid"/>
-            <a:round/>
-            <a:headEnd type="none" w="med" len="med"/>
-            <a:tailEnd type="none" w="med" len="med"/>
-          </a:ln>
-        </p:spPr>
-      </p:cxnSp>
-      <p:cxnSp>
-        <p:nvCxnSpPr>
-          <p:cNvPr id="5" name="Google Shape;179;p32">
-            <a:extLst>
-              <a:ext uri="{FF2B5EF4-FFF2-40B4-BE49-F238E27FC236}">
-                <a16:creationId xmlns:a16="http://schemas.microsoft.com/office/drawing/2014/main" id="{08C8FDE0-2039-417A-8014-7FD5C8720338}"/>
-              </a:ext>
-            </a:extLst>
-          </p:cNvPr>
-          <p:cNvCxnSpPr/>
-          <p:nvPr/>
-        </p:nvCxnSpPr>
-        <p:spPr>
-          <a:xfrm rot="10800000">
-            <a:off x="4888884" y="2069642"/>
-            <a:ext cx="366000" cy="0"/>
-          </a:xfrm>
-          <a:prstGeom prst="straightConnector1">
-            <a:avLst/>
-          </a:prstGeom>
-          <a:noFill/>
-          <a:ln w="19050" cap="flat" cmpd="sng">
-            <a:solidFill>
-              <a:schemeClr val="accent1"/>
-            </a:solidFill>
-            <a:prstDash val="solid"/>
-            <a:round/>
-            <a:headEnd type="none" w="med" len="med"/>
-            <a:tailEnd type="none" w="med" len="med"/>
-          </a:ln>
-        </p:spPr>
-      </p:cxnSp>
-      <p:cxnSp>
-        <p:nvCxnSpPr>
-          <p:cNvPr id="6" name="Google Shape;180;p32">
-            <a:extLst>
-              <a:ext uri="{FF2B5EF4-FFF2-40B4-BE49-F238E27FC236}">
-                <a16:creationId xmlns:a16="http://schemas.microsoft.com/office/drawing/2014/main" id="{9C247B9B-3CE8-4CA5-BC6D-ED5951DC35A0}"/>
-              </a:ext>
-            </a:extLst>
-          </p:cNvPr>
-          <p:cNvCxnSpPr/>
-          <p:nvPr/>
-        </p:nvCxnSpPr>
-        <p:spPr>
-          <a:xfrm rot="10800000">
-            <a:off x="5243772" y="3757261"/>
-            <a:ext cx="366000" cy="0"/>
-          </a:xfrm>
-          <a:prstGeom prst="straightConnector1">
-            <a:avLst/>
-          </a:prstGeom>
-          <a:noFill/>
-          <a:ln w="19050" cap="flat" cmpd="sng">
-            <a:solidFill>
-              <a:schemeClr val="accent1"/>
-            </a:solidFill>
-            <a:prstDash val="solid"/>
-            <a:round/>
-            <a:headEnd type="none" w="med" len="med"/>
-            <a:tailEnd type="none" w="med" len="med"/>
-          </a:ln>
-        </p:spPr>
-      </p:cxnSp>
-      <p:cxnSp>
-        <p:nvCxnSpPr>
-          <p:cNvPr id="7" name="Google Shape;181;p32">
-            <a:extLst>
-              <a:ext uri="{FF2B5EF4-FFF2-40B4-BE49-F238E27FC236}">
-                <a16:creationId xmlns:a16="http://schemas.microsoft.com/office/drawing/2014/main" id="{B99263AB-A4F5-4E49-AE7F-761BDE140E7D}"/>
-              </a:ext>
-            </a:extLst>
-          </p:cNvPr>
-          <p:cNvCxnSpPr/>
-          <p:nvPr/>
-        </p:nvCxnSpPr>
-        <p:spPr>
-          <a:xfrm rot="10800000">
-            <a:off x="4847631" y="5455878"/>
-            <a:ext cx="366000" cy="0"/>
-          </a:xfrm>
-          <a:prstGeom prst="straightConnector1">
-            <a:avLst/>
-          </a:prstGeom>
-          <a:noFill/>
-          <a:ln w="19050" cap="flat" cmpd="sng">
-            <a:solidFill>
-              <a:schemeClr val="accent1"/>
-            </a:solidFill>
-            <a:prstDash val="solid"/>
-            <a:round/>
-            <a:headEnd type="none" w="med" len="med"/>
-            <a:tailEnd type="none" w="med" len="med"/>
-          </a:ln>
-        </p:spPr>
-      </p:cxnSp>
-      <p:sp>
-        <p:nvSpPr>
-          <p:cNvPr id="8" name="Google Shape;173;p32">
-            <a:extLst>
-              <a:ext uri="{FF2B5EF4-FFF2-40B4-BE49-F238E27FC236}">
-                <a16:creationId xmlns:a16="http://schemas.microsoft.com/office/drawing/2014/main" id="{59DC8F83-EC2B-4C3F-8303-4E92717D5388}"/>
-              </a:ext>
-            </a:extLst>
-          </p:cNvPr>
-          <p:cNvSpPr txBox="1">
-            <a:spLocks/>
-          </p:cNvSpPr>
-          <p:nvPr/>
-        </p:nvSpPr>
-        <p:spPr>
-          <a:xfrm>
-            <a:off x="4137794" y="3529571"/>
-            <a:ext cx="1160400" cy="577800"/>
-          </a:xfrm>
-          <a:prstGeom prst="rect">
-            <a:avLst/>
-          </a:prstGeom>
-        </p:spPr>
-        <p:txBody>
-          <a:bodyPr spcFirstLastPara="1" wrap="square" lIns="91425" tIns="91425" rIns="91425" bIns="91425" anchor="ctr" anchorCtr="0">
-            <a:noAutofit/>
-          </a:bodyPr>
-          <a:lstStyle>
-            <a:lvl1pPr algn="l" defTabSz="914400" rtl="0" eaLnBrk="1" latinLnBrk="0" hangingPunct="1">
-              <a:lnSpc>
-                <a:spcPct val="90000"/>
-              </a:lnSpc>
-              <a:spcBef>
-                <a:spcPct val="0"/>
-              </a:spcBef>
-              <a:buNone/>
-              <a:defRPr sz="4400" kern="1200">
-                <a:solidFill>
-                  <a:schemeClr val="tx1"/>
-                </a:solidFill>
-                <a:latin typeface="+mj-lt"/>
-                <a:ea typeface="+mj-ea"/>
-                <a:cs typeface="+mj-cs"/>
-              </a:defRPr>
-            </a:lvl1pPr>
-          </a:lstStyle>
-          <a:p>
-            <a:pPr>
-              <a:spcBef>
-                <a:spcPts val="0"/>
-              </a:spcBef>
-            </a:pPr>
-            <a:r>
-              <a:rPr lang="en" dirty="0"/>
-              <a:t>02</a:t>
-            </a:r>
-          </a:p>
-        </p:txBody>
-      </p:sp>
-      <p:sp>
-        <p:nvSpPr>
-          <p:cNvPr id="9" name="content3">
-            <a:extLst>
-              <a:ext uri="{FF2B5EF4-FFF2-40B4-BE49-F238E27FC236}">
-                <a16:creationId xmlns:a16="http://schemas.microsoft.com/office/drawing/2014/main" id="{87510014-2DBF-4A05-807A-5F40DAB03A54}"/>
+                <a16:creationId xmlns:a16="http://schemas.microsoft.com/office/drawing/2014/main" id="{4CFE2BC8-54A5-407E-B141-B5EC04BD3417}"/>
               </a:ext>
             </a:extLst>
           </p:cNvPr>
@@ -4623,8 +3714,8 @@
         </p:nvSpPr>
         <p:spPr>
           <a:xfrm>
-            <a:off x="737805" y="5355452"/>
-            <a:ext cx="4144346" cy="646331"/>
+            <a:off x="382842" y="2321170"/>
+            <a:ext cx="8588880" cy="646331"/>
           </a:xfrm>
           <a:prstGeom prst="rect">
             <a:avLst/>
@@ -4643,17 +3734,17 @@
           <a:lstStyle/>
           <a:p>
             <a:r>
-              <a:t>Zomato's market capitalization stands at ₹2.5 lakh crore, while Swiggy's is at ₹72,000 crore, indicating a stark contrast in financial health and investor confidence.</a:t>
-            </a:r>
-          </a:p>
-        </p:txBody>
-      </p:sp>
-      <p:sp>
-        <p:nvSpPr>
-          <p:cNvPr id="10" name="head3">
+              <a:t>BYD surpassed Tesla in production volume in 2024, producing 1,777,965 battery electric vehicles (BEVs).</a:t>
+            </a:r>
+          </a:p>
+        </p:txBody>
+      </p:sp>
+      <p:sp>
+        <p:nvSpPr>
+          <p:cNvPr id="3" name="head1">
             <a:extLst>
               <a:ext uri="{FF2B5EF4-FFF2-40B4-BE49-F238E27FC236}">
-                <a16:creationId xmlns:a16="http://schemas.microsoft.com/office/drawing/2014/main" id="{4CDE91AD-7D68-479F-B878-760D6B57DF98}"/>
+                <a16:creationId xmlns:a16="http://schemas.microsoft.com/office/drawing/2014/main" id="{AF43DD1A-697B-4E09-8F47-DB6EB5F90E42}"/>
               </a:ext>
             </a:extLst>
           </p:cNvPr>
@@ -4662,8 +3753,8 @@
         </p:nvSpPr>
         <p:spPr>
           <a:xfrm>
-            <a:off x="737805" y="4770677"/>
-            <a:ext cx="4144346" cy="584775"/>
+            <a:off x="382842" y="1659451"/>
+            <a:ext cx="8588880" cy="646331"/>
           </a:xfrm>
           <a:prstGeom prst="rect">
             <a:avLst/>
@@ -4677,17 +3768,17 @@
           <a:lstStyle/>
           <a:p>
             <a:r>
-              <a:t>Market Capitalization</a:t>
-            </a:r>
-          </a:p>
-        </p:txBody>
-      </p:sp>
-      <p:sp>
-        <p:nvSpPr>
-          <p:cNvPr id="11" name="content2">
+              <a:t>Production Volume</a:t>
+            </a:r>
+          </a:p>
+        </p:txBody>
+      </p:sp>
+      <p:sp>
+        <p:nvSpPr>
+          <p:cNvPr id="5" name="content2">
             <a:extLst>
               <a:ext uri="{FF2B5EF4-FFF2-40B4-BE49-F238E27FC236}">
-                <a16:creationId xmlns:a16="http://schemas.microsoft.com/office/drawing/2014/main" id="{5DFB1118-D534-4F23-8272-FB69C2E9049D}"/>
+                <a16:creationId xmlns:a16="http://schemas.microsoft.com/office/drawing/2014/main" id="{0114294D-3C82-4496-9578-DE3D20CA1765}"/>
               </a:ext>
             </a:extLst>
           </p:cNvPr>
@@ -4696,8 +3787,8 @@
         </p:nvSpPr>
         <p:spPr>
           <a:xfrm>
-            <a:off x="5968367" y="3751471"/>
-            <a:ext cx="4144346" cy="646331"/>
+            <a:off x="402712" y="3940580"/>
+            <a:ext cx="8569010" cy="646331"/>
           </a:xfrm>
           <a:prstGeom prst="rect">
             <a:avLst/>
@@ -4716,17 +3807,17 @@
           <a:lstStyle/>
           <a:p>
             <a:r>
-              <a:t>Swiggy has made significant strides in reducing its losses, achieving a 43% reduction in FY24 and a 26% year-over-year growth in Gross Order Value (GOV) for its quick commerce business.</a:t>
-            </a:r>
-          </a:p>
-        </p:txBody>
-      </p:sp>
-      <p:sp>
-        <p:nvSpPr>
-          <p:cNvPr id="12" name="head2">
+              <a:t>Tesla led in sales with 1.79 million units sold in 2024, slightly ahead of BYD's 1.76 million units.</a:t>
+            </a:r>
+          </a:p>
+        </p:txBody>
+      </p:sp>
+      <p:sp>
+        <p:nvSpPr>
+          <p:cNvPr id="6" name="head2">
             <a:extLst>
               <a:ext uri="{FF2B5EF4-FFF2-40B4-BE49-F238E27FC236}">
-                <a16:creationId xmlns:a16="http://schemas.microsoft.com/office/drawing/2014/main" id="{3E071FFE-7960-4952-BF3A-0FE9A5FDB4EA}"/>
+                <a16:creationId xmlns:a16="http://schemas.microsoft.com/office/drawing/2014/main" id="{EC54FAE9-D0C9-4E6D-BD92-BE588E00A0E5}"/>
               </a:ext>
             </a:extLst>
           </p:cNvPr>
@@ -4735,8 +3826,8 @@
         </p:nvSpPr>
         <p:spPr>
           <a:xfrm>
-            <a:off x="5968367" y="3166696"/>
-            <a:ext cx="4144346" cy="584775"/>
+            <a:off x="388238" y="3281321"/>
+            <a:ext cx="8583484" cy="646331"/>
           </a:xfrm>
           <a:prstGeom prst="rect">
             <a:avLst/>
@@ -4750,17 +3841,17 @@
           <a:lstStyle/>
           <a:p>
             <a:r>
-              <a:t>Loss Reduction</a:t>
-            </a:r>
-          </a:p>
-        </p:txBody>
-      </p:sp>
-      <p:sp>
-        <p:nvSpPr>
-          <p:cNvPr id="13" name="content1">
+              <a:t>Sales Performance</a:t>
+            </a:r>
+          </a:p>
+        </p:txBody>
+      </p:sp>
+      <p:sp>
+        <p:nvSpPr>
+          <p:cNvPr id="7" name="content3">
             <a:extLst>
               <a:ext uri="{FF2B5EF4-FFF2-40B4-BE49-F238E27FC236}">
-                <a16:creationId xmlns:a16="http://schemas.microsoft.com/office/drawing/2014/main" id="{0D56670D-A85A-448F-818D-6D415FB1A2AD}"/>
+                <a16:creationId xmlns:a16="http://schemas.microsoft.com/office/drawing/2014/main" id="{BAB09B8F-FCBE-446C-89AD-F3E542DDA470}"/>
               </a:ext>
             </a:extLst>
           </p:cNvPr>
@@ -4769,8 +3860,8 @@
         </p:nvSpPr>
         <p:spPr>
           <a:xfrm>
-            <a:off x="737805" y="2098358"/>
-            <a:ext cx="4144346" cy="646331"/>
+            <a:off x="382842" y="5566061"/>
+            <a:ext cx="8583484" cy="646331"/>
           </a:xfrm>
           <a:prstGeom prst="rect">
             <a:avLst/>
@@ -4789,17 +3880,17 @@
           <a:lstStyle/>
           <a:p>
             <a:r>
-              <a:t>Zomato has demonstrated a superior revenue CAGR of 45% compared to Swiggy's 35% from FY22 to FY24, reflecting its effective growth strategies.</a:t>
-            </a:r>
-          </a:p>
-        </p:txBody>
-      </p:sp>
-      <p:sp>
-        <p:nvSpPr>
-          <p:cNvPr id="14" name="head1">
+              <a:t>BYD is projected to become the sole global sales leader in the electric vehicle sector by 2025, overtaking Tesla.</a:t>
+            </a:r>
+          </a:p>
+        </p:txBody>
+      </p:sp>
+      <p:sp>
+        <p:nvSpPr>
+          <p:cNvPr id="8" name="head3">
             <a:extLst>
               <a:ext uri="{FF2B5EF4-FFF2-40B4-BE49-F238E27FC236}">
-                <a16:creationId xmlns:a16="http://schemas.microsoft.com/office/drawing/2014/main" id="{9A4C4650-475C-4F06-912B-7A535409FDDC}"/>
+                <a16:creationId xmlns:a16="http://schemas.microsoft.com/office/drawing/2014/main" id="{7F46E3E4-B57E-4E3B-ABC9-C8472D45B500}"/>
               </a:ext>
             </a:extLst>
           </p:cNvPr>
@@ -4808,8 +3899,8 @@
         </p:nvSpPr>
         <p:spPr>
           <a:xfrm>
-            <a:off x="737805" y="1513583"/>
-            <a:ext cx="4144346" cy="584775"/>
+            <a:off x="388238" y="4900731"/>
+            <a:ext cx="8588880" cy="646331"/>
           </a:xfrm>
           <a:prstGeom prst="rect">
             <a:avLst/>
@@ -4823,17 +3914,17 @@
           <a:lstStyle/>
           <a:p>
             <a:r>
-              <a:t>Revenue Growth</a:t>
-            </a:r>
-          </a:p>
-        </p:txBody>
-      </p:sp>
-      <p:sp>
-        <p:nvSpPr>
-          <p:cNvPr id="15" name="subtopic">
+              <a:t>Market Leadership Shift</a:t>
+            </a:r>
+          </a:p>
+        </p:txBody>
+      </p:sp>
+      <p:sp>
+        <p:nvSpPr>
+          <p:cNvPr id="4" name="subtopic">
             <a:extLst>
               <a:ext uri="{FF2B5EF4-FFF2-40B4-BE49-F238E27FC236}">
-                <a16:creationId xmlns:a16="http://schemas.microsoft.com/office/drawing/2014/main" id="{0817A346-3588-46F6-9A91-768330515E36}"/>
+                <a16:creationId xmlns:a16="http://schemas.microsoft.com/office/drawing/2014/main" id="{216BD8E4-BE8C-48D9-AFBB-D6093A341E66}"/>
               </a:ext>
             </a:extLst>
           </p:cNvPr>
@@ -4842,13 +3933,18 @@
         </p:nvSpPr>
         <p:spPr>
           <a:xfrm>
-            <a:off x="318052" y="209886"/>
-            <a:ext cx="10880032" cy="646331"/>
+            <a:off x="382842" y="202185"/>
+            <a:ext cx="10863056" cy="646331"/>
           </a:xfrm>
           <a:prstGeom prst="rect">
             <a:avLst/>
           </a:prstGeom>
           <a:noFill/>
+          <a:ln>
+            <a:solidFill>
+              <a:schemeClr val="bg1"/>
+            </a:solidFill>
+          </a:ln>
         </p:spPr>
         <p:txBody>
           <a:bodyPr wrap="square" rtlCol="0">
@@ -4857,7 +3953,7 @@
           <a:lstStyle/>
           <a:p>
             <a:r>
-              <a:t>Financial Performance: Profitability Trends and Growth Metrics</a:t>
+              <a:t>Performance Metrics: Sales, Production, and Market Share Analysis</a:t>
             </a:r>
           </a:p>
         </p:txBody>
@@ -4882,317 +3978,10 @@
       <p:grpSpPr/>
       <p:sp>
         <p:nvSpPr>
-          <p:cNvPr id="2" name="Google Shape;171;p32">
+          <p:cNvPr id="2" name="content1">
             <a:extLst>
               <a:ext uri="{FF2B5EF4-FFF2-40B4-BE49-F238E27FC236}">
-                <a16:creationId xmlns:a16="http://schemas.microsoft.com/office/drawing/2014/main" id="{9ACD8CA5-4451-4ED5-B63B-DFEF44E87616}"/>
-              </a:ext>
-            </a:extLst>
-          </p:cNvPr>
-          <p:cNvSpPr txBox="1">
-            <a:spLocks/>
-          </p:cNvSpPr>
-          <p:nvPr/>
-        </p:nvSpPr>
-        <p:spPr>
-          <a:xfrm>
-            <a:off x="5394900" y="1801287"/>
-            <a:ext cx="1160400" cy="577800"/>
-          </a:xfrm>
-          <a:prstGeom prst="rect">
-            <a:avLst/>
-          </a:prstGeom>
-        </p:spPr>
-        <p:txBody>
-          <a:bodyPr spcFirstLastPara="1" wrap="square" lIns="91425" tIns="91425" rIns="91425" bIns="91425" anchor="ctr" anchorCtr="0">
-            <a:noAutofit/>
-          </a:bodyPr>
-          <a:lstStyle>
-            <a:lvl1pPr algn="l" defTabSz="914400" rtl="0" eaLnBrk="1" latinLnBrk="0" hangingPunct="1">
-              <a:lnSpc>
-                <a:spcPct val="90000"/>
-              </a:lnSpc>
-              <a:spcBef>
-                <a:spcPct val="0"/>
-              </a:spcBef>
-              <a:buNone/>
-              <a:defRPr sz="4400" kern="1200">
-                <a:solidFill>
-                  <a:schemeClr val="tx1"/>
-                </a:solidFill>
-                <a:latin typeface="+mj-lt"/>
-                <a:ea typeface="+mj-ea"/>
-                <a:cs typeface="+mj-cs"/>
-              </a:defRPr>
-            </a:lvl1pPr>
-          </a:lstStyle>
-          <a:p>
-            <a:pPr>
-              <a:spcBef>
-                <a:spcPts val="0"/>
-              </a:spcBef>
-            </a:pPr>
-            <a:r>
-              <a:rPr lang="en" dirty="0"/>
-              <a:t>01</a:t>
-            </a:r>
-          </a:p>
-        </p:txBody>
-      </p:sp>
-      <p:sp>
-        <p:nvSpPr>
-          <p:cNvPr id="3" name="Google Shape;173;p32">
-            <a:extLst>
-              <a:ext uri="{FF2B5EF4-FFF2-40B4-BE49-F238E27FC236}">
-                <a16:creationId xmlns:a16="http://schemas.microsoft.com/office/drawing/2014/main" id="{21EBBC7F-3BF9-411A-AC9F-280CDA1EBF71}"/>
-              </a:ext>
-            </a:extLst>
-          </p:cNvPr>
-          <p:cNvSpPr txBox="1">
-            <a:spLocks/>
-          </p:cNvSpPr>
-          <p:nvPr/>
-        </p:nvSpPr>
-        <p:spPr>
-          <a:xfrm>
-            <a:off x="5392252" y="5174471"/>
-            <a:ext cx="1160400" cy="577800"/>
-          </a:xfrm>
-          <a:prstGeom prst="rect">
-            <a:avLst/>
-          </a:prstGeom>
-        </p:spPr>
-        <p:txBody>
-          <a:bodyPr spcFirstLastPara="1" wrap="square" lIns="91425" tIns="91425" rIns="91425" bIns="91425" anchor="ctr" anchorCtr="0">
-            <a:noAutofit/>
-          </a:bodyPr>
-          <a:lstStyle>
-            <a:lvl1pPr algn="l" defTabSz="914400" rtl="0" eaLnBrk="1" latinLnBrk="0" hangingPunct="1">
-              <a:lnSpc>
-                <a:spcPct val="90000"/>
-              </a:lnSpc>
-              <a:spcBef>
-                <a:spcPct val="0"/>
-              </a:spcBef>
-              <a:buNone/>
-              <a:defRPr sz="4400" kern="1200">
-                <a:solidFill>
-                  <a:schemeClr val="tx1"/>
-                </a:solidFill>
-                <a:latin typeface="+mj-lt"/>
-                <a:ea typeface="+mj-ea"/>
-                <a:cs typeface="+mj-cs"/>
-              </a:defRPr>
-            </a:lvl1pPr>
-          </a:lstStyle>
-          <a:p>
-            <a:pPr>
-              <a:spcBef>
-                <a:spcPts val="0"/>
-              </a:spcBef>
-            </a:pPr>
-            <a:r>
-              <a:rPr lang="en" dirty="0"/>
-              <a:t>03</a:t>
-            </a:r>
-          </a:p>
-        </p:txBody>
-      </p:sp>
-      <p:cxnSp>
-        <p:nvCxnSpPr>
-          <p:cNvPr id="4" name="Google Shape;178;p32">
-            <a:extLst>
-              <a:ext uri="{FF2B5EF4-FFF2-40B4-BE49-F238E27FC236}">
-                <a16:creationId xmlns:a16="http://schemas.microsoft.com/office/drawing/2014/main" id="{4D0AF5DD-3304-47B9-9DBD-552A0C712BFC}"/>
-              </a:ext>
-            </a:extLst>
-          </p:cNvPr>
-          <p:cNvCxnSpPr>
-            <a:cxnSpLocks/>
-          </p:cNvCxnSpPr>
-          <p:nvPr/>
-        </p:nvCxnSpPr>
-        <p:spPr>
-          <a:xfrm>
-            <a:off x="5243772" y="1237405"/>
-            <a:ext cx="0" cy="5448907"/>
-          </a:xfrm>
-          <a:prstGeom prst="straightConnector1">
-            <a:avLst/>
-          </a:prstGeom>
-          <a:noFill/>
-          <a:ln w="19050" cap="flat" cmpd="sng">
-            <a:solidFill>
-              <a:schemeClr val="accent1"/>
-            </a:solidFill>
-            <a:prstDash val="solid"/>
-            <a:round/>
-            <a:headEnd type="none" w="med" len="med"/>
-            <a:tailEnd type="none" w="med" len="med"/>
-          </a:ln>
-        </p:spPr>
-      </p:cxnSp>
-      <p:cxnSp>
-        <p:nvCxnSpPr>
-          <p:cNvPr id="5" name="Google Shape;179;p32">
-            <a:extLst>
-              <a:ext uri="{FF2B5EF4-FFF2-40B4-BE49-F238E27FC236}">
-                <a16:creationId xmlns:a16="http://schemas.microsoft.com/office/drawing/2014/main" id="{08C8FDE0-2039-417A-8014-7FD5C8720338}"/>
-              </a:ext>
-            </a:extLst>
-          </p:cNvPr>
-          <p:cNvCxnSpPr/>
-          <p:nvPr/>
-        </p:nvCxnSpPr>
-        <p:spPr>
-          <a:xfrm rot="10800000">
-            <a:off x="4888884" y="2069642"/>
-            <a:ext cx="366000" cy="0"/>
-          </a:xfrm>
-          <a:prstGeom prst="straightConnector1">
-            <a:avLst/>
-          </a:prstGeom>
-          <a:noFill/>
-          <a:ln w="19050" cap="flat" cmpd="sng">
-            <a:solidFill>
-              <a:schemeClr val="accent1"/>
-            </a:solidFill>
-            <a:prstDash val="solid"/>
-            <a:round/>
-            <a:headEnd type="none" w="med" len="med"/>
-            <a:tailEnd type="none" w="med" len="med"/>
-          </a:ln>
-        </p:spPr>
-      </p:cxnSp>
-      <p:cxnSp>
-        <p:nvCxnSpPr>
-          <p:cNvPr id="6" name="Google Shape;180;p32">
-            <a:extLst>
-              <a:ext uri="{FF2B5EF4-FFF2-40B4-BE49-F238E27FC236}">
-                <a16:creationId xmlns:a16="http://schemas.microsoft.com/office/drawing/2014/main" id="{9C247B9B-3CE8-4CA5-BC6D-ED5951DC35A0}"/>
-              </a:ext>
-            </a:extLst>
-          </p:cNvPr>
-          <p:cNvCxnSpPr/>
-          <p:nvPr/>
-        </p:nvCxnSpPr>
-        <p:spPr>
-          <a:xfrm rot="10800000">
-            <a:off x="5243772" y="3757261"/>
-            <a:ext cx="366000" cy="0"/>
-          </a:xfrm>
-          <a:prstGeom prst="straightConnector1">
-            <a:avLst/>
-          </a:prstGeom>
-          <a:noFill/>
-          <a:ln w="19050" cap="flat" cmpd="sng">
-            <a:solidFill>
-              <a:schemeClr val="accent1"/>
-            </a:solidFill>
-            <a:prstDash val="solid"/>
-            <a:round/>
-            <a:headEnd type="none" w="med" len="med"/>
-            <a:tailEnd type="none" w="med" len="med"/>
-          </a:ln>
-        </p:spPr>
-      </p:cxnSp>
-      <p:cxnSp>
-        <p:nvCxnSpPr>
-          <p:cNvPr id="7" name="Google Shape;181;p32">
-            <a:extLst>
-              <a:ext uri="{FF2B5EF4-FFF2-40B4-BE49-F238E27FC236}">
-                <a16:creationId xmlns:a16="http://schemas.microsoft.com/office/drawing/2014/main" id="{B99263AB-A4F5-4E49-AE7F-761BDE140E7D}"/>
-              </a:ext>
-            </a:extLst>
-          </p:cNvPr>
-          <p:cNvCxnSpPr/>
-          <p:nvPr/>
-        </p:nvCxnSpPr>
-        <p:spPr>
-          <a:xfrm rot="10800000">
-            <a:off x="4847631" y="5455878"/>
-            <a:ext cx="366000" cy="0"/>
-          </a:xfrm>
-          <a:prstGeom prst="straightConnector1">
-            <a:avLst/>
-          </a:prstGeom>
-          <a:noFill/>
-          <a:ln w="19050" cap="flat" cmpd="sng">
-            <a:solidFill>
-              <a:schemeClr val="accent1"/>
-            </a:solidFill>
-            <a:prstDash val="solid"/>
-            <a:round/>
-            <a:headEnd type="none" w="med" len="med"/>
-            <a:tailEnd type="none" w="med" len="med"/>
-          </a:ln>
-        </p:spPr>
-      </p:cxnSp>
-      <p:sp>
-        <p:nvSpPr>
-          <p:cNvPr id="8" name="Google Shape;173;p32">
-            <a:extLst>
-              <a:ext uri="{FF2B5EF4-FFF2-40B4-BE49-F238E27FC236}">
-                <a16:creationId xmlns:a16="http://schemas.microsoft.com/office/drawing/2014/main" id="{59DC8F83-EC2B-4C3F-8303-4E92717D5388}"/>
-              </a:ext>
-            </a:extLst>
-          </p:cNvPr>
-          <p:cNvSpPr txBox="1">
-            <a:spLocks/>
-          </p:cNvSpPr>
-          <p:nvPr/>
-        </p:nvSpPr>
-        <p:spPr>
-          <a:xfrm>
-            <a:off x="4137794" y="3529571"/>
-            <a:ext cx="1160400" cy="577800"/>
-          </a:xfrm>
-          <a:prstGeom prst="rect">
-            <a:avLst/>
-          </a:prstGeom>
-        </p:spPr>
-        <p:txBody>
-          <a:bodyPr spcFirstLastPara="1" wrap="square" lIns="91425" tIns="91425" rIns="91425" bIns="91425" anchor="ctr" anchorCtr="0">
-            <a:noAutofit/>
-          </a:bodyPr>
-          <a:lstStyle>
-            <a:lvl1pPr algn="l" defTabSz="914400" rtl="0" eaLnBrk="1" latinLnBrk="0" hangingPunct="1">
-              <a:lnSpc>
-                <a:spcPct val="90000"/>
-              </a:lnSpc>
-              <a:spcBef>
-                <a:spcPct val="0"/>
-              </a:spcBef>
-              <a:buNone/>
-              <a:defRPr sz="4400" kern="1200">
-                <a:solidFill>
-                  <a:schemeClr val="tx1"/>
-                </a:solidFill>
-                <a:latin typeface="+mj-lt"/>
-                <a:ea typeface="+mj-ea"/>
-                <a:cs typeface="+mj-cs"/>
-              </a:defRPr>
-            </a:lvl1pPr>
-          </a:lstStyle>
-          <a:p>
-            <a:pPr>
-              <a:spcBef>
-                <a:spcPts val="0"/>
-              </a:spcBef>
-            </a:pPr>
-            <a:r>
-              <a:rPr lang="en" dirty="0"/>
-              <a:t>02</a:t>
-            </a:r>
-          </a:p>
-        </p:txBody>
-      </p:sp>
-      <p:sp>
-        <p:nvSpPr>
-          <p:cNvPr id="9" name="content3">
-            <a:extLst>
-              <a:ext uri="{FF2B5EF4-FFF2-40B4-BE49-F238E27FC236}">
-                <a16:creationId xmlns:a16="http://schemas.microsoft.com/office/drawing/2014/main" id="{87510014-2DBF-4A05-807A-5F40DAB03A54}"/>
+                <a16:creationId xmlns:a16="http://schemas.microsoft.com/office/drawing/2014/main" id="{4CFE2BC8-54A5-407E-B141-B5EC04BD3417}"/>
               </a:ext>
             </a:extLst>
           </p:cNvPr>
@@ -5201,8 +3990,8 @@
         </p:nvSpPr>
         <p:spPr>
           <a:xfrm>
-            <a:off x="737805" y="5355452"/>
-            <a:ext cx="4144346" cy="646331"/>
+            <a:off x="382842" y="2321170"/>
+            <a:ext cx="8588880" cy="646331"/>
           </a:xfrm>
           <a:prstGeom prst="rect">
             <a:avLst/>
@@ -5221,17 +4010,17 @@
           <a:lstStyle/>
           <a:p>
             <a:r>
-              <a:t>The perception of quality and reliability plays a significant role in customer preferences, with Zomato currently leading in this aspect due to its comprehensive service offerings.</a:t>
-            </a:r>
-          </a:p>
-        </p:txBody>
-      </p:sp>
-      <p:sp>
-        <p:nvSpPr>
-          <p:cNvPr id="10" name="head3">
+              <a:t>BYD employs a cost-plus pricing strategy, leveraging vertical integration to maintain competitive pricing and secure market share.</a:t>
+            </a:r>
+          </a:p>
+        </p:txBody>
+      </p:sp>
+      <p:sp>
+        <p:nvSpPr>
+          <p:cNvPr id="3" name="head1">
             <a:extLst>
               <a:ext uri="{FF2B5EF4-FFF2-40B4-BE49-F238E27FC236}">
-                <a16:creationId xmlns:a16="http://schemas.microsoft.com/office/drawing/2014/main" id="{4CDE91AD-7D68-479F-B878-760D6B57DF98}"/>
+                <a16:creationId xmlns:a16="http://schemas.microsoft.com/office/drawing/2014/main" id="{AF43DD1A-697B-4E09-8F47-DB6EB5F90E42}"/>
               </a:ext>
             </a:extLst>
           </p:cNvPr>
@@ -5240,8 +4029,8 @@
         </p:nvSpPr>
         <p:spPr>
           <a:xfrm>
-            <a:off x="737805" y="4770677"/>
-            <a:ext cx="4144346" cy="584775"/>
+            <a:off x="382842" y="1659451"/>
+            <a:ext cx="8588880" cy="646331"/>
           </a:xfrm>
           <a:prstGeom prst="rect">
             <a:avLst/>
@@ -5255,17 +4044,17 @@
           <a:lstStyle/>
           <a:p>
             <a:r>
-              <a:t>Market Perception</a:t>
-            </a:r>
-          </a:p>
-        </p:txBody>
-      </p:sp>
-      <p:sp>
-        <p:nvSpPr>
-          <p:cNvPr id="11" name="content2">
+              <a:t>BYD's Cost-Plus Pricing</a:t>
+            </a:r>
+          </a:p>
+        </p:txBody>
+      </p:sp>
+      <p:sp>
+        <p:nvSpPr>
+          <p:cNvPr id="5" name="content2">
             <a:extLst>
               <a:ext uri="{FF2B5EF4-FFF2-40B4-BE49-F238E27FC236}">
-                <a16:creationId xmlns:a16="http://schemas.microsoft.com/office/drawing/2014/main" id="{5DFB1118-D534-4F23-8272-FB69C2E9049D}"/>
+                <a16:creationId xmlns:a16="http://schemas.microsoft.com/office/drawing/2014/main" id="{0114294D-3C82-4496-9578-DE3D20CA1765}"/>
               </a:ext>
             </a:extLst>
           </p:cNvPr>
@@ -5274,8 +4063,8 @@
         </p:nvSpPr>
         <p:spPr>
           <a:xfrm>
-            <a:off x="5968367" y="3751471"/>
-            <a:ext cx="4144346" cy="646331"/>
+            <a:off x="402712" y="3940580"/>
+            <a:ext cx="8569010" cy="646331"/>
           </a:xfrm>
           <a:prstGeom prst="rect">
             <a:avLst/>
@@ -5294,17 +4083,17 @@
           <a:lstStyle/>
           <a:p>
             <a:r>
-              <a:t>Swiggy's focus on service quality and innovations like Swiggy Bolt aims to improve customer satisfaction and retention, crucial for competing with Zomato's established user base.</a:t>
-            </a:r>
-          </a:p>
-        </p:txBody>
-      </p:sp>
-      <p:sp>
-        <p:nvSpPr>
-          <p:cNvPr id="12" name="head2">
+              <a:t>Tesla utilizes a value-based pricing strategy, focusing on premium branding and software integration, which enhances perceived value but limits volume growth.</a:t>
+            </a:r>
+          </a:p>
+        </p:txBody>
+      </p:sp>
+      <p:sp>
+        <p:nvSpPr>
+          <p:cNvPr id="6" name="head2">
             <a:extLst>
               <a:ext uri="{FF2B5EF4-FFF2-40B4-BE49-F238E27FC236}">
-                <a16:creationId xmlns:a16="http://schemas.microsoft.com/office/drawing/2014/main" id="{3E071FFE-7960-4952-BF3A-0FE9A5FDB4EA}"/>
+                <a16:creationId xmlns:a16="http://schemas.microsoft.com/office/drawing/2014/main" id="{EC54FAE9-D0C9-4E6D-BD92-BE588E00A0E5}"/>
               </a:ext>
             </a:extLst>
           </p:cNvPr>
@@ -5313,8 +4102,8 @@
         </p:nvSpPr>
         <p:spPr>
           <a:xfrm>
-            <a:off x="5968367" y="3166696"/>
-            <a:ext cx="4144346" cy="584775"/>
+            <a:off x="388238" y="3281321"/>
+            <a:ext cx="8583484" cy="646331"/>
           </a:xfrm>
           <a:prstGeom prst="rect">
             <a:avLst/>
@@ -5328,17 +4117,17 @@
           <a:lstStyle/>
           <a:p>
             <a:r>
-              <a:t>Service Quality</a:t>
-            </a:r>
-          </a:p>
-        </p:txBody>
-      </p:sp>
-      <p:sp>
-        <p:nvSpPr>
-          <p:cNvPr id="13" name="content1">
+              <a:t>Tesla's Value-Based Approach</a:t>
+            </a:r>
+          </a:p>
+        </p:txBody>
+      </p:sp>
+      <p:sp>
+        <p:nvSpPr>
+          <p:cNvPr id="7" name="content3">
             <a:extLst>
               <a:ext uri="{FF2B5EF4-FFF2-40B4-BE49-F238E27FC236}">
-                <a16:creationId xmlns:a16="http://schemas.microsoft.com/office/drawing/2014/main" id="{0D56670D-A85A-448F-818D-6D415FB1A2AD}"/>
+                <a16:creationId xmlns:a16="http://schemas.microsoft.com/office/drawing/2014/main" id="{BAB09B8F-FCBE-446C-89AD-F3E542DDA470}"/>
               </a:ext>
             </a:extLst>
           </p:cNvPr>
@@ -5347,8 +4136,8 @@
         </p:nvSpPr>
         <p:spPr>
           <a:xfrm>
-            <a:off x="737805" y="2098358"/>
-            <a:ext cx="4144346" cy="646331"/>
+            <a:off x="382842" y="5566061"/>
+            <a:ext cx="8583484" cy="646331"/>
           </a:xfrm>
           <a:prstGeom prst="rect">
             <a:avLst/>
@@ -5367,17 +4156,17 @@
           <a:lstStyle/>
           <a:p>
             <a:r>
-              <a:t>Zomato has invested in user engagement strategies, such as its District platform for movies and dining, which enhances customer interaction and loyalty.</a:t>
-            </a:r>
-          </a:p>
-        </p:txBody>
-      </p:sp>
-      <p:sp>
-        <p:nvSpPr>
-          <p:cNvPr id="14" name="head1">
+              <a:t>The contrasting strategies lead to a price war, with BYD's low-cost approach causing margin compression and brand dilution, while Tesla's premium focus restricts market expansion.</a:t>
+            </a:r>
+          </a:p>
+        </p:txBody>
+      </p:sp>
+      <p:sp>
+        <p:nvSpPr>
+          <p:cNvPr id="8" name="head3">
             <a:extLst>
               <a:ext uri="{FF2B5EF4-FFF2-40B4-BE49-F238E27FC236}">
-                <a16:creationId xmlns:a16="http://schemas.microsoft.com/office/drawing/2014/main" id="{9A4C4650-475C-4F06-912B-7A535409FDDC}"/>
+                <a16:creationId xmlns:a16="http://schemas.microsoft.com/office/drawing/2014/main" id="{7F46E3E4-B57E-4E3B-ABC9-C8472D45B500}"/>
               </a:ext>
             </a:extLst>
           </p:cNvPr>
@@ -5386,8 +4175,8 @@
         </p:nvSpPr>
         <p:spPr>
           <a:xfrm>
-            <a:off x="737805" y="1513583"/>
-            <a:ext cx="4144346" cy="584775"/>
+            <a:off x="388238" y="4900731"/>
+            <a:ext cx="8588880" cy="646331"/>
           </a:xfrm>
           <a:prstGeom prst="rect">
             <a:avLst/>
@@ -5401,17 +4190,17 @@
           <a:lstStyle/>
           <a:p>
             <a:r>
-              <a:t>User Engagement</a:t>
-            </a:r>
-          </a:p>
-        </p:txBody>
-      </p:sp>
-      <p:sp>
-        <p:nvSpPr>
-          <p:cNvPr id="15" name="subtopic">
+              <a:t>Market Impact of Pricing Strategies</a:t>
+            </a:r>
+          </a:p>
+        </p:txBody>
+      </p:sp>
+      <p:sp>
+        <p:nvSpPr>
+          <p:cNvPr id="4" name="subtopic">
             <a:extLst>
               <a:ext uri="{FF2B5EF4-FFF2-40B4-BE49-F238E27FC236}">
-                <a16:creationId xmlns:a16="http://schemas.microsoft.com/office/drawing/2014/main" id="{0817A346-3588-46F6-9A91-768330515E36}"/>
+                <a16:creationId xmlns:a16="http://schemas.microsoft.com/office/drawing/2014/main" id="{216BD8E4-BE8C-48D9-AFBB-D6093A341E66}"/>
               </a:ext>
             </a:extLst>
           </p:cNvPr>
@@ -5420,13 +4209,18 @@
         </p:nvSpPr>
         <p:spPr>
           <a:xfrm>
-            <a:off x="318052" y="209886"/>
-            <a:ext cx="10880032" cy="646331"/>
+            <a:off x="382842" y="202185"/>
+            <a:ext cx="10863056" cy="646331"/>
           </a:xfrm>
           <a:prstGeom prst="rect">
             <a:avLst/>
           </a:prstGeom>
           <a:noFill/>
+          <a:ln>
+            <a:solidFill>
+              <a:schemeClr val="bg1"/>
+            </a:solidFill>
+          </a:ln>
         </p:spPr>
         <p:txBody>
           <a:bodyPr wrap="square" rtlCol="0">
@@ -5435,7 +4229,7 @@
           <a:lstStyle/>
           <a:p>
             <a:r>
-              <a:t>Customer Experience: How Engagement Strategies Shape User Preferences</a:t>
+              <a:t>Pricing Strategies: Cost Comparisons and Value Propositions</a:t>
             </a:r>
           </a:p>
         </p:txBody>
@@ -5460,317 +4254,10 @@
       <p:grpSpPr/>
       <p:sp>
         <p:nvSpPr>
-          <p:cNvPr id="2" name="Google Shape;171;p32">
+          <p:cNvPr id="2" name="content1">
             <a:extLst>
               <a:ext uri="{FF2B5EF4-FFF2-40B4-BE49-F238E27FC236}">
-                <a16:creationId xmlns:a16="http://schemas.microsoft.com/office/drawing/2014/main" id="{9ACD8CA5-4451-4ED5-B63B-DFEF44E87616}"/>
-              </a:ext>
-            </a:extLst>
-          </p:cNvPr>
-          <p:cNvSpPr txBox="1">
-            <a:spLocks/>
-          </p:cNvSpPr>
-          <p:nvPr/>
-        </p:nvSpPr>
-        <p:spPr>
-          <a:xfrm>
-            <a:off x="5394900" y="1801287"/>
-            <a:ext cx="1160400" cy="577800"/>
-          </a:xfrm>
-          <a:prstGeom prst="rect">
-            <a:avLst/>
-          </a:prstGeom>
-        </p:spPr>
-        <p:txBody>
-          <a:bodyPr spcFirstLastPara="1" wrap="square" lIns="91425" tIns="91425" rIns="91425" bIns="91425" anchor="ctr" anchorCtr="0">
-            <a:noAutofit/>
-          </a:bodyPr>
-          <a:lstStyle>
-            <a:lvl1pPr algn="l" defTabSz="914400" rtl="0" eaLnBrk="1" latinLnBrk="0" hangingPunct="1">
-              <a:lnSpc>
-                <a:spcPct val="90000"/>
-              </a:lnSpc>
-              <a:spcBef>
-                <a:spcPct val="0"/>
-              </a:spcBef>
-              <a:buNone/>
-              <a:defRPr sz="4400" kern="1200">
-                <a:solidFill>
-                  <a:schemeClr val="tx1"/>
-                </a:solidFill>
-                <a:latin typeface="+mj-lt"/>
-                <a:ea typeface="+mj-ea"/>
-                <a:cs typeface="+mj-cs"/>
-              </a:defRPr>
-            </a:lvl1pPr>
-          </a:lstStyle>
-          <a:p>
-            <a:pPr>
-              <a:spcBef>
-                <a:spcPts val="0"/>
-              </a:spcBef>
-            </a:pPr>
-            <a:r>
-              <a:rPr lang="en" dirty="0"/>
-              <a:t>01</a:t>
-            </a:r>
-          </a:p>
-        </p:txBody>
-      </p:sp>
-      <p:sp>
-        <p:nvSpPr>
-          <p:cNvPr id="3" name="Google Shape;173;p32">
-            <a:extLst>
-              <a:ext uri="{FF2B5EF4-FFF2-40B4-BE49-F238E27FC236}">
-                <a16:creationId xmlns:a16="http://schemas.microsoft.com/office/drawing/2014/main" id="{21EBBC7F-3BF9-411A-AC9F-280CDA1EBF71}"/>
-              </a:ext>
-            </a:extLst>
-          </p:cNvPr>
-          <p:cNvSpPr txBox="1">
-            <a:spLocks/>
-          </p:cNvSpPr>
-          <p:nvPr/>
-        </p:nvSpPr>
-        <p:spPr>
-          <a:xfrm>
-            <a:off x="5392252" y="5174471"/>
-            <a:ext cx="1160400" cy="577800"/>
-          </a:xfrm>
-          <a:prstGeom prst="rect">
-            <a:avLst/>
-          </a:prstGeom>
-        </p:spPr>
-        <p:txBody>
-          <a:bodyPr spcFirstLastPara="1" wrap="square" lIns="91425" tIns="91425" rIns="91425" bIns="91425" anchor="ctr" anchorCtr="0">
-            <a:noAutofit/>
-          </a:bodyPr>
-          <a:lstStyle>
-            <a:lvl1pPr algn="l" defTabSz="914400" rtl="0" eaLnBrk="1" latinLnBrk="0" hangingPunct="1">
-              <a:lnSpc>
-                <a:spcPct val="90000"/>
-              </a:lnSpc>
-              <a:spcBef>
-                <a:spcPct val="0"/>
-              </a:spcBef>
-              <a:buNone/>
-              <a:defRPr sz="4400" kern="1200">
-                <a:solidFill>
-                  <a:schemeClr val="tx1"/>
-                </a:solidFill>
-                <a:latin typeface="+mj-lt"/>
-                <a:ea typeface="+mj-ea"/>
-                <a:cs typeface="+mj-cs"/>
-              </a:defRPr>
-            </a:lvl1pPr>
-          </a:lstStyle>
-          <a:p>
-            <a:pPr>
-              <a:spcBef>
-                <a:spcPts val="0"/>
-              </a:spcBef>
-            </a:pPr>
-            <a:r>
-              <a:rPr lang="en" dirty="0"/>
-              <a:t>03</a:t>
-            </a:r>
-          </a:p>
-        </p:txBody>
-      </p:sp>
-      <p:cxnSp>
-        <p:nvCxnSpPr>
-          <p:cNvPr id="4" name="Google Shape;178;p32">
-            <a:extLst>
-              <a:ext uri="{FF2B5EF4-FFF2-40B4-BE49-F238E27FC236}">
-                <a16:creationId xmlns:a16="http://schemas.microsoft.com/office/drawing/2014/main" id="{4D0AF5DD-3304-47B9-9DBD-552A0C712BFC}"/>
-              </a:ext>
-            </a:extLst>
-          </p:cNvPr>
-          <p:cNvCxnSpPr>
-            <a:cxnSpLocks/>
-          </p:cNvCxnSpPr>
-          <p:nvPr/>
-        </p:nvCxnSpPr>
-        <p:spPr>
-          <a:xfrm>
-            <a:off x="5243772" y="1237405"/>
-            <a:ext cx="0" cy="5448907"/>
-          </a:xfrm>
-          <a:prstGeom prst="straightConnector1">
-            <a:avLst/>
-          </a:prstGeom>
-          <a:noFill/>
-          <a:ln w="19050" cap="flat" cmpd="sng">
-            <a:solidFill>
-              <a:schemeClr val="accent1"/>
-            </a:solidFill>
-            <a:prstDash val="solid"/>
-            <a:round/>
-            <a:headEnd type="none" w="med" len="med"/>
-            <a:tailEnd type="none" w="med" len="med"/>
-          </a:ln>
-        </p:spPr>
-      </p:cxnSp>
-      <p:cxnSp>
-        <p:nvCxnSpPr>
-          <p:cNvPr id="5" name="Google Shape;179;p32">
-            <a:extLst>
-              <a:ext uri="{FF2B5EF4-FFF2-40B4-BE49-F238E27FC236}">
-                <a16:creationId xmlns:a16="http://schemas.microsoft.com/office/drawing/2014/main" id="{08C8FDE0-2039-417A-8014-7FD5C8720338}"/>
-              </a:ext>
-            </a:extLst>
-          </p:cNvPr>
-          <p:cNvCxnSpPr/>
-          <p:nvPr/>
-        </p:nvCxnSpPr>
-        <p:spPr>
-          <a:xfrm rot="10800000">
-            <a:off x="4888884" y="2069642"/>
-            <a:ext cx="366000" cy="0"/>
-          </a:xfrm>
-          <a:prstGeom prst="straightConnector1">
-            <a:avLst/>
-          </a:prstGeom>
-          <a:noFill/>
-          <a:ln w="19050" cap="flat" cmpd="sng">
-            <a:solidFill>
-              <a:schemeClr val="accent1"/>
-            </a:solidFill>
-            <a:prstDash val="solid"/>
-            <a:round/>
-            <a:headEnd type="none" w="med" len="med"/>
-            <a:tailEnd type="none" w="med" len="med"/>
-          </a:ln>
-        </p:spPr>
-      </p:cxnSp>
-      <p:cxnSp>
-        <p:nvCxnSpPr>
-          <p:cNvPr id="6" name="Google Shape;180;p32">
-            <a:extLst>
-              <a:ext uri="{FF2B5EF4-FFF2-40B4-BE49-F238E27FC236}">
-                <a16:creationId xmlns:a16="http://schemas.microsoft.com/office/drawing/2014/main" id="{9C247B9B-3CE8-4CA5-BC6D-ED5951DC35A0}"/>
-              </a:ext>
-            </a:extLst>
-          </p:cNvPr>
-          <p:cNvCxnSpPr/>
-          <p:nvPr/>
-        </p:nvCxnSpPr>
-        <p:spPr>
-          <a:xfrm rot="10800000">
-            <a:off x="5243772" y="3757261"/>
-            <a:ext cx="366000" cy="0"/>
-          </a:xfrm>
-          <a:prstGeom prst="straightConnector1">
-            <a:avLst/>
-          </a:prstGeom>
-          <a:noFill/>
-          <a:ln w="19050" cap="flat" cmpd="sng">
-            <a:solidFill>
-              <a:schemeClr val="accent1"/>
-            </a:solidFill>
-            <a:prstDash val="solid"/>
-            <a:round/>
-            <a:headEnd type="none" w="med" len="med"/>
-            <a:tailEnd type="none" w="med" len="med"/>
-          </a:ln>
-        </p:spPr>
-      </p:cxnSp>
-      <p:cxnSp>
-        <p:nvCxnSpPr>
-          <p:cNvPr id="7" name="Google Shape;181;p32">
-            <a:extLst>
-              <a:ext uri="{FF2B5EF4-FFF2-40B4-BE49-F238E27FC236}">
-                <a16:creationId xmlns:a16="http://schemas.microsoft.com/office/drawing/2014/main" id="{B99263AB-A4F5-4E49-AE7F-761BDE140E7D}"/>
-              </a:ext>
-            </a:extLst>
-          </p:cNvPr>
-          <p:cNvCxnSpPr/>
-          <p:nvPr/>
-        </p:nvCxnSpPr>
-        <p:spPr>
-          <a:xfrm rot="10800000">
-            <a:off x="4847631" y="5455878"/>
-            <a:ext cx="366000" cy="0"/>
-          </a:xfrm>
-          <a:prstGeom prst="straightConnector1">
-            <a:avLst/>
-          </a:prstGeom>
-          <a:noFill/>
-          <a:ln w="19050" cap="flat" cmpd="sng">
-            <a:solidFill>
-              <a:schemeClr val="accent1"/>
-            </a:solidFill>
-            <a:prstDash val="solid"/>
-            <a:round/>
-            <a:headEnd type="none" w="med" len="med"/>
-            <a:tailEnd type="none" w="med" len="med"/>
-          </a:ln>
-        </p:spPr>
-      </p:cxnSp>
-      <p:sp>
-        <p:nvSpPr>
-          <p:cNvPr id="8" name="Google Shape;173;p32">
-            <a:extLst>
-              <a:ext uri="{FF2B5EF4-FFF2-40B4-BE49-F238E27FC236}">
-                <a16:creationId xmlns:a16="http://schemas.microsoft.com/office/drawing/2014/main" id="{59DC8F83-EC2B-4C3F-8303-4E92717D5388}"/>
-              </a:ext>
-            </a:extLst>
-          </p:cNvPr>
-          <p:cNvSpPr txBox="1">
-            <a:spLocks/>
-          </p:cNvSpPr>
-          <p:nvPr/>
-        </p:nvSpPr>
-        <p:spPr>
-          <a:xfrm>
-            <a:off x="4137794" y="3529571"/>
-            <a:ext cx="1160400" cy="577800"/>
-          </a:xfrm>
-          <a:prstGeom prst="rect">
-            <a:avLst/>
-          </a:prstGeom>
-        </p:spPr>
-        <p:txBody>
-          <a:bodyPr spcFirstLastPara="1" wrap="square" lIns="91425" tIns="91425" rIns="91425" bIns="91425" anchor="ctr" anchorCtr="0">
-            <a:noAutofit/>
-          </a:bodyPr>
-          <a:lstStyle>
-            <a:lvl1pPr algn="l" defTabSz="914400" rtl="0" eaLnBrk="1" latinLnBrk="0" hangingPunct="1">
-              <a:lnSpc>
-                <a:spcPct val="90000"/>
-              </a:lnSpc>
-              <a:spcBef>
-                <a:spcPct val="0"/>
-              </a:spcBef>
-              <a:buNone/>
-              <a:defRPr sz="4400" kern="1200">
-                <a:solidFill>
-                  <a:schemeClr val="tx1"/>
-                </a:solidFill>
-                <a:latin typeface="+mj-lt"/>
-                <a:ea typeface="+mj-ea"/>
-                <a:cs typeface="+mj-cs"/>
-              </a:defRPr>
-            </a:lvl1pPr>
-          </a:lstStyle>
-          <a:p>
-            <a:pPr>
-              <a:spcBef>
-                <a:spcPts val="0"/>
-              </a:spcBef>
-            </a:pPr>
-            <a:r>
-              <a:rPr lang="en" dirty="0"/>
-              <a:t>02</a:t>
-            </a:r>
-          </a:p>
-        </p:txBody>
-      </p:sp>
-      <p:sp>
-        <p:nvSpPr>
-          <p:cNvPr id="9" name="content3">
-            <a:extLst>
-              <a:ext uri="{FF2B5EF4-FFF2-40B4-BE49-F238E27FC236}">
-                <a16:creationId xmlns:a16="http://schemas.microsoft.com/office/drawing/2014/main" id="{87510014-2DBF-4A05-807A-5F40DAB03A54}"/>
+                <a16:creationId xmlns:a16="http://schemas.microsoft.com/office/drawing/2014/main" id="{4CFE2BC8-54A5-407E-B141-B5EC04BD3417}"/>
               </a:ext>
             </a:extLst>
           </p:cNvPr>
@@ -5779,8 +4266,8 @@
         </p:nvSpPr>
         <p:spPr>
           <a:xfrm>
-            <a:off x="737805" y="5355452"/>
-            <a:ext cx="4144346" cy="646331"/>
+            <a:off x="382842" y="2321170"/>
+            <a:ext cx="8588880" cy="646331"/>
           </a:xfrm>
           <a:prstGeom prst="rect">
             <a:avLst/>
@@ -5799,17 +4286,17 @@
           <a:lstStyle/>
           <a:p>
             <a:r>
-              <a:t>The future of both companies will depend on their ability to adapt to changing consumer preferences, technological advancements, and the overall economic environment in India.</a:t>
-            </a:r>
-          </a:p>
-        </p:txBody>
-      </p:sp>
-      <p:sp>
-        <p:nvSpPr>
-          <p:cNvPr id="10" name="head3">
+              <a:t>Tesla's brand loyalty has decreased to 52.1% in 2023, down from approximately 67% in 2022, indicating a shift in consumer preferences.</a:t>
+            </a:r>
+          </a:p>
+        </p:txBody>
+      </p:sp>
+      <p:sp>
+        <p:nvSpPr>
+          <p:cNvPr id="3" name="head1">
             <a:extLst>
               <a:ext uri="{FF2B5EF4-FFF2-40B4-BE49-F238E27FC236}">
-                <a16:creationId xmlns:a16="http://schemas.microsoft.com/office/drawing/2014/main" id="{4CDE91AD-7D68-479F-B878-760D6B57DF98}"/>
+                <a16:creationId xmlns:a16="http://schemas.microsoft.com/office/drawing/2014/main" id="{AF43DD1A-697B-4E09-8F47-DB6EB5F90E42}"/>
               </a:ext>
             </a:extLst>
           </p:cNvPr>
@@ -5818,8 +4305,8 @@
         </p:nvSpPr>
         <p:spPr>
           <a:xfrm>
-            <a:off x="737805" y="4770677"/>
-            <a:ext cx="4144346" cy="584775"/>
+            <a:off x="382842" y="1659451"/>
+            <a:ext cx="8588880" cy="646331"/>
           </a:xfrm>
           <a:prstGeom prst="rect">
             <a:avLst/>
@@ -5833,17 +4320,17 @@
           <a:lstStyle/>
           <a:p>
             <a:r>
-              <a:t>Long-term Strategies</a:t>
-            </a:r>
-          </a:p>
-        </p:txBody>
-      </p:sp>
-      <p:sp>
-        <p:nvSpPr>
-          <p:cNvPr id="11" name="content2">
+              <a:t>Tesla Brand Loyalty Decline</a:t>
+            </a:r>
+          </a:p>
+        </p:txBody>
+      </p:sp>
+      <p:sp>
+        <p:nvSpPr>
+          <p:cNvPr id="5" name="content2">
             <a:extLst>
               <a:ext uri="{FF2B5EF4-FFF2-40B4-BE49-F238E27FC236}">
-                <a16:creationId xmlns:a16="http://schemas.microsoft.com/office/drawing/2014/main" id="{5DFB1118-D534-4F23-8272-FB69C2E9049D}"/>
+                <a16:creationId xmlns:a16="http://schemas.microsoft.com/office/drawing/2014/main" id="{0114294D-3C82-4496-9578-DE3D20CA1765}"/>
               </a:ext>
             </a:extLst>
           </p:cNvPr>
@@ -5852,8 +4339,8 @@
         </p:nvSpPr>
         <p:spPr>
           <a:xfrm>
-            <a:off x="5968367" y="3751471"/>
-            <a:ext cx="4144346" cy="646331"/>
+            <a:off x="402712" y="3940580"/>
+            <a:ext cx="8569010" cy="646331"/>
           </a:xfrm>
           <a:prstGeom prst="rect">
             <a:avLst/>
@@ -5872,17 +4359,17 @@
           <a:lstStyle/>
           <a:p>
             <a:r>
-              <a:t>Analysts predict that the competitive landscape will continue to evolve, with Swiggy potentially regaining market share through strategic innovations and improved service offerings.</a:t>
-            </a:r>
-          </a:p>
-        </p:txBody>
-      </p:sp>
-      <p:sp>
-        <p:nvSpPr>
-          <p:cNvPr id="12" name="head2">
+              <a:t>Other EV brands have seen an increase in fuel-type loyalty to 46.4%, suggesting that consumers are increasingly committed to electric vehicles beyond Tesla.</a:t>
+            </a:r>
+          </a:p>
+        </p:txBody>
+      </p:sp>
+      <p:sp>
+        <p:nvSpPr>
+          <p:cNvPr id="6" name="head2">
             <a:extLst>
               <a:ext uri="{FF2B5EF4-FFF2-40B4-BE49-F238E27FC236}">
-                <a16:creationId xmlns:a16="http://schemas.microsoft.com/office/drawing/2014/main" id="{3E071FFE-7960-4952-BF3A-0FE9A5FDB4EA}"/>
+                <a16:creationId xmlns:a16="http://schemas.microsoft.com/office/drawing/2014/main" id="{EC54FAE9-D0C9-4E6D-BD92-BE588E00A0E5}"/>
               </a:ext>
             </a:extLst>
           </p:cNvPr>
@@ -5891,8 +4378,8 @@
         </p:nvSpPr>
         <p:spPr>
           <a:xfrm>
-            <a:off x="5968367" y="3166696"/>
-            <a:ext cx="4144346" cy="584775"/>
+            <a:off x="388238" y="3281321"/>
+            <a:ext cx="8583484" cy="646331"/>
           </a:xfrm>
           <a:prstGeom prst="rect">
             <a:avLst/>
@@ -5906,17 +4393,17 @@
           <a:lstStyle/>
           <a:p>
             <a:r>
-              <a:t>Market Predictions</a:t>
-            </a:r>
-          </a:p>
-        </p:txBody>
-      </p:sp>
-      <p:sp>
-        <p:nvSpPr>
-          <p:cNvPr id="13" name="content1">
+              <a:t>Increased EV Commitment</a:t>
+            </a:r>
+          </a:p>
+        </p:txBody>
+      </p:sp>
+      <p:sp>
+        <p:nvSpPr>
+          <p:cNvPr id="7" name="content3">
             <a:extLst>
               <a:ext uri="{FF2B5EF4-FFF2-40B4-BE49-F238E27FC236}">
-                <a16:creationId xmlns:a16="http://schemas.microsoft.com/office/drawing/2014/main" id="{0D56670D-A85A-448F-818D-6D415FB1A2AD}"/>
+                <a16:creationId xmlns:a16="http://schemas.microsoft.com/office/drawing/2014/main" id="{BAB09B8F-FCBE-446C-89AD-F3E542DDA470}"/>
               </a:ext>
             </a:extLst>
           </p:cNvPr>
@@ -5925,8 +4412,8 @@
         </p:nvSpPr>
         <p:spPr>
           <a:xfrm>
-            <a:off x="737805" y="2098358"/>
-            <a:ext cx="4144346" cy="646331"/>
+            <a:off x="382842" y="5566061"/>
+            <a:ext cx="8583484" cy="646331"/>
           </a:xfrm>
           <a:prstGeom prst="rect">
             <a:avLst/>
@@ -5945,17 +4432,17 @@
           <a:lstStyle/>
           <a:p>
             <a:r>
-              <a:t>Both companies are expected to continue innovating, with Zomato's Blinkit and Swiggy's Instamart competing in the quick commerce space, which is rapidly growing.</a:t>
-            </a:r>
-          </a:p>
-        </p:txBody>
-      </p:sp>
-      <p:sp>
-        <p:nvSpPr>
-          <p:cNvPr id="14" name="head1">
+              <a:t>Tesla owners are not switching to lower-priced vehicles; instead, they are moving to comparable or higher-priced models, particularly in the $75,000–$100,000 range.</a:t>
+            </a:r>
+          </a:p>
+        </p:txBody>
+      </p:sp>
+      <p:sp>
+        <p:nvSpPr>
+          <p:cNvPr id="8" name="head3">
             <a:extLst>
               <a:ext uri="{FF2B5EF4-FFF2-40B4-BE49-F238E27FC236}">
-                <a16:creationId xmlns:a16="http://schemas.microsoft.com/office/drawing/2014/main" id="{9A4C4650-475C-4F06-912B-7A535409FDDC}"/>
+                <a16:creationId xmlns:a16="http://schemas.microsoft.com/office/drawing/2014/main" id="{7F46E3E4-B57E-4E3B-ABC9-C8472D45B500}"/>
               </a:ext>
             </a:extLst>
           </p:cNvPr>
@@ -5964,8 +4451,8 @@
         </p:nvSpPr>
         <p:spPr>
           <a:xfrm>
-            <a:off x="737805" y="1513583"/>
-            <a:ext cx="4144346" cy="584775"/>
+            <a:off x="388238" y="4900731"/>
+            <a:ext cx="8588880" cy="646331"/>
           </a:xfrm>
           <a:prstGeom prst="rect">
             <a:avLst/>
@@ -5979,17 +4466,17 @@
           <a:lstStyle/>
           <a:p>
             <a:r>
-              <a:t>Innovations on the Horizon</a:t>
-            </a:r>
-          </a:p>
-        </p:txBody>
-      </p:sp>
-      <p:sp>
-        <p:nvSpPr>
-          <p:cNvPr id="15" name="subtopic">
+              <a:t>Defections to Premium Models</a:t>
+            </a:r>
+          </a:p>
+        </p:txBody>
+      </p:sp>
+      <p:sp>
+        <p:nvSpPr>
+          <p:cNvPr id="4" name="subtopic">
             <a:extLst>
               <a:ext uri="{FF2B5EF4-FFF2-40B4-BE49-F238E27FC236}">
-                <a16:creationId xmlns:a16="http://schemas.microsoft.com/office/drawing/2014/main" id="{0817A346-3588-46F6-9A91-768330515E36}"/>
+                <a16:creationId xmlns:a16="http://schemas.microsoft.com/office/drawing/2014/main" id="{216BD8E4-BE8C-48D9-AFBB-D6093A341E66}"/>
               </a:ext>
             </a:extLst>
           </p:cNvPr>
@@ -5998,13 +4485,18 @@
         </p:nvSpPr>
         <p:spPr>
           <a:xfrm>
-            <a:off x="318052" y="209886"/>
-            <a:ext cx="10880032" cy="646331"/>
+            <a:off x="382842" y="202185"/>
+            <a:ext cx="10863056" cy="646331"/>
           </a:xfrm>
           <a:prstGeom prst="rect">
             <a:avLst/>
           </a:prstGeom>
           <a:noFill/>
+          <a:ln>
+            <a:solidFill>
+              <a:schemeClr val="bg1"/>
+            </a:solidFill>
+          </a:ln>
         </p:spPr>
         <p:txBody>
           <a:bodyPr wrap="square" rtlCol="0">
@@ -6013,7 +4505,7 @@
           <a:lstStyle/>
           <a:p>
             <a:r>
-              <a:t>Future Outlook: Strategic Innovations and Market Predictions for 2024 and Beyond</a:t>
+              <a:t>Consumer Preferences: Brand Loyalty and Market Perception</a:t>
             </a:r>
           </a:p>
         </p:txBody>
@@ -6038,7 +4530,559 @@
       <p:grpSpPr/>
       <p:sp>
         <p:nvSpPr>
-          <p:cNvPr id="3" name="conclusion-line">
+          <p:cNvPr id="2" name="content1">
+            <a:extLst>
+              <a:ext uri="{FF2B5EF4-FFF2-40B4-BE49-F238E27FC236}">
+                <a16:creationId xmlns:a16="http://schemas.microsoft.com/office/drawing/2014/main" id="{4CFE2BC8-54A5-407E-B141-B5EC04BD3417}"/>
+              </a:ext>
+            </a:extLst>
+          </p:cNvPr>
+          <p:cNvSpPr txBox="1"/>
+          <p:nvPr/>
+        </p:nvSpPr>
+        <p:spPr>
+          <a:xfrm>
+            <a:off x="382842" y="2321170"/>
+            <a:ext cx="8588880" cy="646331"/>
+          </a:xfrm>
+          <a:prstGeom prst="rect">
+            <a:avLst/>
+          </a:prstGeom>
+          <a:noFill/>
+          <a:ln>
+            <a:solidFill>
+              <a:schemeClr val="bg1"/>
+            </a:solidFill>
+          </a:ln>
+        </p:spPr>
+        <p:txBody>
+          <a:bodyPr wrap="square" rtlCol="0">
+            <a:spAutoFit/>
+          </a:bodyPr>
+          <a:lstStyle/>
+          <a:p>
+            <a:r>
+              <a:t>Tesla is contesting the EU's tariffs on Chinese-made EVs, which could significantly impact global trade policies.</a:t>
+            </a:r>
+          </a:p>
+        </p:txBody>
+      </p:sp>
+      <p:sp>
+        <p:nvSpPr>
+          <p:cNvPr id="3" name="head1">
+            <a:extLst>
+              <a:ext uri="{FF2B5EF4-FFF2-40B4-BE49-F238E27FC236}">
+                <a16:creationId xmlns:a16="http://schemas.microsoft.com/office/drawing/2014/main" id="{AF43DD1A-697B-4E09-8F47-DB6EB5F90E42}"/>
+              </a:ext>
+            </a:extLst>
+          </p:cNvPr>
+          <p:cNvSpPr txBox="1"/>
+          <p:nvPr/>
+        </p:nvSpPr>
+        <p:spPr>
+          <a:xfrm>
+            <a:off x="382842" y="1659451"/>
+            <a:ext cx="8588880" cy="646331"/>
+          </a:xfrm>
+          <a:prstGeom prst="rect">
+            <a:avLst/>
+          </a:prstGeom>
+          <a:noFill/>
+        </p:spPr>
+        <p:txBody>
+          <a:bodyPr wrap="square" rtlCol="0">
+            <a:spAutoFit/>
+          </a:bodyPr>
+          <a:lstStyle/>
+          <a:p>
+            <a:r>
+              <a:t>Tesla's Legal Challenge</a:t>
+            </a:r>
+          </a:p>
+        </p:txBody>
+      </p:sp>
+      <p:sp>
+        <p:nvSpPr>
+          <p:cNvPr id="5" name="content2">
+            <a:extLst>
+              <a:ext uri="{FF2B5EF4-FFF2-40B4-BE49-F238E27FC236}">
+                <a16:creationId xmlns:a16="http://schemas.microsoft.com/office/drawing/2014/main" id="{0114294D-3C82-4496-9578-DE3D20CA1765}"/>
+              </a:ext>
+            </a:extLst>
+          </p:cNvPr>
+          <p:cNvSpPr txBox="1"/>
+          <p:nvPr/>
+        </p:nvSpPr>
+        <p:spPr>
+          <a:xfrm>
+            <a:off x="402712" y="3940580"/>
+            <a:ext cx="8569010" cy="646331"/>
+          </a:xfrm>
+          <a:prstGeom prst="rect">
+            <a:avLst/>
+          </a:prstGeom>
+          <a:noFill/>
+          <a:ln>
+            <a:solidFill>
+              <a:schemeClr val="bg1"/>
+            </a:solidFill>
+          </a:ln>
+        </p:spPr>
+        <p:txBody>
+          <a:bodyPr wrap="square" rtlCol="0">
+            <a:spAutoFit/>
+          </a:bodyPr>
+          <a:lstStyle/>
+          <a:p>
+            <a:r>
+              <a:t>Major automotive manufacturers, including BYD, are joining Tesla in challenging these tariffs, citing restrictions on free trade.</a:t>
+            </a:r>
+          </a:p>
+        </p:txBody>
+      </p:sp>
+      <p:sp>
+        <p:nvSpPr>
+          <p:cNvPr id="6" name="head2">
+            <a:extLst>
+              <a:ext uri="{FF2B5EF4-FFF2-40B4-BE49-F238E27FC236}">
+                <a16:creationId xmlns:a16="http://schemas.microsoft.com/office/drawing/2014/main" id="{EC54FAE9-D0C9-4E6D-BD92-BE588E00A0E5}"/>
+              </a:ext>
+            </a:extLst>
+          </p:cNvPr>
+          <p:cNvSpPr txBox="1"/>
+          <p:nvPr/>
+        </p:nvSpPr>
+        <p:spPr>
+          <a:xfrm>
+            <a:off x="388238" y="3281321"/>
+            <a:ext cx="8583484" cy="646331"/>
+          </a:xfrm>
+          <a:prstGeom prst="rect">
+            <a:avLst/>
+          </a:prstGeom>
+          <a:noFill/>
+        </p:spPr>
+        <p:txBody>
+          <a:bodyPr wrap="square" rtlCol="0">
+            <a:spAutoFit/>
+          </a:bodyPr>
+          <a:lstStyle/>
+          <a:p>
+            <a:r>
+              <a:t>Industry-Wide Opposition</a:t>
+            </a:r>
+          </a:p>
+        </p:txBody>
+      </p:sp>
+      <p:sp>
+        <p:nvSpPr>
+          <p:cNvPr id="7" name="content3">
+            <a:extLst>
+              <a:ext uri="{FF2B5EF4-FFF2-40B4-BE49-F238E27FC236}">
+                <a16:creationId xmlns:a16="http://schemas.microsoft.com/office/drawing/2014/main" id="{BAB09B8F-FCBE-446C-89AD-F3E542DDA470}"/>
+              </a:ext>
+            </a:extLst>
+          </p:cNvPr>
+          <p:cNvSpPr txBox="1"/>
+          <p:nvPr/>
+        </p:nvSpPr>
+        <p:spPr>
+          <a:xfrm>
+            <a:off x="382842" y="5566061"/>
+            <a:ext cx="8583484" cy="646331"/>
+          </a:xfrm>
+          <a:prstGeom prst="rect">
+            <a:avLst/>
+          </a:prstGeom>
+          <a:noFill/>
+          <a:ln>
+            <a:solidFill>
+              <a:schemeClr val="bg1"/>
+            </a:solidFill>
+          </a:ln>
+        </p:spPr>
+        <p:txBody>
+          <a:bodyPr wrap="square" rtlCol="0">
+            <a:spAutoFit/>
+          </a:bodyPr>
+          <a:lstStyle/>
+          <a:p>
+            <a:r>
+              <a:t>The outcome of these legal battles may hinder the global supply chain for EV production, affecting sustainability efforts.</a:t>
+            </a:r>
+          </a:p>
+        </p:txBody>
+      </p:sp>
+      <p:sp>
+        <p:nvSpPr>
+          <p:cNvPr id="8" name="head3">
+            <a:extLst>
+              <a:ext uri="{FF2B5EF4-FFF2-40B4-BE49-F238E27FC236}">
+                <a16:creationId xmlns:a16="http://schemas.microsoft.com/office/drawing/2014/main" id="{7F46E3E4-B57E-4E3B-ABC9-C8472D45B500}"/>
+              </a:ext>
+            </a:extLst>
+          </p:cNvPr>
+          <p:cNvSpPr txBox="1"/>
+          <p:nvPr/>
+        </p:nvSpPr>
+        <p:spPr>
+          <a:xfrm>
+            <a:off x="388238" y="4900731"/>
+            <a:ext cx="8588880" cy="646331"/>
+          </a:xfrm>
+          <a:prstGeom prst="rect">
+            <a:avLst/>
+          </a:prstGeom>
+          <a:noFill/>
+        </p:spPr>
+        <p:txBody>
+          <a:bodyPr wrap="square" rtlCol="0">
+            <a:spAutoFit/>
+          </a:bodyPr>
+          <a:lstStyle/>
+          <a:p>
+            <a:r>
+              <a:t>Impact on Global Supply Chains</a:t>
+            </a:r>
+          </a:p>
+        </p:txBody>
+      </p:sp>
+      <p:sp>
+        <p:nvSpPr>
+          <p:cNvPr id="4" name="subtopic">
+            <a:extLst>
+              <a:ext uri="{FF2B5EF4-FFF2-40B4-BE49-F238E27FC236}">
+                <a16:creationId xmlns:a16="http://schemas.microsoft.com/office/drawing/2014/main" id="{216BD8E4-BE8C-48D9-AFBB-D6093A341E66}"/>
+              </a:ext>
+            </a:extLst>
+          </p:cNvPr>
+          <p:cNvSpPr txBox="1"/>
+          <p:nvPr/>
+        </p:nvSpPr>
+        <p:spPr>
+          <a:xfrm>
+            <a:off x="382842" y="202185"/>
+            <a:ext cx="10863056" cy="646331"/>
+          </a:xfrm>
+          <a:prstGeom prst="rect">
+            <a:avLst/>
+          </a:prstGeom>
+          <a:noFill/>
+          <a:ln>
+            <a:solidFill>
+              <a:schemeClr val="bg1"/>
+            </a:solidFill>
+          </a:ln>
+        </p:spPr>
+        <p:txBody>
+          <a:bodyPr wrap="square" rtlCol="0">
+            <a:spAutoFit/>
+          </a:bodyPr>
+          <a:lstStyle/>
+          <a:p>
+            <a:r>
+              <a:t>Regulatory Challenges: Impact of Tariffs and Global Policies</a:t>
+            </a:r>
+          </a:p>
+        </p:txBody>
+      </p:sp>
+    </p:spTree>
+  </p:cSld>
+  <p:clrMapOvr>
+    <a:masterClrMapping/>
+  </p:clrMapOvr>
+</p:sld>
+</file>
+
+<file path=ppt/slides/slide8.xml><?xml version="1.0" encoding="utf-8"?>
+<p:sld xmlns:a="http://schemas.openxmlformats.org/drawingml/2006/main" xmlns:p="http://schemas.openxmlformats.org/presentationml/2006/main" xmlns:r="http://schemas.openxmlformats.org/officeDocument/2006/relationships">
+  <p:cSld>
+    <p:spTree>
+      <p:nvGrpSpPr>
+        <p:cNvPr id="1" name=""/>
+        <p:cNvGrpSpPr/>
+        <p:nvPr/>
+      </p:nvGrpSpPr>
+      <p:grpSpPr/>
+      <p:sp>
+        <p:nvSpPr>
+          <p:cNvPr id="2" name="content1">
+            <a:extLst>
+              <a:ext uri="{FF2B5EF4-FFF2-40B4-BE49-F238E27FC236}">
+                <a16:creationId xmlns:a16="http://schemas.microsoft.com/office/drawing/2014/main" id="{4CFE2BC8-54A5-407E-B141-B5EC04BD3417}"/>
+              </a:ext>
+            </a:extLst>
+          </p:cNvPr>
+          <p:cNvSpPr txBox="1"/>
+          <p:nvPr/>
+        </p:nvSpPr>
+        <p:spPr>
+          <a:xfrm>
+            <a:off x="382842" y="2321170"/>
+            <a:ext cx="8588880" cy="646331"/>
+          </a:xfrm>
+          <a:prstGeom prst="rect">
+            <a:avLst/>
+          </a:prstGeom>
+          <a:noFill/>
+          <a:ln>
+            <a:solidFill>
+              <a:schemeClr val="bg1"/>
+            </a:solidFill>
+          </a:ln>
+        </p:spPr>
+        <p:txBody>
+          <a:bodyPr wrap="square" rtlCol="0">
+            <a:spAutoFit/>
+          </a:bodyPr>
+          <a:lstStyle/>
+          <a:p>
+            <a:r>
+              <a:t>BYD is projected to surpass Tesla in battery electric vehicle sales in 2024, indicating a significant shift in market dynamics.</a:t>
+            </a:r>
+          </a:p>
+        </p:txBody>
+      </p:sp>
+      <p:sp>
+        <p:nvSpPr>
+          <p:cNvPr id="3" name="head1">
+            <a:extLst>
+              <a:ext uri="{FF2B5EF4-FFF2-40B4-BE49-F238E27FC236}">
+                <a16:creationId xmlns:a16="http://schemas.microsoft.com/office/drawing/2014/main" id="{AF43DD1A-697B-4E09-8F47-DB6EB5F90E42}"/>
+              </a:ext>
+            </a:extLst>
+          </p:cNvPr>
+          <p:cNvSpPr txBox="1"/>
+          <p:nvPr/>
+        </p:nvSpPr>
+        <p:spPr>
+          <a:xfrm>
+            <a:off x="382842" y="1659451"/>
+            <a:ext cx="8588880" cy="646331"/>
+          </a:xfrm>
+          <a:prstGeom prst="rect">
+            <a:avLst/>
+          </a:prstGeom>
+          <a:noFill/>
+        </p:spPr>
+        <p:txBody>
+          <a:bodyPr wrap="square" rtlCol="0">
+            <a:spAutoFit/>
+          </a:bodyPr>
+          <a:lstStyle/>
+          <a:p>
+            <a:r>
+              <a:t>BYD's Market Surge</a:t>
+            </a:r>
+          </a:p>
+        </p:txBody>
+      </p:sp>
+      <p:sp>
+        <p:nvSpPr>
+          <p:cNvPr id="5" name="content2">
+            <a:extLst>
+              <a:ext uri="{FF2B5EF4-FFF2-40B4-BE49-F238E27FC236}">
+                <a16:creationId xmlns:a16="http://schemas.microsoft.com/office/drawing/2014/main" id="{0114294D-3C82-4496-9578-DE3D20CA1765}"/>
+              </a:ext>
+            </a:extLst>
+          </p:cNvPr>
+          <p:cNvSpPr txBox="1"/>
+          <p:nvPr/>
+        </p:nvSpPr>
+        <p:spPr>
+          <a:xfrm>
+            <a:off x="402712" y="3940580"/>
+            <a:ext cx="8569010" cy="646331"/>
+          </a:xfrm>
+          <a:prstGeom prst="rect">
+            <a:avLst/>
+          </a:prstGeom>
+          <a:noFill/>
+          <a:ln>
+            <a:solidFill>
+              <a:schemeClr val="bg1"/>
+            </a:solidFill>
+          </a:ln>
+        </p:spPr>
+        <p:txBody>
+          <a:bodyPr wrap="square" rtlCol="0">
+            <a:spAutoFit/>
+          </a:bodyPr>
+          <a:lstStyle/>
+          <a:p>
+            <a:r>
+              <a:t>Global battery electric vehicle sales are expected to reach 10 million in 2024, driven by declining internal combustion engine vehicles.</a:t>
+            </a:r>
+          </a:p>
+        </p:txBody>
+      </p:sp>
+      <p:sp>
+        <p:nvSpPr>
+          <p:cNvPr id="6" name="head2">
+            <a:extLst>
+              <a:ext uri="{FF2B5EF4-FFF2-40B4-BE49-F238E27FC236}">
+                <a16:creationId xmlns:a16="http://schemas.microsoft.com/office/drawing/2014/main" id="{EC54FAE9-D0C9-4E6D-BD92-BE588E00A0E5}"/>
+              </a:ext>
+            </a:extLst>
+          </p:cNvPr>
+          <p:cNvSpPr txBox="1"/>
+          <p:nvPr/>
+        </p:nvSpPr>
+        <p:spPr>
+          <a:xfrm>
+            <a:off x="388238" y="3281321"/>
+            <a:ext cx="8583484" cy="646331"/>
+          </a:xfrm>
+          <a:prstGeom prst="rect">
+            <a:avLst/>
+          </a:prstGeom>
+          <a:noFill/>
+        </p:spPr>
+        <p:txBody>
+          <a:bodyPr wrap="square" rtlCol="0">
+            <a:spAutoFit/>
+          </a:bodyPr>
+          <a:lstStyle/>
+          <a:p>
+            <a:r>
+              <a:t>Global BEV Growth</a:t>
+            </a:r>
+          </a:p>
+        </p:txBody>
+      </p:sp>
+      <p:sp>
+        <p:nvSpPr>
+          <p:cNvPr id="7" name="content3">
+            <a:extLst>
+              <a:ext uri="{FF2B5EF4-FFF2-40B4-BE49-F238E27FC236}">
+                <a16:creationId xmlns:a16="http://schemas.microsoft.com/office/drawing/2014/main" id="{BAB09B8F-FCBE-446C-89AD-F3E542DDA470}"/>
+              </a:ext>
+            </a:extLst>
+          </p:cNvPr>
+          <p:cNvSpPr txBox="1"/>
+          <p:nvPr/>
+        </p:nvSpPr>
+        <p:spPr>
+          <a:xfrm>
+            <a:off x="382842" y="5566061"/>
+            <a:ext cx="8583484" cy="646331"/>
+          </a:xfrm>
+          <a:prstGeom prst="rect">
+            <a:avLst/>
+          </a:prstGeom>
+          <a:noFill/>
+          <a:ln>
+            <a:solidFill>
+              <a:schemeClr val="bg1"/>
+            </a:solidFill>
+          </a:ln>
+        </p:spPr>
+        <p:txBody>
+          <a:bodyPr wrap="square" rtlCol="0">
+            <a:spAutoFit/>
+          </a:bodyPr>
+          <a:lstStyle/>
+          <a:p>
+            <a:r>
+              <a:t>Tariffs may push Chinese automakers like BYD towards emerging markets, including the Middle East, Africa, and Southeast Asia, for growth opportunities.</a:t>
+            </a:r>
+          </a:p>
+        </p:txBody>
+      </p:sp>
+      <p:sp>
+        <p:nvSpPr>
+          <p:cNvPr id="8" name="head3">
+            <a:extLst>
+              <a:ext uri="{FF2B5EF4-FFF2-40B4-BE49-F238E27FC236}">
+                <a16:creationId xmlns:a16="http://schemas.microsoft.com/office/drawing/2014/main" id="{7F46E3E4-B57E-4E3B-ABC9-C8472D45B500}"/>
+              </a:ext>
+            </a:extLst>
+          </p:cNvPr>
+          <p:cNvSpPr txBox="1"/>
+          <p:nvPr/>
+        </p:nvSpPr>
+        <p:spPr>
+          <a:xfrm>
+            <a:off x="388238" y="4900731"/>
+            <a:ext cx="8588880" cy="646331"/>
+          </a:xfrm>
+          <a:prstGeom prst="rect">
+            <a:avLst/>
+          </a:prstGeom>
+          <a:noFill/>
+        </p:spPr>
+        <p:txBody>
+          <a:bodyPr wrap="square" rtlCol="0">
+            <a:spAutoFit/>
+          </a:bodyPr>
+          <a:lstStyle/>
+          <a:p>
+            <a:r>
+              <a:t>Emerging Market Focus</a:t>
+            </a:r>
+          </a:p>
+        </p:txBody>
+      </p:sp>
+      <p:sp>
+        <p:nvSpPr>
+          <p:cNvPr id="4" name="subtopic">
+            <a:extLst>
+              <a:ext uri="{FF2B5EF4-FFF2-40B4-BE49-F238E27FC236}">
+                <a16:creationId xmlns:a16="http://schemas.microsoft.com/office/drawing/2014/main" id="{216BD8E4-BE8C-48D9-AFBB-D6093A341E66}"/>
+              </a:ext>
+            </a:extLst>
+          </p:cNvPr>
+          <p:cNvSpPr txBox="1"/>
+          <p:nvPr/>
+        </p:nvSpPr>
+        <p:spPr>
+          <a:xfrm>
+            <a:off x="382842" y="202185"/>
+            <a:ext cx="10863056" cy="646331"/>
+          </a:xfrm>
+          <a:prstGeom prst="rect">
+            <a:avLst/>
+          </a:prstGeom>
+          <a:noFill/>
+          <a:ln>
+            <a:solidFill>
+              <a:schemeClr val="bg1"/>
+            </a:solidFill>
+          </a:ln>
+        </p:spPr>
+        <p:txBody>
+          <a:bodyPr wrap="square" rtlCol="0">
+            <a:spAutoFit/>
+          </a:bodyPr>
+          <a:lstStyle/>
+          <a:p>
+            <a:r>
+              <a:t>Future Outlook: Predictions for Growth and Market Dynamics</a:t>
+            </a:r>
+          </a:p>
+        </p:txBody>
+      </p:sp>
+    </p:spTree>
+  </p:cSld>
+  <p:clrMapOvr>
+    <a:masterClrMapping/>
+  </p:clrMapOvr>
+</p:sld>
+</file>
+
+<file path=ppt/slides/slide9.xml><?xml version="1.0" encoding="utf-8"?>
+<p:sld xmlns:a="http://schemas.openxmlformats.org/drawingml/2006/main" xmlns:p="http://schemas.openxmlformats.org/presentationml/2006/main" xmlns:r="http://schemas.openxmlformats.org/officeDocument/2006/relationships">
+  <p:cSld>
+    <p:spTree>
+      <p:nvGrpSpPr>
+        <p:cNvPr id="1" name=""/>
+        <p:cNvGrpSpPr/>
+        <p:nvPr/>
+      </p:nvGrpSpPr>
+      <p:grpSpPr/>
+      <p:sp>
+        <p:nvSpPr>
+          <p:cNvPr id="3" name="ending">
             <a:extLst>
               <a:ext uri="{FF2B5EF4-FFF2-40B4-BE49-F238E27FC236}">
                 <a16:creationId xmlns:a16="http://schemas.microsoft.com/office/drawing/2014/main" id="{3F2BFDD8-8459-4FE6-A381-38F0E1D8B287}"/>
@@ -6065,10 +5109,8 @@
           <a:lstStyle/>
           <a:p>
             <a:r>
-              <a:rPr lang="en-IN" sz="4800" dirty="0"/>
-              <a:t>Thank you statement</a:t>
-            </a:r>
-            <a:endParaRPr lang="en-US" sz="4800" dirty="0"/>
+              <a:t>In conclusion, the competition between Tesla and BYD is reshaping the electric vehicle landscape, with significant implications for the future of the industry.</a:t>
+            </a:r>
           </a:p>
         </p:txBody>
       </p:sp>

--- a/final_output.pptx
+++ b/final_output.pptx
@@ -12,8 +12,6 @@
     <p:sldId id="260" r:id="rId11"/>
     <p:sldId id="261" r:id="rId12"/>
     <p:sldId id="262" r:id="rId13"/>
-    <p:sldId id="263" r:id="rId14"/>
-    <p:sldId id="264" r:id="rId15"/>
   </p:sldIdLst>
   <p:sldSz cx="12192000" cy="6858000" type="screen4x3"/>
   <p:notesSz cx="6858000" cy="9144000"/>
@@ -3125,7 +3123,7 @@
           <a:lstStyle/>
           <a:p>
             <a:r>
-              <a:t>Tesla vs BYD: A Comparative Analysis of Electric Vehicle Giants</a:t>
+              <a:t>The Rise of Digital Payments in India: A UPI Revolution</a:t>
             </a:r>
           </a:p>
         </p:txBody>
@@ -3153,7 +3151,7 @@
           <p:cNvPr id="2" name="content1">
             <a:extLst>
               <a:ext uri="{FF2B5EF4-FFF2-40B4-BE49-F238E27FC236}">
-                <a16:creationId xmlns:a16="http://schemas.microsoft.com/office/drawing/2014/main" id="{4CFE2BC8-54A5-407E-B141-B5EC04BD3417}"/>
+                <a16:creationId xmlns:a16="http://schemas.microsoft.com/office/drawing/2014/main" id="{54FB0FDB-46CC-42BE-A833-C89184E3471E}"/>
               </a:ext>
             </a:extLst>
           </p:cNvPr>
@@ -3162,8 +3160,8 @@
         </p:nvSpPr>
         <p:spPr>
           <a:xfrm>
-            <a:off x="382842" y="2321170"/>
-            <a:ext cx="8588880" cy="646331"/>
+            <a:off x="350251" y="3043533"/>
+            <a:ext cx="5713159" cy="646331"/>
           </a:xfrm>
           <a:prstGeom prst="rect">
             <a:avLst/>
@@ -3182,7 +3180,7 @@
           <a:lstStyle/>
           <a:p>
             <a:r>
-              <a:t>In 2023, BYD became the global new energy vehicle sales champion, achieving over 3 million annual sales for the second consecutive year.</a:t>
+              <a:t>Digital payments in India evolved through four phases: pre-2010 with NEFT/RTGS, 2010-2015 with mobile wallets and IMPS, 2016-2020 with UPI's launch, and 2020-2024 marked by rapid growth during COVID-19.</a:t>
             </a:r>
           </a:p>
         </p:txBody>
@@ -3192,7 +3190,7 @@
           <p:cNvPr id="3" name="head1">
             <a:extLst>
               <a:ext uri="{FF2B5EF4-FFF2-40B4-BE49-F238E27FC236}">
-                <a16:creationId xmlns:a16="http://schemas.microsoft.com/office/drawing/2014/main" id="{AF43DD1A-697B-4E09-8F47-DB6EB5F90E42}"/>
+                <a16:creationId xmlns:a16="http://schemas.microsoft.com/office/drawing/2014/main" id="{18484F3A-33E9-4106-BBE3-C35CDE75E4F4}"/>
               </a:ext>
             </a:extLst>
           </p:cNvPr>
@@ -3201,8 +3199,8 @@
         </p:nvSpPr>
         <p:spPr>
           <a:xfrm>
-            <a:off x="382842" y="1659451"/>
-            <a:ext cx="8588880" cy="646331"/>
+            <a:off x="350251" y="2441330"/>
+            <a:ext cx="5745749" cy="584775"/>
           </a:xfrm>
           <a:prstGeom prst="rect">
             <a:avLst/>
@@ -3216,17 +3214,17 @@
           <a:lstStyle/>
           <a:p>
             <a:r>
-              <a:t>BYD's Market Leadership</a:t>
-            </a:r>
-          </a:p>
-        </p:txBody>
-      </p:sp>
-      <p:sp>
-        <p:nvSpPr>
-          <p:cNvPr id="5" name="content2">
+              <a:t>Four Phases of Digital Payments</a:t>
+            </a:r>
+          </a:p>
+        </p:txBody>
+      </p:sp>
+      <p:sp>
+        <p:nvSpPr>
+          <p:cNvPr id="4" name="content3">
             <a:extLst>
               <a:ext uri="{FF2B5EF4-FFF2-40B4-BE49-F238E27FC236}">
-                <a16:creationId xmlns:a16="http://schemas.microsoft.com/office/drawing/2014/main" id="{0114294D-3C82-4496-9578-DE3D20CA1765}"/>
+                <a16:creationId xmlns:a16="http://schemas.microsoft.com/office/drawing/2014/main" id="{7ED6F132-1EC3-4F89-ACC9-391787BE6AE2}"/>
               </a:ext>
             </a:extLst>
           </p:cNvPr>
@@ -3235,8 +3233,8 @@
         </p:nvSpPr>
         <p:spPr>
           <a:xfrm>
-            <a:off x="402712" y="3940580"/>
-            <a:ext cx="8569010" cy="646331"/>
+            <a:off x="415434" y="5525002"/>
+            <a:ext cx="5647975" cy="646331"/>
           </a:xfrm>
           <a:prstGeom prst="rect">
             <a:avLst/>
@@ -3255,17 +3253,17 @@
           <a:lstStyle/>
           <a:p>
             <a:r>
-              <a:t>BYD's exports surged by 334.2% in 2023, reaching 242,765 units across over 70 countries, enhancing its global market presence.</a:t>
-            </a:r>
-          </a:p>
-        </p:txBody>
-      </p:sp>
-      <p:sp>
-        <p:nvSpPr>
-          <p:cNvPr id="6" name="head2">
+              <a:t>In 2024, India's digital payment adoption reached 87%, significantly exceeding the global average of 62%, driven by youth engagement and the rise of fintech solutions.</a:t>
+            </a:r>
+          </a:p>
+        </p:txBody>
+      </p:sp>
+      <p:sp>
+        <p:nvSpPr>
+          <p:cNvPr id="5" name="head3">
             <a:extLst>
               <a:ext uri="{FF2B5EF4-FFF2-40B4-BE49-F238E27FC236}">
-                <a16:creationId xmlns:a16="http://schemas.microsoft.com/office/drawing/2014/main" id="{EC54FAE9-D0C9-4E6D-BD92-BE588E00A0E5}"/>
+                <a16:creationId xmlns:a16="http://schemas.microsoft.com/office/drawing/2014/main" id="{1EC6BFD2-A54A-4CFB-BE32-CB35F7C65D66}"/>
               </a:ext>
             </a:extLst>
           </p:cNvPr>
@@ -3274,8 +3272,8 @@
         </p:nvSpPr>
         <p:spPr>
           <a:xfrm>
-            <a:off x="388238" y="3281321"/>
-            <a:ext cx="8583484" cy="646331"/>
+            <a:off x="382842" y="4952327"/>
+            <a:ext cx="5680567" cy="584775"/>
           </a:xfrm>
           <a:prstGeom prst="rect">
             <a:avLst/>
@@ -3289,17 +3287,17 @@
           <a:lstStyle/>
           <a:p>
             <a:r>
-              <a:t>International Expansion</a:t>
-            </a:r>
-          </a:p>
-        </p:txBody>
-      </p:sp>
-      <p:sp>
-        <p:nvSpPr>
-          <p:cNvPr id="7" name="content3">
+              <a:t>High Adoption Rates</a:t>
+            </a:r>
+          </a:p>
+        </p:txBody>
+      </p:sp>
+      <p:sp>
+        <p:nvSpPr>
+          <p:cNvPr id="6" name="content2">
             <a:extLst>
               <a:ext uri="{FF2B5EF4-FFF2-40B4-BE49-F238E27FC236}">
-                <a16:creationId xmlns:a16="http://schemas.microsoft.com/office/drawing/2014/main" id="{BAB09B8F-FCBE-446C-89AD-F3E542DDA470}"/>
+                <a16:creationId xmlns:a16="http://schemas.microsoft.com/office/drawing/2014/main" id="{228BCD66-C14B-42CD-A438-BC7AA99965CD}"/>
               </a:ext>
             </a:extLst>
           </p:cNvPr>
@@ -3308,8 +3306,8 @@
         </p:nvSpPr>
         <p:spPr>
           <a:xfrm>
-            <a:off x="382842" y="5566061"/>
-            <a:ext cx="8583484" cy="646331"/>
+            <a:off x="6374296" y="3043533"/>
+            <a:ext cx="5148396" cy="646331"/>
           </a:xfrm>
           <a:prstGeom prst="rect">
             <a:avLst/>
@@ -3328,17 +3326,17 @@
           <a:lstStyle/>
           <a:p>
             <a:r>
-              <a:t>BYD boasts an extensive brand matrix, including the Dynasty and Ocean series, solidifying its position in the global new energy sector.</a:t>
-            </a:r>
-          </a:p>
-        </p:txBody>
-      </p:sp>
-      <p:sp>
-        <p:nvSpPr>
-          <p:cNvPr id="8" name="head3">
+              <a:t>By December 2024, UPI achieved an impressive 16.73 billion transactions, reflecting its pivotal role in India's digital payment landscape and the surge in total digital transaction value to ₹2,428,200 billion.</a:t>
+            </a:r>
+          </a:p>
+        </p:txBody>
+      </p:sp>
+      <p:sp>
+        <p:nvSpPr>
+          <p:cNvPr id="7" name="head2">
             <a:extLst>
               <a:ext uri="{FF2B5EF4-FFF2-40B4-BE49-F238E27FC236}">
-                <a16:creationId xmlns:a16="http://schemas.microsoft.com/office/drawing/2014/main" id="{7F46E3E4-B57E-4E3B-ABC9-C8472D45B500}"/>
+                <a16:creationId xmlns:a16="http://schemas.microsoft.com/office/drawing/2014/main" id="{CD5BF12C-71C8-4652-9154-19F255752D5D}"/>
               </a:ext>
             </a:extLst>
           </p:cNvPr>
@@ -3347,8 +3345,8 @@
         </p:nvSpPr>
         <p:spPr>
           <a:xfrm>
-            <a:off x="388238" y="4900731"/>
-            <a:ext cx="8588880" cy="646331"/>
+            <a:off x="6341705" y="2441330"/>
+            <a:ext cx="5180986" cy="584775"/>
           </a:xfrm>
           <a:prstGeom prst="rect">
             <a:avLst/>
@@ -3362,17 +3360,17 @@
           <a:lstStyle/>
           <a:p>
             <a:r>
-              <a:t>Diverse Product Portfolio</a:t>
-            </a:r>
-          </a:p>
-        </p:txBody>
-      </p:sp>
-      <p:sp>
-        <p:nvSpPr>
-          <p:cNvPr id="4" name="subtopic">
+              <a:t>UPI's Transaction Milestone</a:t>
+            </a:r>
+          </a:p>
+        </p:txBody>
+      </p:sp>
+      <p:sp>
+        <p:nvSpPr>
+          <p:cNvPr id="9" name="head4">
             <a:extLst>
               <a:ext uri="{FF2B5EF4-FFF2-40B4-BE49-F238E27FC236}">
-                <a16:creationId xmlns:a16="http://schemas.microsoft.com/office/drawing/2014/main" id="{216BD8E4-BE8C-48D9-AFBB-D6093A341E66}"/>
+                <a16:creationId xmlns:a16="http://schemas.microsoft.com/office/drawing/2014/main" id="{B5F1E050-5BFC-480A-9E92-7665641E2034}"/>
               </a:ext>
             </a:extLst>
           </p:cNvPr>
@@ -3381,8 +3379,42 @@
         </p:nvSpPr>
         <p:spPr>
           <a:xfrm>
-            <a:off x="382842" y="202185"/>
-            <a:ext cx="10863056" cy="646331"/>
+            <a:off x="6341705" y="4952327"/>
+            <a:ext cx="5180986" cy="584775"/>
+          </a:xfrm>
+          <a:prstGeom prst="rect">
+            <a:avLst/>
+          </a:prstGeom>
+          <a:noFill/>
+        </p:spPr>
+        <p:txBody>
+          <a:bodyPr wrap="square" rtlCol="0">
+            <a:spAutoFit/>
+          </a:bodyPr>
+          <a:lstStyle/>
+          <a:p>
+            <a:r>
+              <a:t>Enhancing Financial Inclusion</a:t>
+            </a:r>
+          </a:p>
+        </p:txBody>
+      </p:sp>
+      <p:sp>
+        <p:nvSpPr>
+          <p:cNvPr id="21" name="content4">
+            <a:extLst>
+              <a:ext uri="{FF2B5EF4-FFF2-40B4-BE49-F238E27FC236}">
+                <a16:creationId xmlns:a16="http://schemas.microsoft.com/office/drawing/2014/main" id="{CFBB8D88-C46B-4BFD-95E5-3CD2F79AB4A3}"/>
+              </a:ext>
+            </a:extLst>
+          </p:cNvPr>
+          <p:cNvSpPr txBox="1"/>
+          <p:nvPr/>
+        </p:nvSpPr>
+        <p:spPr>
+          <a:xfrm>
+            <a:off x="6374296" y="5537102"/>
+            <a:ext cx="5148396" cy="646331"/>
           </a:xfrm>
           <a:prstGeom prst="rect">
             <a:avLst/>
@@ -3401,7 +3433,41 @@
           <a:lstStyle/>
           <a:p>
             <a:r>
-              <a:t>Overview of Tesla and BYD: Company Histories and Market Positions</a:t>
+              <a:t>UPI has significantly improved financial inclusion, especially for low-income households and small merchants, by simplifying transactions and expanding access to formal financial services.</a:t>
+            </a:r>
+          </a:p>
+        </p:txBody>
+      </p:sp>
+      <p:sp>
+        <p:nvSpPr>
+          <p:cNvPr id="27" name="subtopic">
+            <a:extLst>
+              <a:ext uri="{FF2B5EF4-FFF2-40B4-BE49-F238E27FC236}">
+                <a16:creationId xmlns:a16="http://schemas.microsoft.com/office/drawing/2014/main" id="{1FC39E55-DAC2-4D18-8701-DF4E171179AC}"/>
+              </a:ext>
+            </a:extLst>
+          </p:cNvPr>
+          <p:cNvSpPr txBox="1"/>
+          <p:nvPr/>
+        </p:nvSpPr>
+        <p:spPr>
+          <a:xfrm>
+            <a:off x="168257" y="330442"/>
+            <a:ext cx="10563455" cy="646331"/>
+          </a:xfrm>
+          <a:prstGeom prst="rect">
+            <a:avLst/>
+          </a:prstGeom>
+          <a:noFill/>
+        </p:spPr>
+        <p:txBody>
+          <a:bodyPr wrap="square" rtlCol="0">
+            <a:spAutoFit/>
+          </a:bodyPr>
+          <a:lstStyle/>
+          <a:p>
+            <a:r>
+              <a:t>The Evolution of Digital Payments in India: From Cash to UPI</a:t>
             </a:r>
           </a:p>
         </p:txBody>
@@ -3429,7 +3495,7 @@
           <p:cNvPr id="2" name="content1">
             <a:extLst>
               <a:ext uri="{FF2B5EF4-FFF2-40B4-BE49-F238E27FC236}">
-                <a16:creationId xmlns:a16="http://schemas.microsoft.com/office/drawing/2014/main" id="{4CFE2BC8-54A5-407E-B141-B5EC04BD3417}"/>
+                <a16:creationId xmlns:a16="http://schemas.microsoft.com/office/drawing/2014/main" id="{54FB0FDB-46CC-42BE-A833-C89184E3471E}"/>
               </a:ext>
             </a:extLst>
           </p:cNvPr>
@@ -3438,8 +3504,8 @@
         </p:nvSpPr>
         <p:spPr>
           <a:xfrm>
-            <a:off x="382842" y="2321170"/>
-            <a:ext cx="8588880" cy="646331"/>
+            <a:off x="350251" y="3043533"/>
+            <a:ext cx="5713159" cy="646331"/>
           </a:xfrm>
           <a:prstGeom prst="rect">
             <a:avLst/>
@@ -3458,7 +3524,7 @@
           <a:lstStyle/>
           <a:p>
             <a:r>
-              <a:t>BYD sold approximately 3 million cars in 2023, with a forecast of 4 million, while Tesla experienced a year-over-year sales decline in early 2024.</a:t>
+              <a:t>UPI's open architecture enables seamless interoperability among banks and payment providers, enhancing user convenience in digital transactions.</a:t>
             </a:r>
           </a:p>
         </p:txBody>
@@ -3468,7 +3534,7 @@
           <p:cNvPr id="3" name="head1">
             <a:extLst>
               <a:ext uri="{FF2B5EF4-FFF2-40B4-BE49-F238E27FC236}">
-                <a16:creationId xmlns:a16="http://schemas.microsoft.com/office/drawing/2014/main" id="{AF43DD1A-697B-4E09-8F47-DB6EB5F90E42}"/>
+                <a16:creationId xmlns:a16="http://schemas.microsoft.com/office/drawing/2014/main" id="{18484F3A-33E9-4106-BBE3-C35CDE75E4F4}"/>
               </a:ext>
             </a:extLst>
           </p:cNvPr>
@@ -3477,8 +3543,8 @@
         </p:nvSpPr>
         <p:spPr>
           <a:xfrm>
-            <a:off x="382842" y="1659451"/>
-            <a:ext cx="8588880" cy="646331"/>
+            <a:off x="350251" y="2441330"/>
+            <a:ext cx="5745749" cy="584775"/>
           </a:xfrm>
           <a:prstGeom prst="rect">
             <a:avLst/>
@@ -3492,17 +3558,17 @@
           <a:lstStyle/>
           <a:p>
             <a:r>
-              <a:t>Sales Performance</a:t>
-            </a:r>
-          </a:p>
-        </p:txBody>
-      </p:sp>
-      <p:sp>
-        <p:nvSpPr>
-          <p:cNvPr id="5" name="content2">
+              <a:t>Open Architecture Infrastructure</a:t>
+            </a:r>
+          </a:p>
+        </p:txBody>
+      </p:sp>
+      <p:sp>
+        <p:nvSpPr>
+          <p:cNvPr id="4" name="content3">
             <a:extLst>
               <a:ext uri="{FF2B5EF4-FFF2-40B4-BE49-F238E27FC236}">
-                <a16:creationId xmlns:a16="http://schemas.microsoft.com/office/drawing/2014/main" id="{0114294D-3C82-4496-9578-DE3D20CA1765}"/>
+                <a16:creationId xmlns:a16="http://schemas.microsoft.com/office/drawing/2014/main" id="{7ED6F132-1EC3-4F89-ACC9-391787BE6AE2}"/>
               </a:ext>
             </a:extLst>
           </p:cNvPr>
@@ -3511,8 +3577,8 @@
         </p:nvSpPr>
         <p:spPr>
           <a:xfrm>
-            <a:off x="402712" y="3940580"/>
-            <a:ext cx="8569010" cy="646331"/>
+            <a:off x="415434" y="5525002"/>
+            <a:ext cx="5647975" cy="646331"/>
           </a:xfrm>
           <a:prstGeom prst="rect">
             <a:avLst/>
@@ -3531,17 +3597,17 @@
           <a:lstStyle/>
           <a:p>
             <a:r>
-              <a:t>BYD drives down costs through vertical integration, enhancing its competitive edge in the EV market.</a:t>
-            </a:r>
-          </a:p>
-        </p:txBody>
-      </p:sp>
-      <p:sp>
-        <p:nvSpPr>
-          <p:cNvPr id="6" name="head2">
+              <a:t>Recent UPI advancements allow credit card payments directly within the platform, catering to users who prefer credit over debit transactions.</a:t>
+            </a:r>
+          </a:p>
+        </p:txBody>
+      </p:sp>
+      <p:sp>
+        <p:nvSpPr>
+          <p:cNvPr id="5" name="head3">
             <a:extLst>
               <a:ext uri="{FF2B5EF4-FFF2-40B4-BE49-F238E27FC236}">
-                <a16:creationId xmlns:a16="http://schemas.microsoft.com/office/drawing/2014/main" id="{EC54FAE9-D0C9-4E6D-BD92-BE588E00A0E5}"/>
+                <a16:creationId xmlns:a16="http://schemas.microsoft.com/office/drawing/2014/main" id="{1EC6BFD2-A54A-4CFB-BE32-CB35F7C65D66}"/>
               </a:ext>
             </a:extLst>
           </p:cNvPr>
@@ -3550,8 +3616,8 @@
         </p:nvSpPr>
         <p:spPr>
           <a:xfrm>
-            <a:off x="388238" y="3281321"/>
-            <a:ext cx="8583484" cy="646331"/>
+            <a:off x="382842" y="4952327"/>
+            <a:ext cx="5680567" cy="584775"/>
           </a:xfrm>
           <a:prstGeom prst="rect">
             <a:avLst/>
@@ -3565,17 +3631,17 @@
           <a:lstStyle/>
           <a:p>
             <a:r>
-              <a:t>Vertical Integration</a:t>
-            </a:r>
-          </a:p>
-        </p:txBody>
-      </p:sp>
-      <p:sp>
-        <p:nvSpPr>
-          <p:cNvPr id="7" name="content3">
+              <a:t>Integration of Credit Cards</a:t>
+            </a:r>
+          </a:p>
+        </p:txBody>
+      </p:sp>
+      <p:sp>
+        <p:nvSpPr>
+          <p:cNvPr id="6" name="content2">
             <a:extLst>
               <a:ext uri="{FF2B5EF4-FFF2-40B4-BE49-F238E27FC236}">
-                <a16:creationId xmlns:a16="http://schemas.microsoft.com/office/drawing/2014/main" id="{BAB09B8F-FCBE-446C-89AD-F3E542DDA470}"/>
+                <a16:creationId xmlns:a16="http://schemas.microsoft.com/office/drawing/2014/main" id="{228BCD66-C14B-42CD-A438-BC7AA99965CD}"/>
               </a:ext>
             </a:extLst>
           </p:cNvPr>
@@ -3584,8 +3650,8 @@
         </p:nvSpPr>
         <p:spPr>
           <a:xfrm>
-            <a:off x="382842" y="5566061"/>
-            <a:ext cx="8583484" cy="646331"/>
+            <a:off x="6374296" y="3043533"/>
+            <a:ext cx="5148396" cy="646331"/>
           </a:xfrm>
           <a:prstGeom prst="rect">
             <a:avLst/>
@@ -3604,17 +3670,17 @@
           <a:lstStyle/>
           <a:p>
             <a:r>
-              <a:t>BYD is one of the largest battery manufacturers, contributing to a significant cost advantage in China's EV sector.</a:t>
-            </a:r>
-          </a:p>
-        </p:txBody>
-      </p:sp>
-      <p:sp>
-        <p:nvSpPr>
-          <p:cNvPr id="8" name="head3">
+              <a:t>Key UPI innovations include single-click payments, virtual addresses, and recurring payment setups, simplifying transactions and improving user experience.</a:t>
+            </a:r>
+          </a:p>
+        </p:txBody>
+      </p:sp>
+      <p:sp>
+        <p:nvSpPr>
+          <p:cNvPr id="7" name="head2">
             <a:extLst>
               <a:ext uri="{FF2B5EF4-FFF2-40B4-BE49-F238E27FC236}">
-                <a16:creationId xmlns:a16="http://schemas.microsoft.com/office/drawing/2014/main" id="{7F46E3E4-B57E-4E3B-ABC9-C8472D45B500}"/>
+                <a16:creationId xmlns:a16="http://schemas.microsoft.com/office/drawing/2014/main" id="{CD5BF12C-71C8-4652-9154-19F255752D5D}"/>
               </a:ext>
             </a:extLst>
           </p:cNvPr>
@@ -3623,8 +3689,8 @@
         </p:nvSpPr>
         <p:spPr>
           <a:xfrm>
-            <a:off x="388238" y="4900731"/>
-            <a:ext cx="8588880" cy="646331"/>
+            <a:off x="6341705" y="2441330"/>
+            <a:ext cx="5180986" cy="584775"/>
           </a:xfrm>
           <a:prstGeom prst="rect">
             <a:avLst/>
@@ -3638,17 +3704,17 @@
           <a:lstStyle/>
           <a:p>
             <a:r>
-              <a:t>Battery Manufacturing</a:t>
-            </a:r>
-          </a:p>
-        </p:txBody>
-      </p:sp>
-      <p:sp>
-        <p:nvSpPr>
-          <p:cNvPr id="4" name="subtopic">
+              <a:t>Innovative Payment Features</a:t>
+            </a:r>
+          </a:p>
+        </p:txBody>
+      </p:sp>
+      <p:sp>
+        <p:nvSpPr>
+          <p:cNvPr id="9" name="head4">
             <a:extLst>
               <a:ext uri="{FF2B5EF4-FFF2-40B4-BE49-F238E27FC236}">
-                <a16:creationId xmlns:a16="http://schemas.microsoft.com/office/drawing/2014/main" id="{216BD8E4-BE8C-48D9-AFBB-D6093A341E66}"/>
+                <a16:creationId xmlns:a16="http://schemas.microsoft.com/office/drawing/2014/main" id="{B5F1E050-5BFC-480A-9E92-7665641E2034}"/>
               </a:ext>
             </a:extLst>
           </p:cNvPr>
@@ -3657,8 +3723,42 @@
         </p:nvSpPr>
         <p:spPr>
           <a:xfrm>
-            <a:off x="382842" y="202185"/>
-            <a:ext cx="10863056" cy="646331"/>
+            <a:off x="6341705" y="4952327"/>
+            <a:ext cx="5180986" cy="584775"/>
+          </a:xfrm>
+          <a:prstGeom prst="rect">
+            <a:avLst/>
+          </a:prstGeom>
+          <a:noFill/>
+        </p:spPr>
+        <p:txBody>
+          <a:bodyPr wrap="square" rtlCol="0">
+            <a:spAutoFit/>
+          </a:bodyPr>
+          <a:lstStyle/>
+          <a:p>
+            <a:r>
+              <a:t>Global Expansion of UPI</a:t>
+            </a:r>
+          </a:p>
+        </p:txBody>
+      </p:sp>
+      <p:sp>
+        <p:nvSpPr>
+          <p:cNvPr id="21" name="content4">
+            <a:extLst>
+              <a:ext uri="{FF2B5EF4-FFF2-40B4-BE49-F238E27FC236}">
+                <a16:creationId xmlns:a16="http://schemas.microsoft.com/office/drawing/2014/main" id="{CFBB8D88-C46B-4BFD-95E5-3CD2F79AB4A3}"/>
+              </a:ext>
+            </a:extLst>
+          </p:cNvPr>
+          <p:cNvSpPr txBox="1"/>
+          <p:nvPr/>
+        </p:nvSpPr>
+        <p:spPr>
+          <a:xfrm>
+            <a:off x="6374296" y="5537102"/>
+            <a:ext cx="5148396" cy="646331"/>
           </a:xfrm>
           <a:prstGeom prst="rect">
             <a:avLst/>
@@ -3677,7 +3777,41 @@
           <a:lstStyle/>
           <a:p>
             <a:r>
-              <a:t>Technological Innovations: Comparing EV Technologies and Features</a:t>
+              <a:t>UPI's services have expanded to countries like Singapore, UAE, and Nepal, showcasing its potential as a global model for real-time payment systems.</a:t>
+            </a:r>
+          </a:p>
+        </p:txBody>
+      </p:sp>
+      <p:sp>
+        <p:nvSpPr>
+          <p:cNvPr id="27" name="subtopic">
+            <a:extLst>
+              <a:ext uri="{FF2B5EF4-FFF2-40B4-BE49-F238E27FC236}">
+                <a16:creationId xmlns:a16="http://schemas.microsoft.com/office/drawing/2014/main" id="{1FC39E55-DAC2-4D18-8701-DF4E171179AC}"/>
+              </a:ext>
+            </a:extLst>
+          </p:cNvPr>
+          <p:cNvSpPr txBox="1"/>
+          <p:nvPr/>
+        </p:nvSpPr>
+        <p:spPr>
+          <a:xfrm>
+            <a:off x="168257" y="330442"/>
+            <a:ext cx="10563455" cy="646331"/>
+          </a:xfrm>
+          <a:prstGeom prst="rect">
+            <a:avLst/>
+          </a:prstGeom>
+          <a:noFill/>
+        </p:spPr>
+        <p:txBody>
+          <a:bodyPr wrap="square" rtlCol="0">
+            <a:spAutoFit/>
+          </a:bodyPr>
+          <a:lstStyle/>
+          <a:p>
+            <a:r>
+              <a:t>Key Features and Innovations of UPI: How It Works</a:t>
             </a:r>
           </a:p>
         </p:txBody>
@@ -3705,7 +3839,7 @@
           <p:cNvPr id="2" name="content1">
             <a:extLst>
               <a:ext uri="{FF2B5EF4-FFF2-40B4-BE49-F238E27FC236}">
-                <a16:creationId xmlns:a16="http://schemas.microsoft.com/office/drawing/2014/main" id="{4CFE2BC8-54A5-407E-B141-B5EC04BD3417}"/>
+                <a16:creationId xmlns:a16="http://schemas.microsoft.com/office/drawing/2014/main" id="{54FB0FDB-46CC-42BE-A833-C89184E3471E}"/>
               </a:ext>
             </a:extLst>
           </p:cNvPr>
@@ -3714,8 +3848,8 @@
         </p:nvSpPr>
         <p:spPr>
           <a:xfrm>
-            <a:off x="382842" y="2321170"/>
-            <a:ext cx="8588880" cy="646331"/>
+            <a:off x="350251" y="3043533"/>
+            <a:ext cx="5713159" cy="646331"/>
           </a:xfrm>
           <a:prstGeom prst="rect">
             <a:avLst/>
@@ -3734,7 +3868,7 @@
           <a:lstStyle/>
           <a:p>
             <a:r>
-              <a:t>BYD surpassed Tesla in production volume in 2024, producing 1,777,965 battery electric vehicles (BEVs).</a:t>
+              <a:t>UPI has boosted India's Financial Inclusion Index from 43.4 in 2017 to 64.2 in 2024, enhancing access to financial services for low-income households and small merchants.</a:t>
             </a:r>
           </a:p>
         </p:txBody>
@@ -3744,7 +3878,7 @@
           <p:cNvPr id="3" name="head1">
             <a:extLst>
               <a:ext uri="{FF2B5EF4-FFF2-40B4-BE49-F238E27FC236}">
-                <a16:creationId xmlns:a16="http://schemas.microsoft.com/office/drawing/2014/main" id="{AF43DD1A-697B-4E09-8F47-DB6EB5F90E42}"/>
+                <a16:creationId xmlns:a16="http://schemas.microsoft.com/office/drawing/2014/main" id="{18484F3A-33E9-4106-BBE3-C35CDE75E4F4}"/>
               </a:ext>
             </a:extLst>
           </p:cNvPr>
@@ -3753,8 +3887,8 @@
         </p:nvSpPr>
         <p:spPr>
           <a:xfrm>
-            <a:off x="382842" y="1659451"/>
-            <a:ext cx="8588880" cy="646331"/>
+            <a:off x="350251" y="2441330"/>
+            <a:ext cx="5745749" cy="584775"/>
           </a:xfrm>
           <a:prstGeom prst="rect">
             <a:avLst/>
@@ -3768,17 +3902,17 @@
           <a:lstStyle/>
           <a:p>
             <a:r>
-              <a:t>Production Volume</a:t>
-            </a:r>
-          </a:p>
-        </p:txBody>
-      </p:sp>
-      <p:sp>
-        <p:nvSpPr>
-          <p:cNvPr id="5" name="content2">
+              <a:t>Advancement in Financial Inclusion</a:t>
+            </a:r>
+          </a:p>
+        </p:txBody>
+      </p:sp>
+      <p:sp>
+        <p:nvSpPr>
+          <p:cNvPr id="4" name="content3">
             <a:extLst>
               <a:ext uri="{FF2B5EF4-FFF2-40B4-BE49-F238E27FC236}">
-                <a16:creationId xmlns:a16="http://schemas.microsoft.com/office/drawing/2014/main" id="{0114294D-3C82-4496-9578-DE3D20CA1765}"/>
+                <a16:creationId xmlns:a16="http://schemas.microsoft.com/office/drawing/2014/main" id="{7ED6F132-1EC3-4F89-ACC9-391787BE6AE2}"/>
               </a:ext>
             </a:extLst>
           </p:cNvPr>
@@ -3787,8 +3921,8 @@
         </p:nvSpPr>
         <p:spPr>
           <a:xfrm>
-            <a:off x="402712" y="3940580"/>
-            <a:ext cx="8569010" cy="646331"/>
+            <a:off x="415434" y="5525002"/>
+            <a:ext cx="5647975" cy="646331"/>
           </a:xfrm>
           <a:prstGeom prst="rect">
             <a:avLst/>
@@ -3807,17 +3941,17 @@
           <a:lstStyle/>
           <a:p>
             <a:r>
-              <a:t>Tesla led in sales with 1.79 million units sold in 2024, slightly ahead of BYD's 1.76 million units.</a:t>
-            </a:r>
-          </a:p>
-        </p:txBody>
-      </p:sp>
-      <p:sp>
-        <p:nvSpPr>
-          <p:cNvPr id="6" name="head2">
+              <a:t>Since its launch, UPI has saved the Indian economy approximately $67 billion and is projected to increase GDP by $45.6 billion (1.12%) by 2026.</a:t>
+            </a:r>
+          </a:p>
+        </p:txBody>
+      </p:sp>
+      <p:sp>
+        <p:nvSpPr>
+          <p:cNvPr id="5" name="head3">
             <a:extLst>
               <a:ext uri="{FF2B5EF4-FFF2-40B4-BE49-F238E27FC236}">
-                <a16:creationId xmlns:a16="http://schemas.microsoft.com/office/drawing/2014/main" id="{EC54FAE9-D0C9-4E6D-BD92-BE588E00A0E5}"/>
+                <a16:creationId xmlns:a16="http://schemas.microsoft.com/office/drawing/2014/main" id="{1EC6BFD2-A54A-4CFB-BE32-CB35F7C65D66}"/>
               </a:ext>
             </a:extLst>
           </p:cNvPr>
@@ -3826,8 +3960,8 @@
         </p:nvSpPr>
         <p:spPr>
           <a:xfrm>
-            <a:off x="388238" y="3281321"/>
-            <a:ext cx="8583484" cy="646331"/>
+            <a:off x="382842" y="4952327"/>
+            <a:ext cx="5680567" cy="584775"/>
           </a:xfrm>
           <a:prstGeom prst="rect">
             <a:avLst/>
@@ -3841,17 +3975,17 @@
           <a:lstStyle/>
           <a:p>
             <a:r>
-              <a:t>Sales Performance</a:t>
-            </a:r>
-          </a:p>
-        </p:txBody>
-      </p:sp>
-      <p:sp>
-        <p:nvSpPr>
-          <p:cNvPr id="7" name="content3">
+              <a:t>Significant Economic Contributions</a:t>
+            </a:r>
+          </a:p>
+        </p:txBody>
+      </p:sp>
+      <p:sp>
+        <p:nvSpPr>
+          <p:cNvPr id="6" name="content2">
             <a:extLst>
               <a:ext uri="{FF2B5EF4-FFF2-40B4-BE49-F238E27FC236}">
-                <a16:creationId xmlns:a16="http://schemas.microsoft.com/office/drawing/2014/main" id="{BAB09B8F-FCBE-446C-89AD-F3E542DDA470}"/>
+                <a16:creationId xmlns:a16="http://schemas.microsoft.com/office/drawing/2014/main" id="{228BCD66-C14B-42CD-A438-BC7AA99965CD}"/>
               </a:ext>
             </a:extLst>
           </p:cNvPr>
@@ -3860,8 +3994,8 @@
         </p:nvSpPr>
         <p:spPr>
           <a:xfrm>
-            <a:off x="382842" y="5566061"/>
-            <a:ext cx="8583484" cy="646331"/>
+            <a:off x="6374296" y="3043533"/>
+            <a:ext cx="5148396" cy="646331"/>
           </a:xfrm>
           <a:prstGeom prst="rect">
             <a:avLst/>
@@ -3880,17 +4014,17 @@
           <a:lstStyle/>
           <a:p>
             <a:r>
-              <a:t>BYD is projected to become the sole global sales leader in the electric vehicle sector by 2025, overtaking Tesla.</a:t>
-            </a:r>
-          </a:p>
-        </p:txBody>
-      </p:sp>
-      <p:sp>
-        <p:nvSpPr>
-          <p:cNvPr id="8" name="head3">
+              <a:t>UPI transactions soared from 0.09 million in July 2016 to over 16.7 billion by December 2024, integrating underserved populations into the formal economy.</a:t>
+            </a:r>
+          </a:p>
+        </p:txBody>
+      </p:sp>
+      <p:sp>
+        <p:nvSpPr>
+          <p:cNvPr id="7" name="head2">
             <a:extLst>
               <a:ext uri="{FF2B5EF4-FFF2-40B4-BE49-F238E27FC236}">
-                <a16:creationId xmlns:a16="http://schemas.microsoft.com/office/drawing/2014/main" id="{7F46E3E4-B57E-4E3B-ABC9-C8472D45B500}"/>
+                <a16:creationId xmlns:a16="http://schemas.microsoft.com/office/drawing/2014/main" id="{CD5BF12C-71C8-4652-9154-19F255752D5D}"/>
               </a:ext>
             </a:extLst>
           </p:cNvPr>
@@ -3899,8 +4033,8 @@
         </p:nvSpPr>
         <p:spPr>
           <a:xfrm>
-            <a:off x="388238" y="4900731"/>
-            <a:ext cx="8588880" cy="646331"/>
+            <a:off x="6341705" y="2441330"/>
+            <a:ext cx="5180986" cy="584775"/>
           </a:xfrm>
           <a:prstGeom prst="rect">
             <a:avLst/>
@@ -3914,17 +4048,17 @@
           <a:lstStyle/>
           <a:p>
             <a:r>
-              <a:t>Market Leadership Shift</a:t>
-            </a:r>
-          </a:p>
-        </p:txBody>
-      </p:sp>
-      <p:sp>
-        <p:nvSpPr>
-          <p:cNvPr id="4" name="subtopic">
+              <a:t>Surge in Transaction Volumes</a:t>
+            </a:r>
+          </a:p>
+        </p:txBody>
+      </p:sp>
+      <p:sp>
+        <p:nvSpPr>
+          <p:cNvPr id="9" name="head4">
             <a:extLst>
               <a:ext uri="{FF2B5EF4-FFF2-40B4-BE49-F238E27FC236}">
-                <a16:creationId xmlns:a16="http://schemas.microsoft.com/office/drawing/2014/main" id="{216BD8E4-BE8C-48D9-AFBB-D6093A341E66}"/>
+                <a16:creationId xmlns:a16="http://schemas.microsoft.com/office/drawing/2014/main" id="{B5F1E050-5BFC-480A-9E92-7665641E2034}"/>
               </a:ext>
             </a:extLst>
           </p:cNvPr>
@@ -3933,8 +4067,42 @@
         </p:nvSpPr>
         <p:spPr>
           <a:xfrm>
-            <a:off x="382842" y="202185"/>
-            <a:ext cx="10863056" cy="646331"/>
+            <a:off x="6341705" y="4952327"/>
+            <a:ext cx="5180986" cy="584775"/>
+          </a:xfrm>
+          <a:prstGeom prst="rect">
+            <a:avLst/>
+          </a:prstGeom>
+          <a:noFill/>
+        </p:spPr>
+        <p:txBody>
+          <a:bodyPr wrap="square" rtlCol="0">
+            <a:spAutoFit/>
+          </a:bodyPr>
+          <a:lstStyle/>
+          <a:p>
+            <a:r>
+              <a:t>Preferred Payment Method</a:t>
+            </a:r>
+          </a:p>
+        </p:txBody>
+      </p:sp>
+      <p:sp>
+        <p:nvSpPr>
+          <p:cNvPr id="21" name="content4">
+            <a:extLst>
+              <a:ext uri="{FF2B5EF4-FFF2-40B4-BE49-F238E27FC236}">
+                <a16:creationId xmlns:a16="http://schemas.microsoft.com/office/drawing/2014/main" id="{CFBB8D88-C46B-4BFD-95E5-3CD2F79AB4A3}"/>
+              </a:ext>
+            </a:extLst>
+          </p:cNvPr>
+          <p:cNvSpPr txBox="1"/>
+          <p:nvPr/>
+        </p:nvSpPr>
+        <p:spPr>
+          <a:xfrm>
+            <a:off x="6374296" y="5537102"/>
+            <a:ext cx="5148396" cy="646331"/>
           </a:xfrm>
           <a:prstGeom prst="rect">
             <a:avLst/>
@@ -3953,7 +4121,41 @@
           <a:lstStyle/>
           <a:p>
             <a:r>
-              <a:t>Performance Metrics: Sales, Production, and Market Share Analysis</a:t>
+              <a:t>Over 43% of users favor UPI for its ease, speed, and security, driving a shift towards digital transactions and lowering transaction costs.</a:t>
+            </a:r>
+          </a:p>
+        </p:txBody>
+      </p:sp>
+      <p:sp>
+        <p:nvSpPr>
+          <p:cNvPr id="27" name="subtopic">
+            <a:extLst>
+              <a:ext uri="{FF2B5EF4-FFF2-40B4-BE49-F238E27FC236}">
+                <a16:creationId xmlns:a16="http://schemas.microsoft.com/office/drawing/2014/main" id="{1FC39E55-DAC2-4D18-8701-DF4E171179AC}"/>
+              </a:ext>
+            </a:extLst>
+          </p:cNvPr>
+          <p:cNvSpPr txBox="1"/>
+          <p:nvPr/>
+        </p:nvSpPr>
+        <p:spPr>
+          <a:xfrm>
+            <a:off x="168257" y="330442"/>
+            <a:ext cx="10563455" cy="646331"/>
+          </a:xfrm>
+          <a:prstGeom prst="rect">
+            <a:avLst/>
+          </a:prstGeom>
+          <a:noFill/>
+        </p:spPr>
+        <p:txBody>
+          <a:bodyPr wrap="square" rtlCol="0">
+            <a:spAutoFit/>
+          </a:bodyPr>
+          <a:lstStyle/>
+          <a:p>
+            <a:r>
+              <a:t>UPI's Impact on Financial Inclusion and Economic Growth</a:t>
             </a:r>
           </a:p>
         </p:txBody>
@@ -3981,7 +4183,7 @@
           <p:cNvPr id="2" name="content1">
             <a:extLst>
               <a:ext uri="{FF2B5EF4-FFF2-40B4-BE49-F238E27FC236}">
-                <a16:creationId xmlns:a16="http://schemas.microsoft.com/office/drawing/2014/main" id="{4CFE2BC8-54A5-407E-B141-B5EC04BD3417}"/>
+                <a16:creationId xmlns:a16="http://schemas.microsoft.com/office/drawing/2014/main" id="{54FB0FDB-46CC-42BE-A833-C89184E3471E}"/>
               </a:ext>
             </a:extLst>
           </p:cNvPr>
@@ -3990,8 +4192,8 @@
         </p:nvSpPr>
         <p:spPr>
           <a:xfrm>
-            <a:off x="382842" y="2321170"/>
-            <a:ext cx="8588880" cy="646331"/>
+            <a:off x="350251" y="3043533"/>
+            <a:ext cx="5713159" cy="646331"/>
           </a:xfrm>
           <a:prstGeom prst="rect">
             <a:avLst/>
@@ -4010,7 +4212,7 @@
           <a:lstStyle/>
           <a:p>
             <a:r>
-              <a:t>BYD employs a cost-plus pricing strategy, leveraging vertical integration to maintain competitive pricing and secure market share.</a:t>
+              <a:t>UPI encounters issues like technical glitches and outages, impacting transaction success; ongoing infrastructure improvements aim to enhance reliability.</a:t>
             </a:r>
           </a:p>
         </p:txBody>
@@ -4020,7 +4222,7 @@
           <p:cNvPr id="3" name="head1">
             <a:extLst>
               <a:ext uri="{FF2B5EF4-FFF2-40B4-BE49-F238E27FC236}">
-                <a16:creationId xmlns:a16="http://schemas.microsoft.com/office/drawing/2014/main" id="{AF43DD1A-697B-4E09-8F47-DB6EB5F90E42}"/>
+                <a16:creationId xmlns:a16="http://schemas.microsoft.com/office/drawing/2014/main" id="{18484F3A-33E9-4106-BBE3-C35CDE75E4F4}"/>
               </a:ext>
             </a:extLst>
           </p:cNvPr>
@@ -4029,8 +4231,8 @@
         </p:nvSpPr>
         <p:spPr>
           <a:xfrm>
-            <a:off x="382842" y="1659451"/>
-            <a:ext cx="8588880" cy="646331"/>
+            <a:off x="350251" y="2441330"/>
+            <a:ext cx="5745749" cy="584775"/>
           </a:xfrm>
           <a:prstGeom prst="rect">
             <a:avLst/>
@@ -4044,17 +4246,17 @@
           <a:lstStyle/>
           <a:p>
             <a:r>
-              <a:t>BYD's Cost-Plus Pricing</a:t>
-            </a:r>
-          </a:p>
-        </p:txBody>
-      </p:sp>
-      <p:sp>
-        <p:nvSpPr>
-          <p:cNvPr id="5" name="content2">
+              <a:t>Technical Challenges in UPI</a:t>
+            </a:r>
+          </a:p>
+        </p:txBody>
+      </p:sp>
+      <p:sp>
+        <p:nvSpPr>
+          <p:cNvPr id="4" name="content3">
             <a:extLst>
               <a:ext uri="{FF2B5EF4-FFF2-40B4-BE49-F238E27FC236}">
-                <a16:creationId xmlns:a16="http://schemas.microsoft.com/office/drawing/2014/main" id="{0114294D-3C82-4496-9578-DE3D20CA1765}"/>
+                <a16:creationId xmlns:a16="http://schemas.microsoft.com/office/drawing/2014/main" id="{7ED6F132-1EC3-4F89-ACC9-391787BE6AE2}"/>
               </a:ext>
             </a:extLst>
           </p:cNvPr>
@@ -4063,8 +4265,8 @@
         </p:nvSpPr>
         <p:spPr>
           <a:xfrm>
-            <a:off x="402712" y="3940580"/>
-            <a:ext cx="8569010" cy="646331"/>
+            <a:off x="415434" y="5525002"/>
+            <a:ext cx="5647975" cy="646331"/>
           </a:xfrm>
           <a:prstGeom prst="rect">
             <a:avLst/>
@@ -4083,17 +4285,17 @@
           <a:lstStyle/>
           <a:p>
             <a:r>
-              <a:t>Tesla utilizes a value-based pricing strategy, focusing on premium branding and software integration, which enhances perceived value but limits volume growth.</a:t>
-            </a:r>
-          </a:p>
-        </p:txBody>
-      </p:sp>
-      <p:sp>
-        <p:nvSpPr>
-          <p:cNvPr id="6" name="head2">
+              <a:t>Despite high awareness of UPI, a gap exists in active usage, particularly in rural regions; targeted campaigns and incentives are crucial for building consumer trust.</a:t>
+            </a:r>
+          </a:p>
+        </p:txBody>
+      </p:sp>
+      <p:sp>
+        <p:nvSpPr>
+          <p:cNvPr id="5" name="head3">
             <a:extLst>
               <a:ext uri="{FF2B5EF4-FFF2-40B4-BE49-F238E27FC236}">
-                <a16:creationId xmlns:a16="http://schemas.microsoft.com/office/drawing/2014/main" id="{EC54FAE9-D0C9-4E6D-BD92-BE588E00A0E5}"/>
+                <a16:creationId xmlns:a16="http://schemas.microsoft.com/office/drawing/2014/main" id="{1EC6BFD2-A54A-4CFB-BE32-CB35F7C65D66}"/>
               </a:ext>
             </a:extLst>
           </p:cNvPr>
@@ -4102,8 +4304,8 @@
         </p:nvSpPr>
         <p:spPr>
           <a:xfrm>
-            <a:off x="388238" y="3281321"/>
-            <a:ext cx="8583484" cy="646331"/>
+            <a:off x="382842" y="4952327"/>
+            <a:ext cx="5680567" cy="584775"/>
           </a:xfrm>
           <a:prstGeom prst="rect">
             <a:avLst/>
@@ -4117,17 +4319,17 @@
           <a:lstStyle/>
           <a:p>
             <a:r>
-              <a:t>Tesla's Value-Based Approach</a:t>
-            </a:r>
-          </a:p>
-        </p:txBody>
-      </p:sp>
-      <p:sp>
-        <p:nvSpPr>
-          <p:cNvPr id="7" name="content3">
+              <a:t>Need for Awareness Campaigns</a:t>
+            </a:r>
+          </a:p>
+        </p:txBody>
+      </p:sp>
+      <p:sp>
+        <p:nvSpPr>
+          <p:cNvPr id="6" name="content2">
             <a:extLst>
               <a:ext uri="{FF2B5EF4-FFF2-40B4-BE49-F238E27FC236}">
-                <a16:creationId xmlns:a16="http://schemas.microsoft.com/office/drawing/2014/main" id="{BAB09B8F-FCBE-446C-89AD-F3E542DDA470}"/>
+                <a16:creationId xmlns:a16="http://schemas.microsoft.com/office/drawing/2014/main" id="{228BCD66-C14B-42CD-A438-BC7AA99965CD}"/>
               </a:ext>
             </a:extLst>
           </p:cNvPr>
@@ -4136,8 +4338,8 @@
         </p:nvSpPr>
         <p:spPr>
           <a:xfrm>
-            <a:off x="382842" y="5566061"/>
-            <a:ext cx="8583484" cy="646331"/>
+            <a:off x="6374296" y="3043533"/>
+            <a:ext cx="5148396" cy="646331"/>
           </a:xfrm>
           <a:prstGeom prst="rect">
             <a:avLst/>
@@ -4156,17 +4358,17 @@
           <a:lstStyle/>
           <a:p>
             <a:r>
-              <a:t>The contrasting strategies lead to a price war, with BYD's low-cost approach causing margin compression and brand dilution, while Tesla's premium focus restricts market expansion.</a:t>
-            </a:r>
-          </a:p>
-        </p:txBody>
-      </p:sp>
-      <p:sp>
-        <p:nvSpPr>
-          <p:cNvPr id="8" name="head3">
+              <a:t>Limited digital literacy and smartphone access in rural India hinder UPI adoption, necessitating initiatives to improve technology access and financial education.</a:t>
+            </a:r>
+          </a:p>
+        </p:txBody>
+      </p:sp>
+      <p:sp>
+        <p:nvSpPr>
+          <p:cNvPr id="7" name="head2">
             <a:extLst>
               <a:ext uri="{FF2B5EF4-FFF2-40B4-BE49-F238E27FC236}">
-                <a16:creationId xmlns:a16="http://schemas.microsoft.com/office/drawing/2014/main" id="{7F46E3E4-B57E-4E3B-ABC9-C8472D45B500}"/>
+                <a16:creationId xmlns:a16="http://schemas.microsoft.com/office/drawing/2014/main" id="{CD5BF12C-71C8-4652-9154-19F255752D5D}"/>
               </a:ext>
             </a:extLst>
           </p:cNvPr>
@@ -4175,8 +4377,8 @@
         </p:nvSpPr>
         <p:spPr>
           <a:xfrm>
-            <a:off x="388238" y="4900731"/>
-            <a:ext cx="8588880" cy="646331"/>
+            <a:off x="6341705" y="2441330"/>
+            <a:ext cx="5180986" cy="584775"/>
           </a:xfrm>
           <a:prstGeom prst="rect">
             <a:avLst/>
@@ -4190,17 +4392,17 @@
           <a:lstStyle/>
           <a:p>
             <a:r>
-              <a:t>Market Impact of Pricing Strategies</a:t>
-            </a:r>
-          </a:p>
-        </p:txBody>
-      </p:sp>
-      <p:sp>
-        <p:nvSpPr>
-          <p:cNvPr id="4" name="subtopic">
+              <a:t>Digital Divide in Rural Areas</a:t>
+            </a:r>
+          </a:p>
+        </p:txBody>
+      </p:sp>
+      <p:sp>
+        <p:nvSpPr>
+          <p:cNvPr id="9" name="head4">
             <a:extLst>
               <a:ext uri="{FF2B5EF4-FFF2-40B4-BE49-F238E27FC236}">
-                <a16:creationId xmlns:a16="http://schemas.microsoft.com/office/drawing/2014/main" id="{216BD8E4-BE8C-48D9-AFBB-D6093A341E66}"/>
+                <a16:creationId xmlns:a16="http://schemas.microsoft.com/office/drawing/2014/main" id="{B5F1E050-5BFC-480A-9E92-7665641E2034}"/>
               </a:ext>
             </a:extLst>
           </p:cNvPr>
@@ -4209,8 +4411,42 @@
         </p:nvSpPr>
         <p:spPr>
           <a:xfrm>
-            <a:off x="382842" y="202185"/>
-            <a:ext cx="10863056" cy="646331"/>
+            <a:off x="6341705" y="4952327"/>
+            <a:ext cx="5180986" cy="584775"/>
+          </a:xfrm>
+          <a:prstGeom prst="rect">
+            <a:avLst/>
+          </a:prstGeom>
+          <a:noFill/>
+        </p:spPr>
+        <p:txBody>
+          <a:bodyPr wrap="square" rtlCol="0">
+            <a:spAutoFit/>
+          </a:bodyPr>
+          <a:lstStyle/>
+          <a:p>
+            <a:r>
+              <a:t>Enhancements with UPI 2.0</a:t>
+            </a:r>
+          </a:p>
+        </p:txBody>
+      </p:sp>
+      <p:sp>
+        <p:nvSpPr>
+          <p:cNvPr id="21" name="content4">
+            <a:extLst>
+              <a:ext uri="{FF2B5EF4-FFF2-40B4-BE49-F238E27FC236}">
+                <a16:creationId xmlns:a16="http://schemas.microsoft.com/office/drawing/2014/main" id="{CFBB8D88-C46B-4BFD-95E5-3CD2F79AB4A3}"/>
+              </a:ext>
+            </a:extLst>
+          </p:cNvPr>
+          <p:cNvSpPr txBox="1"/>
+          <p:nvPr/>
+        </p:nvSpPr>
+        <p:spPr>
+          <a:xfrm>
+            <a:off x="6374296" y="5537102"/>
+            <a:ext cx="5148396" cy="646331"/>
           </a:xfrm>
           <a:prstGeom prst="rect">
             <a:avLst/>
@@ -4229,7 +4465,41 @@
           <a:lstStyle/>
           <a:p>
             <a:r>
-              <a:t>Pricing Strategies: Cost Comparisons and Value Propositions</a:t>
+              <a:t>UPI 2.0 introduces features like overdraft facilities to improve user experience, but ongoing investments in technology and fraud management are vital for sustainability.</a:t>
+            </a:r>
+          </a:p>
+        </p:txBody>
+      </p:sp>
+      <p:sp>
+        <p:nvSpPr>
+          <p:cNvPr id="27" name="subtopic">
+            <a:extLst>
+              <a:ext uri="{FF2B5EF4-FFF2-40B4-BE49-F238E27FC236}">
+                <a16:creationId xmlns:a16="http://schemas.microsoft.com/office/drawing/2014/main" id="{1FC39E55-DAC2-4D18-8701-DF4E171179AC}"/>
+              </a:ext>
+            </a:extLst>
+          </p:cNvPr>
+          <p:cNvSpPr txBox="1"/>
+          <p:nvPr/>
+        </p:nvSpPr>
+        <p:spPr>
+          <a:xfrm>
+            <a:off x="168257" y="330442"/>
+            <a:ext cx="10563455" cy="646331"/>
+          </a:xfrm>
+          <a:prstGeom prst="rect">
+            <a:avLst/>
+          </a:prstGeom>
+          <a:noFill/>
+        </p:spPr>
+        <p:txBody>
+          <a:bodyPr wrap="square" rtlCol="0">
+            <a:spAutoFit/>
+          </a:bodyPr>
+          <a:lstStyle/>
+          <a:p>
+            <a:r>
+              <a:t>Challenges and Solutions in UPI's Implementation and Adoption</a:t>
             </a:r>
           </a:p>
         </p:txBody>
@@ -4257,7 +4527,7 @@
           <p:cNvPr id="2" name="content1">
             <a:extLst>
               <a:ext uri="{FF2B5EF4-FFF2-40B4-BE49-F238E27FC236}">
-                <a16:creationId xmlns:a16="http://schemas.microsoft.com/office/drawing/2014/main" id="{4CFE2BC8-54A5-407E-B141-B5EC04BD3417}"/>
+                <a16:creationId xmlns:a16="http://schemas.microsoft.com/office/drawing/2014/main" id="{54FB0FDB-46CC-42BE-A833-C89184E3471E}"/>
               </a:ext>
             </a:extLst>
           </p:cNvPr>
@@ -4266,8 +4536,8 @@
         </p:nvSpPr>
         <p:spPr>
           <a:xfrm>
-            <a:off x="382842" y="2321170"/>
-            <a:ext cx="8588880" cy="646331"/>
+            <a:off x="350251" y="3043533"/>
+            <a:ext cx="5713159" cy="646331"/>
           </a:xfrm>
           <a:prstGeom prst="rect">
             <a:avLst/>
@@ -4286,7 +4556,7 @@
           <a:lstStyle/>
           <a:p>
             <a:r>
-              <a:t>Tesla's brand loyalty has decreased to 52.1% in 2023, down from approximately 67% in 2022, indicating a shift in consumer preferences.</a:t>
+              <a:t>UPI aims to launch in over 20 countries by March 2029, enhancing cross-border remittances and international trade efficiency.</a:t>
             </a:r>
           </a:p>
         </p:txBody>
@@ -4296,7 +4566,7 @@
           <p:cNvPr id="3" name="head1">
             <a:extLst>
               <a:ext uri="{FF2B5EF4-FFF2-40B4-BE49-F238E27FC236}">
-                <a16:creationId xmlns:a16="http://schemas.microsoft.com/office/drawing/2014/main" id="{AF43DD1A-697B-4E09-8F47-DB6EB5F90E42}"/>
+                <a16:creationId xmlns:a16="http://schemas.microsoft.com/office/drawing/2014/main" id="{18484F3A-33E9-4106-BBE3-C35CDE75E4F4}"/>
               </a:ext>
             </a:extLst>
           </p:cNvPr>
@@ -4305,8 +4575,8 @@
         </p:nvSpPr>
         <p:spPr>
           <a:xfrm>
-            <a:off x="382842" y="1659451"/>
-            <a:ext cx="8588880" cy="646331"/>
+            <a:off x="350251" y="2441330"/>
+            <a:ext cx="5745749" cy="584775"/>
           </a:xfrm>
           <a:prstGeom prst="rect">
             <a:avLst/>
@@ -4320,17 +4590,17 @@
           <a:lstStyle/>
           <a:p>
             <a:r>
-              <a:t>Tesla Brand Loyalty Decline</a:t>
-            </a:r>
-          </a:p>
-        </p:txBody>
-      </p:sp>
-      <p:sp>
-        <p:nvSpPr>
-          <p:cNvPr id="5" name="content2">
+              <a:t>Global Expansion Plans</a:t>
+            </a:r>
+          </a:p>
+        </p:txBody>
+      </p:sp>
+      <p:sp>
+        <p:nvSpPr>
+          <p:cNvPr id="4" name="content3">
             <a:extLst>
               <a:ext uri="{FF2B5EF4-FFF2-40B4-BE49-F238E27FC236}">
-                <a16:creationId xmlns:a16="http://schemas.microsoft.com/office/drawing/2014/main" id="{0114294D-3C82-4496-9578-DE3D20CA1765}"/>
+                <a16:creationId xmlns:a16="http://schemas.microsoft.com/office/drawing/2014/main" id="{7ED6F132-1EC3-4F89-ACC9-391787BE6AE2}"/>
               </a:ext>
             </a:extLst>
           </p:cNvPr>
@@ -4339,8 +4609,8 @@
         </p:nvSpPr>
         <p:spPr>
           <a:xfrm>
-            <a:off x="402712" y="3940580"/>
-            <a:ext cx="8569010" cy="646331"/>
+            <a:off x="415434" y="5525002"/>
+            <a:ext cx="5647975" cy="646331"/>
           </a:xfrm>
           <a:prstGeom prst="rect">
             <a:avLst/>
@@ -4359,17 +4629,17 @@
           <a:lstStyle/>
           <a:p>
             <a:r>
-              <a:t>Other EV brands have seen an increase in fuel-type loyalty to 46.4%, suggesting that consumers are increasingly committed to electric vehicles beyond Tesla.</a:t>
-            </a:r>
-          </a:p>
-        </p:txBody>
-      </p:sp>
-      <p:sp>
-        <p:nvSpPr>
-          <p:cNvPr id="6" name="head2">
+              <a:t>In October 2024, UPI achieved 16.58 billion transactions in a month, marking a 45% increase year-on-year due to improved banking integration.</a:t>
+            </a:r>
+          </a:p>
+        </p:txBody>
+      </p:sp>
+      <p:sp>
+        <p:nvSpPr>
+          <p:cNvPr id="5" name="head3">
             <a:extLst>
               <a:ext uri="{FF2B5EF4-FFF2-40B4-BE49-F238E27FC236}">
-                <a16:creationId xmlns:a16="http://schemas.microsoft.com/office/drawing/2014/main" id="{EC54FAE9-D0C9-4E6D-BD92-BE588E00A0E5}"/>
+                <a16:creationId xmlns:a16="http://schemas.microsoft.com/office/drawing/2014/main" id="{1EC6BFD2-A54A-4CFB-BE32-CB35F7C65D66}"/>
               </a:ext>
             </a:extLst>
           </p:cNvPr>
@@ -4378,8 +4648,8 @@
         </p:nvSpPr>
         <p:spPr>
           <a:xfrm>
-            <a:off x="388238" y="3281321"/>
-            <a:ext cx="8583484" cy="646331"/>
+            <a:off x="382842" y="4952327"/>
+            <a:ext cx="5680567" cy="584775"/>
           </a:xfrm>
           <a:prstGeom prst="rect">
             <a:avLst/>
@@ -4393,17 +4663,17 @@
           <a:lstStyle/>
           <a:p>
             <a:r>
-              <a:t>Increased EV Commitment</a:t>
-            </a:r>
-          </a:p>
-        </p:txBody>
-      </p:sp>
-      <p:sp>
-        <p:nvSpPr>
-          <p:cNvPr id="7" name="content3">
+              <a:t>Record Transaction Growth</a:t>
+            </a:r>
+          </a:p>
+        </p:txBody>
+      </p:sp>
+      <p:sp>
+        <p:nvSpPr>
+          <p:cNvPr id="6" name="content2">
             <a:extLst>
               <a:ext uri="{FF2B5EF4-FFF2-40B4-BE49-F238E27FC236}">
-                <a16:creationId xmlns:a16="http://schemas.microsoft.com/office/drawing/2014/main" id="{BAB09B8F-FCBE-446C-89AD-F3E542DDA470}"/>
+                <a16:creationId xmlns:a16="http://schemas.microsoft.com/office/drawing/2014/main" id="{228BCD66-C14B-42CD-A438-BC7AA99965CD}"/>
               </a:ext>
             </a:extLst>
           </p:cNvPr>
@@ -4412,8 +4682,8 @@
         </p:nvSpPr>
         <p:spPr>
           <a:xfrm>
-            <a:off x="382842" y="5566061"/>
-            <a:ext cx="8583484" cy="646331"/>
+            <a:off x="6374296" y="3043533"/>
+            <a:ext cx="5148396" cy="646331"/>
           </a:xfrm>
           <a:prstGeom prst="rect">
             <a:avLst/>
@@ -4432,17 +4702,17 @@
           <a:lstStyle/>
           <a:p>
             <a:r>
-              <a:t>Tesla owners are not switching to lower-priced vehicles; instead, they are moving to comparable or higher-priced models, particularly in the $75,000–$100,000 range.</a:t>
-            </a:r>
-          </a:p>
-        </p:txBody>
-      </p:sp>
-      <p:sp>
-        <p:nvSpPr>
-          <p:cNvPr id="8" name="head3">
+              <a:t>New UPI Circle allows users to delegate payment tasks to trusted contacts, while UPI Vouchers enable easy transfer of prepaid vouchers.</a:t>
+            </a:r>
+          </a:p>
+        </p:txBody>
+      </p:sp>
+      <p:sp>
+        <p:nvSpPr>
+          <p:cNvPr id="7" name="head2">
             <a:extLst>
               <a:ext uri="{FF2B5EF4-FFF2-40B4-BE49-F238E27FC236}">
-                <a16:creationId xmlns:a16="http://schemas.microsoft.com/office/drawing/2014/main" id="{7F46E3E4-B57E-4E3B-ABC9-C8472D45B500}"/>
+                <a16:creationId xmlns:a16="http://schemas.microsoft.com/office/drawing/2014/main" id="{CD5BF12C-71C8-4652-9154-19F255752D5D}"/>
               </a:ext>
             </a:extLst>
           </p:cNvPr>
@@ -4451,8 +4721,8 @@
         </p:nvSpPr>
         <p:spPr>
           <a:xfrm>
-            <a:off x="388238" y="4900731"/>
-            <a:ext cx="8588880" cy="646331"/>
+            <a:off x="6341705" y="2441330"/>
+            <a:ext cx="5180986" cy="584775"/>
           </a:xfrm>
           <a:prstGeom prst="rect">
             <a:avLst/>
@@ -4466,17 +4736,17 @@
           <a:lstStyle/>
           <a:p>
             <a:r>
-              <a:t>Defections to Premium Models</a:t>
-            </a:r>
-          </a:p>
-        </p:txBody>
-      </p:sp>
-      <p:sp>
-        <p:nvSpPr>
-          <p:cNvPr id="4" name="subtopic">
+              <a:t>Innovative Features</a:t>
+            </a:r>
+          </a:p>
+        </p:txBody>
+      </p:sp>
+      <p:sp>
+        <p:nvSpPr>
+          <p:cNvPr id="9" name="head4">
             <a:extLst>
               <a:ext uri="{FF2B5EF4-FFF2-40B4-BE49-F238E27FC236}">
-                <a16:creationId xmlns:a16="http://schemas.microsoft.com/office/drawing/2014/main" id="{216BD8E4-BE8C-48D9-AFBB-D6093A341E66}"/>
+                <a16:creationId xmlns:a16="http://schemas.microsoft.com/office/drawing/2014/main" id="{B5F1E050-5BFC-480A-9E92-7665641E2034}"/>
               </a:ext>
             </a:extLst>
           </p:cNvPr>
@@ -4485,8 +4755,42 @@
         </p:nvSpPr>
         <p:spPr>
           <a:xfrm>
-            <a:off x="382842" y="202185"/>
-            <a:ext cx="10863056" cy="646331"/>
+            <a:off x="6341705" y="4952327"/>
+            <a:ext cx="5180986" cy="584775"/>
+          </a:xfrm>
+          <a:prstGeom prst="rect">
+            <a:avLst/>
+          </a:prstGeom>
+          <a:noFill/>
+        </p:spPr>
+        <p:txBody>
+          <a:bodyPr wrap="square" rtlCol="0">
+            <a:spAutoFit/>
+          </a:bodyPr>
+          <a:lstStyle/>
+          <a:p>
+            <a:r>
+              <a:t>International Adoption</a:t>
+            </a:r>
+          </a:p>
+        </p:txBody>
+      </p:sp>
+      <p:sp>
+        <p:nvSpPr>
+          <p:cNvPr id="21" name="content4">
+            <a:extLst>
+              <a:ext uri="{FF2B5EF4-FFF2-40B4-BE49-F238E27FC236}">
+                <a16:creationId xmlns:a16="http://schemas.microsoft.com/office/drawing/2014/main" id="{CFBB8D88-C46B-4BFD-95E5-3CD2F79AB4A3}"/>
+              </a:ext>
+            </a:extLst>
+          </p:cNvPr>
+          <p:cNvSpPr txBox="1"/>
+          <p:nvPr/>
+        </p:nvSpPr>
+        <p:spPr>
+          <a:xfrm>
+            <a:off x="6374296" y="5537102"/>
+            <a:ext cx="5148396" cy="646331"/>
           </a:xfrm>
           <a:prstGeom prst="rect">
             <a:avLst/>
@@ -4505,7 +4809,41 @@
           <a:lstStyle/>
           <a:p>
             <a:r>
-              <a:t>Consumer Preferences: Brand Loyalty and Market Perception</a:t>
+              <a:t>UPI is already accepted in countries like the UAE and Singapore, with recent expansions into France and Sri Lanka, showcasing its global potential.</a:t>
+            </a:r>
+          </a:p>
+        </p:txBody>
+      </p:sp>
+      <p:sp>
+        <p:nvSpPr>
+          <p:cNvPr id="27" name="subtopic">
+            <a:extLst>
+              <a:ext uri="{FF2B5EF4-FFF2-40B4-BE49-F238E27FC236}">
+                <a16:creationId xmlns:a16="http://schemas.microsoft.com/office/drawing/2014/main" id="{1FC39E55-DAC2-4D18-8701-DF4E171179AC}"/>
+              </a:ext>
+            </a:extLst>
+          </p:cNvPr>
+          <p:cNvSpPr txBox="1"/>
+          <p:nvPr/>
+        </p:nvSpPr>
+        <p:spPr>
+          <a:xfrm>
+            <a:off x="168257" y="330442"/>
+            <a:ext cx="10563455" cy="646331"/>
+          </a:xfrm>
+          <a:prstGeom prst="rect">
+            <a:avLst/>
+          </a:prstGeom>
+          <a:noFill/>
+        </p:spPr>
+        <p:txBody>
+          <a:bodyPr wrap="square" rtlCol="0">
+            <a:spAutoFit/>
+          </a:bodyPr>
+          <a:lstStyle/>
+          <a:p>
+            <a:r>
+              <a:t>The Future of UPI: Global Expansion and Technological Advancements</a:t>
             </a:r>
           </a:p>
         </p:txBody>
@@ -4530,558 +4868,6 @@
       <p:grpSpPr/>
       <p:sp>
         <p:nvSpPr>
-          <p:cNvPr id="2" name="content1">
-            <a:extLst>
-              <a:ext uri="{FF2B5EF4-FFF2-40B4-BE49-F238E27FC236}">
-                <a16:creationId xmlns:a16="http://schemas.microsoft.com/office/drawing/2014/main" id="{4CFE2BC8-54A5-407E-B141-B5EC04BD3417}"/>
-              </a:ext>
-            </a:extLst>
-          </p:cNvPr>
-          <p:cNvSpPr txBox="1"/>
-          <p:nvPr/>
-        </p:nvSpPr>
-        <p:spPr>
-          <a:xfrm>
-            <a:off x="382842" y="2321170"/>
-            <a:ext cx="8588880" cy="646331"/>
-          </a:xfrm>
-          <a:prstGeom prst="rect">
-            <a:avLst/>
-          </a:prstGeom>
-          <a:noFill/>
-          <a:ln>
-            <a:solidFill>
-              <a:schemeClr val="bg1"/>
-            </a:solidFill>
-          </a:ln>
-        </p:spPr>
-        <p:txBody>
-          <a:bodyPr wrap="square" rtlCol="0">
-            <a:spAutoFit/>
-          </a:bodyPr>
-          <a:lstStyle/>
-          <a:p>
-            <a:r>
-              <a:t>Tesla is contesting the EU's tariffs on Chinese-made EVs, which could significantly impact global trade policies.</a:t>
-            </a:r>
-          </a:p>
-        </p:txBody>
-      </p:sp>
-      <p:sp>
-        <p:nvSpPr>
-          <p:cNvPr id="3" name="head1">
-            <a:extLst>
-              <a:ext uri="{FF2B5EF4-FFF2-40B4-BE49-F238E27FC236}">
-                <a16:creationId xmlns:a16="http://schemas.microsoft.com/office/drawing/2014/main" id="{AF43DD1A-697B-4E09-8F47-DB6EB5F90E42}"/>
-              </a:ext>
-            </a:extLst>
-          </p:cNvPr>
-          <p:cNvSpPr txBox="1"/>
-          <p:nvPr/>
-        </p:nvSpPr>
-        <p:spPr>
-          <a:xfrm>
-            <a:off x="382842" y="1659451"/>
-            <a:ext cx="8588880" cy="646331"/>
-          </a:xfrm>
-          <a:prstGeom prst="rect">
-            <a:avLst/>
-          </a:prstGeom>
-          <a:noFill/>
-        </p:spPr>
-        <p:txBody>
-          <a:bodyPr wrap="square" rtlCol="0">
-            <a:spAutoFit/>
-          </a:bodyPr>
-          <a:lstStyle/>
-          <a:p>
-            <a:r>
-              <a:t>Tesla's Legal Challenge</a:t>
-            </a:r>
-          </a:p>
-        </p:txBody>
-      </p:sp>
-      <p:sp>
-        <p:nvSpPr>
-          <p:cNvPr id="5" name="content2">
-            <a:extLst>
-              <a:ext uri="{FF2B5EF4-FFF2-40B4-BE49-F238E27FC236}">
-                <a16:creationId xmlns:a16="http://schemas.microsoft.com/office/drawing/2014/main" id="{0114294D-3C82-4496-9578-DE3D20CA1765}"/>
-              </a:ext>
-            </a:extLst>
-          </p:cNvPr>
-          <p:cNvSpPr txBox="1"/>
-          <p:nvPr/>
-        </p:nvSpPr>
-        <p:spPr>
-          <a:xfrm>
-            <a:off x="402712" y="3940580"/>
-            <a:ext cx="8569010" cy="646331"/>
-          </a:xfrm>
-          <a:prstGeom prst="rect">
-            <a:avLst/>
-          </a:prstGeom>
-          <a:noFill/>
-          <a:ln>
-            <a:solidFill>
-              <a:schemeClr val="bg1"/>
-            </a:solidFill>
-          </a:ln>
-        </p:spPr>
-        <p:txBody>
-          <a:bodyPr wrap="square" rtlCol="0">
-            <a:spAutoFit/>
-          </a:bodyPr>
-          <a:lstStyle/>
-          <a:p>
-            <a:r>
-              <a:t>Major automotive manufacturers, including BYD, are joining Tesla in challenging these tariffs, citing restrictions on free trade.</a:t>
-            </a:r>
-          </a:p>
-        </p:txBody>
-      </p:sp>
-      <p:sp>
-        <p:nvSpPr>
-          <p:cNvPr id="6" name="head2">
-            <a:extLst>
-              <a:ext uri="{FF2B5EF4-FFF2-40B4-BE49-F238E27FC236}">
-                <a16:creationId xmlns:a16="http://schemas.microsoft.com/office/drawing/2014/main" id="{EC54FAE9-D0C9-4E6D-BD92-BE588E00A0E5}"/>
-              </a:ext>
-            </a:extLst>
-          </p:cNvPr>
-          <p:cNvSpPr txBox="1"/>
-          <p:nvPr/>
-        </p:nvSpPr>
-        <p:spPr>
-          <a:xfrm>
-            <a:off x="388238" y="3281321"/>
-            <a:ext cx="8583484" cy="646331"/>
-          </a:xfrm>
-          <a:prstGeom prst="rect">
-            <a:avLst/>
-          </a:prstGeom>
-          <a:noFill/>
-        </p:spPr>
-        <p:txBody>
-          <a:bodyPr wrap="square" rtlCol="0">
-            <a:spAutoFit/>
-          </a:bodyPr>
-          <a:lstStyle/>
-          <a:p>
-            <a:r>
-              <a:t>Industry-Wide Opposition</a:t>
-            </a:r>
-          </a:p>
-        </p:txBody>
-      </p:sp>
-      <p:sp>
-        <p:nvSpPr>
-          <p:cNvPr id="7" name="content3">
-            <a:extLst>
-              <a:ext uri="{FF2B5EF4-FFF2-40B4-BE49-F238E27FC236}">
-                <a16:creationId xmlns:a16="http://schemas.microsoft.com/office/drawing/2014/main" id="{BAB09B8F-FCBE-446C-89AD-F3E542DDA470}"/>
-              </a:ext>
-            </a:extLst>
-          </p:cNvPr>
-          <p:cNvSpPr txBox="1"/>
-          <p:nvPr/>
-        </p:nvSpPr>
-        <p:spPr>
-          <a:xfrm>
-            <a:off x="382842" y="5566061"/>
-            <a:ext cx="8583484" cy="646331"/>
-          </a:xfrm>
-          <a:prstGeom prst="rect">
-            <a:avLst/>
-          </a:prstGeom>
-          <a:noFill/>
-          <a:ln>
-            <a:solidFill>
-              <a:schemeClr val="bg1"/>
-            </a:solidFill>
-          </a:ln>
-        </p:spPr>
-        <p:txBody>
-          <a:bodyPr wrap="square" rtlCol="0">
-            <a:spAutoFit/>
-          </a:bodyPr>
-          <a:lstStyle/>
-          <a:p>
-            <a:r>
-              <a:t>The outcome of these legal battles may hinder the global supply chain for EV production, affecting sustainability efforts.</a:t>
-            </a:r>
-          </a:p>
-        </p:txBody>
-      </p:sp>
-      <p:sp>
-        <p:nvSpPr>
-          <p:cNvPr id="8" name="head3">
-            <a:extLst>
-              <a:ext uri="{FF2B5EF4-FFF2-40B4-BE49-F238E27FC236}">
-                <a16:creationId xmlns:a16="http://schemas.microsoft.com/office/drawing/2014/main" id="{7F46E3E4-B57E-4E3B-ABC9-C8472D45B500}"/>
-              </a:ext>
-            </a:extLst>
-          </p:cNvPr>
-          <p:cNvSpPr txBox="1"/>
-          <p:nvPr/>
-        </p:nvSpPr>
-        <p:spPr>
-          <a:xfrm>
-            <a:off x="388238" y="4900731"/>
-            <a:ext cx="8588880" cy="646331"/>
-          </a:xfrm>
-          <a:prstGeom prst="rect">
-            <a:avLst/>
-          </a:prstGeom>
-          <a:noFill/>
-        </p:spPr>
-        <p:txBody>
-          <a:bodyPr wrap="square" rtlCol="0">
-            <a:spAutoFit/>
-          </a:bodyPr>
-          <a:lstStyle/>
-          <a:p>
-            <a:r>
-              <a:t>Impact on Global Supply Chains</a:t>
-            </a:r>
-          </a:p>
-        </p:txBody>
-      </p:sp>
-      <p:sp>
-        <p:nvSpPr>
-          <p:cNvPr id="4" name="subtopic">
-            <a:extLst>
-              <a:ext uri="{FF2B5EF4-FFF2-40B4-BE49-F238E27FC236}">
-                <a16:creationId xmlns:a16="http://schemas.microsoft.com/office/drawing/2014/main" id="{216BD8E4-BE8C-48D9-AFBB-D6093A341E66}"/>
-              </a:ext>
-            </a:extLst>
-          </p:cNvPr>
-          <p:cNvSpPr txBox="1"/>
-          <p:nvPr/>
-        </p:nvSpPr>
-        <p:spPr>
-          <a:xfrm>
-            <a:off x="382842" y="202185"/>
-            <a:ext cx="10863056" cy="646331"/>
-          </a:xfrm>
-          <a:prstGeom prst="rect">
-            <a:avLst/>
-          </a:prstGeom>
-          <a:noFill/>
-          <a:ln>
-            <a:solidFill>
-              <a:schemeClr val="bg1"/>
-            </a:solidFill>
-          </a:ln>
-        </p:spPr>
-        <p:txBody>
-          <a:bodyPr wrap="square" rtlCol="0">
-            <a:spAutoFit/>
-          </a:bodyPr>
-          <a:lstStyle/>
-          <a:p>
-            <a:r>
-              <a:t>Regulatory Challenges: Impact of Tariffs and Global Policies</a:t>
-            </a:r>
-          </a:p>
-        </p:txBody>
-      </p:sp>
-    </p:spTree>
-  </p:cSld>
-  <p:clrMapOvr>
-    <a:masterClrMapping/>
-  </p:clrMapOvr>
-</p:sld>
-</file>
-
-<file path=ppt/slides/slide8.xml><?xml version="1.0" encoding="utf-8"?>
-<p:sld xmlns:a="http://schemas.openxmlformats.org/drawingml/2006/main" xmlns:p="http://schemas.openxmlformats.org/presentationml/2006/main" xmlns:r="http://schemas.openxmlformats.org/officeDocument/2006/relationships">
-  <p:cSld>
-    <p:spTree>
-      <p:nvGrpSpPr>
-        <p:cNvPr id="1" name=""/>
-        <p:cNvGrpSpPr/>
-        <p:nvPr/>
-      </p:nvGrpSpPr>
-      <p:grpSpPr/>
-      <p:sp>
-        <p:nvSpPr>
-          <p:cNvPr id="2" name="content1">
-            <a:extLst>
-              <a:ext uri="{FF2B5EF4-FFF2-40B4-BE49-F238E27FC236}">
-                <a16:creationId xmlns:a16="http://schemas.microsoft.com/office/drawing/2014/main" id="{4CFE2BC8-54A5-407E-B141-B5EC04BD3417}"/>
-              </a:ext>
-            </a:extLst>
-          </p:cNvPr>
-          <p:cNvSpPr txBox="1"/>
-          <p:nvPr/>
-        </p:nvSpPr>
-        <p:spPr>
-          <a:xfrm>
-            <a:off x="382842" y="2321170"/>
-            <a:ext cx="8588880" cy="646331"/>
-          </a:xfrm>
-          <a:prstGeom prst="rect">
-            <a:avLst/>
-          </a:prstGeom>
-          <a:noFill/>
-          <a:ln>
-            <a:solidFill>
-              <a:schemeClr val="bg1"/>
-            </a:solidFill>
-          </a:ln>
-        </p:spPr>
-        <p:txBody>
-          <a:bodyPr wrap="square" rtlCol="0">
-            <a:spAutoFit/>
-          </a:bodyPr>
-          <a:lstStyle/>
-          <a:p>
-            <a:r>
-              <a:t>BYD is projected to surpass Tesla in battery electric vehicle sales in 2024, indicating a significant shift in market dynamics.</a:t>
-            </a:r>
-          </a:p>
-        </p:txBody>
-      </p:sp>
-      <p:sp>
-        <p:nvSpPr>
-          <p:cNvPr id="3" name="head1">
-            <a:extLst>
-              <a:ext uri="{FF2B5EF4-FFF2-40B4-BE49-F238E27FC236}">
-                <a16:creationId xmlns:a16="http://schemas.microsoft.com/office/drawing/2014/main" id="{AF43DD1A-697B-4E09-8F47-DB6EB5F90E42}"/>
-              </a:ext>
-            </a:extLst>
-          </p:cNvPr>
-          <p:cNvSpPr txBox="1"/>
-          <p:nvPr/>
-        </p:nvSpPr>
-        <p:spPr>
-          <a:xfrm>
-            <a:off x="382842" y="1659451"/>
-            <a:ext cx="8588880" cy="646331"/>
-          </a:xfrm>
-          <a:prstGeom prst="rect">
-            <a:avLst/>
-          </a:prstGeom>
-          <a:noFill/>
-        </p:spPr>
-        <p:txBody>
-          <a:bodyPr wrap="square" rtlCol="0">
-            <a:spAutoFit/>
-          </a:bodyPr>
-          <a:lstStyle/>
-          <a:p>
-            <a:r>
-              <a:t>BYD's Market Surge</a:t>
-            </a:r>
-          </a:p>
-        </p:txBody>
-      </p:sp>
-      <p:sp>
-        <p:nvSpPr>
-          <p:cNvPr id="5" name="content2">
-            <a:extLst>
-              <a:ext uri="{FF2B5EF4-FFF2-40B4-BE49-F238E27FC236}">
-                <a16:creationId xmlns:a16="http://schemas.microsoft.com/office/drawing/2014/main" id="{0114294D-3C82-4496-9578-DE3D20CA1765}"/>
-              </a:ext>
-            </a:extLst>
-          </p:cNvPr>
-          <p:cNvSpPr txBox="1"/>
-          <p:nvPr/>
-        </p:nvSpPr>
-        <p:spPr>
-          <a:xfrm>
-            <a:off x="402712" y="3940580"/>
-            <a:ext cx="8569010" cy="646331"/>
-          </a:xfrm>
-          <a:prstGeom prst="rect">
-            <a:avLst/>
-          </a:prstGeom>
-          <a:noFill/>
-          <a:ln>
-            <a:solidFill>
-              <a:schemeClr val="bg1"/>
-            </a:solidFill>
-          </a:ln>
-        </p:spPr>
-        <p:txBody>
-          <a:bodyPr wrap="square" rtlCol="0">
-            <a:spAutoFit/>
-          </a:bodyPr>
-          <a:lstStyle/>
-          <a:p>
-            <a:r>
-              <a:t>Global battery electric vehicle sales are expected to reach 10 million in 2024, driven by declining internal combustion engine vehicles.</a:t>
-            </a:r>
-          </a:p>
-        </p:txBody>
-      </p:sp>
-      <p:sp>
-        <p:nvSpPr>
-          <p:cNvPr id="6" name="head2">
-            <a:extLst>
-              <a:ext uri="{FF2B5EF4-FFF2-40B4-BE49-F238E27FC236}">
-                <a16:creationId xmlns:a16="http://schemas.microsoft.com/office/drawing/2014/main" id="{EC54FAE9-D0C9-4E6D-BD92-BE588E00A0E5}"/>
-              </a:ext>
-            </a:extLst>
-          </p:cNvPr>
-          <p:cNvSpPr txBox="1"/>
-          <p:nvPr/>
-        </p:nvSpPr>
-        <p:spPr>
-          <a:xfrm>
-            <a:off x="388238" y="3281321"/>
-            <a:ext cx="8583484" cy="646331"/>
-          </a:xfrm>
-          <a:prstGeom prst="rect">
-            <a:avLst/>
-          </a:prstGeom>
-          <a:noFill/>
-        </p:spPr>
-        <p:txBody>
-          <a:bodyPr wrap="square" rtlCol="0">
-            <a:spAutoFit/>
-          </a:bodyPr>
-          <a:lstStyle/>
-          <a:p>
-            <a:r>
-              <a:t>Global BEV Growth</a:t>
-            </a:r>
-          </a:p>
-        </p:txBody>
-      </p:sp>
-      <p:sp>
-        <p:nvSpPr>
-          <p:cNvPr id="7" name="content3">
-            <a:extLst>
-              <a:ext uri="{FF2B5EF4-FFF2-40B4-BE49-F238E27FC236}">
-                <a16:creationId xmlns:a16="http://schemas.microsoft.com/office/drawing/2014/main" id="{BAB09B8F-FCBE-446C-89AD-F3E542DDA470}"/>
-              </a:ext>
-            </a:extLst>
-          </p:cNvPr>
-          <p:cNvSpPr txBox="1"/>
-          <p:nvPr/>
-        </p:nvSpPr>
-        <p:spPr>
-          <a:xfrm>
-            <a:off x="382842" y="5566061"/>
-            <a:ext cx="8583484" cy="646331"/>
-          </a:xfrm>
-          <a:prstGeom prst="rect">
-            <a:avLst/>
-          </a:prstGeom>
-          <a:noFill/>
-          <a:ln>
-            <a:solidFill>
-              <a:schemeClr val="bg1"/>
-            </a:solidFill>
-          </a:ln>
-        </p:spPr>
-        <p:txBody>
-          <a:bodyPr wrap="square" rtlCol="0">
-            <a:spAutoFit/>
-          </a:bodyPr>
-          <a:lstStyle/>
-          <a:p>
-            <a:r>
-              <a:t>Tariffs may push Chinese automakers like BYD towards emerging markets, including the Middle East, Africa, and Southeast Asia, for growth opportunities.</a:t>
-            </a:r>
-          </a:p>
-        </p:txBody>
-      </p:sp>
-      <p:sp>
-        <p:nvSpPr>
-          <p:cNvPr id="8" name="head3">
-            <a:extLst>
-              <a:ext uri="{FF2B5EF4-FFF2-40B4-BE49-F238E27FC236}">
-                <a16:creationId xmlns:a16="http://schemas.microsoft.com/office/drawing/2014/main" id="{7F46E3E4-B57E-4E3B-ABC9-C8472D45B500}"/>
-              </a:ext>
-            </a:extLst>
-          </p:cNvPr>
-          <p:cNvSpPr txBox="1"/>
-          <p:nvPr/>
-        </p:nvSpPr>
-        <p:spPr>
-          <a:xfrm>
-            <a:off x="388238" y="4900731"/>
-            <a:ext cx="8588880" cy="646331"/>
-          </a:xfrm>
-          <a:prstGeom prst="rect">
-            <a:avLst/>
-          </a:prstGeom>
-          <a:noFill/>
-        </p:spPr>
-        <p:txBody>
-          <a:bodyPr wrap="square" rtlCol="0">
-            <a:spAutoFit/>
-          </a:bodyPr>
-          <a:lstStyle/>
-          <a:p>
-            <a:r>
-              <a:t>Emerging Market Focus</a:t>
-            </a:r>
-          </a:p>
-        </p:txBody>
-      </p:sp>
-      <p:sp>
-        <p:nvSpPr>
-          <p:cNvPr id="4" name="subtopic">
-            <a:extLst>
-              <a:ext uri="{FF2B5EF4-FFF2-40B4-BE49-F238E27FC236}">
-                <a16:creationId xmlns:a16="http://schemas.microsoft.com/office/drawing/2014/main" id="{216BD8E4-BE8C-48D9-AFBB-D6093A341E66}"/>
-              </a:ext>
-            </a:extLst>
-          </p:cNvPr>
-          <p:cNvSpPr txBox="1"/>
-          <p:nvPr/>
-        </p:nvSpPr>
-        <p:spPr>
-          <a:xfrm>
-            <a:off x="382842" y="202185"/>
-            <a:ext cx="10863056" cy="646331"/>
-          </a:xfrm>
-          <a:prstGeom prst="rect">
-            <a:avLst/>
-          </a:prstGeom>
-          <a:noFill/>
-          <a:ln>
-            <a:solidFill>
-              <a:schemeClr val="bg1"/>
-            </a:solidFill>
-          </a:ln>
-        </p:spPr>
-        <p:txBody>
-          <a:bodyPr wrap="square" rtlCol="0">
-            <a:spAutoFit/>
-          </a:bodyPr>
-          <a:lstStyle/>
-          <a:p>
-            <a:r>
-              <a:t>Future Outlook: Predictions for Growth and Market Dynamics</a:t>
-            </a:r>
-          </a:p>
-        </p:txBody>
-      </p:sp>
-    </p:spTree>
-  </p:cSld>
-  <p:clrMapOvr>
-    <a:masterClrMapping/>
-  </p:clrMapOvr>
-</p:sld>
-</file>
-
-<file path=ppt/slides/slide9.xml><?xml version="1.0" encoding="utf-8"?>
-<p:sld xmlns:a="http://schemas.openxmlformats.org/drawingml/2006/main" xmlns:p="http://schemas.openxmlformats.org/presentationml/2006/main" xmlns:r="http://schemas.openxmlformats.org/officeDocument/2006/relationships">
-  <p:cSld>
-    <p:spTree>
-      <p:nvGrpSpPr>
-        <p:cNvPr id="1" name=""/>
-        <p:cNvGrpSpPr/>
-        <p:nvPr/>
-      </p:nvGrpSpPr>
-      <p:grpSpPr/>
-      <p:sp>
-        <p:nvSpPr>
           <p:cNvPr id="3" name="ending">
             <a:extLst>
               <a:ext uri="{FF2B5EF4-FFF2-40B4-BE49-F238E27FC236}">
@@ -5109,7 +4895,7 @@
           <a:lstStyle/>
           <a:p>
             <a:r>
-              <a:t>In conclusion, the competition between Tesla and BYD is reshaping the electric vehicle landscape, with significant implications for the future of the industry.</a:t>
+              <a:t>The journey of UPI exemplifies the transformative power of digital payments in shaping India's financial landscape.</a:t>
             </a:r>
           </a:p>
         </p:txBody>

--- a/final_output.pptx
+++ b/final_output.pptx
@@ -8,10 +8,6 @@
     <p:sldId id="256" r:id="rId7"/>
     <p:sldId id="257" r:id="rId8"/>
     <p:sldId id="258" r:id="rId9"/>
-    <p:sldId id="259" r:id="rId10"/>
-    <p:sldId id="260" r:id="rId11"/>
-    <p:sldId id="261" r:id="rId12"/>
-    <p:sldId id="262" r:id="rId13"/>
   </p:sldIdLst>
   <p:sldSz cx="12192000" cy="6858000" type="screen4x3"/>
   <p:notesSz cx="6858000" cy="9144000"/>
@@ -3123,7 +3119,7 @@
           <a:lstStyle/>
           <a:p>
             <a:r>
-              <a:t>The Rise of Digital Payments in India: A UPI Revolution</a:t>
+              <a:t>The Global Journey of Ramen</a:t>
             </a:r>
           </a:p>
         </p:txBody>
@@ -3180,7 +3176,7 @@
           <a:lstStyle/>
           <a:p>
             <a:r>
-              <a:t>Digital payments in India evolved through four phases: pre-2010 with NEFT/RTGS, 2010-2015 with mobile wallets and IMPS, 2016-2020 with UPI's launch, and 2020-2024 marked by rapid growth during COVID-19.</a:t>
+              <a:t>Ramen traces its roots to China, where wheat noodles were enjoyed as early as the 3rd century AD, before being introduced to Japan by Chinese immigrants in the late 19th century.</a:t>
             </a:r>
           </a:p>
         </p:txBody>
@@ -3214,7 +3210,7 @@
           <a:lstStyle/>
           <a:p>
             <a:r>
-              <a:t>Four Phases of Digital Payments</a:t>
+              <a:t>Origins in China</a:t>
             </a:r>
           </a:p>
         </p:txBody>
@@ -3253,7 +3249,7 @@
           <a:lstStyle/>
           <a:p>
             <a:r>
-              <a:t>In 2024, India's digital payment adoption reached 87%, significantly exceeding the global average of 62%, driven by youth engagement and the rise of fintech solutions.</a:t>
+              <a:t>Ramen has evolved with plant-based options, self-heating packaging, and gourmet flavors, while regional styles in Japan highlight local ingredients and inspire international fusion dishes.</a:t>
             </a:r>
           </a:p>
         </p:txBody>
@@ -3287,7 +3283,7 @@
           <a:lstStyle/>
           <a:p>
             <a:r>
-              <a:t>High Adoption Rates</a:t>
+              <a:t>Innovations and Variations</a:t>
             </a:r>
           </a:p>
         </p:txBody>
@@ -3326,7 +3322,7 @@
           <a:lstStyle/>
           <a:p>
             <a:r>
-              <a:t>By December 2024, UPI achieved an impressive 16.73 billion transactions, reflecting its pivotal role in India's digital payment landscape and the surge in total digital transaction value to ₹2,428,200 billion.</a:t>
+              <a:t>The ramen market is expected to reach $84.99 billion by 2030, growing at a CAGR of 7.9%, fueled by rising demand for premium, healthier options and online retail expansion.</a:t>
             </a:r>
           </a:p>
         </p:txBody>
@@ -3360,7 +3356,7 @@
           <a:lstStyle/>
           <a:p>
             <a:r>
-              <a:t>UPI's Transaction Milestone</a:t>
+              <a:t>Global Market Growth</a:t>
             </a:r>
           </a:p>
         </p:txBody>
@@ -3394,7 +3390,7 @@
           <a:lstStyle/>
           <a:p>
             <a:r>
-              <a:t>Enhancing Financial Inclusion</a:t>
+              <a:t>Cultural Impact in Japan</a:t>
             </a:r>
           </a:p>
         </p:txBody>
@@ -3433,7 +3429,7 @@
           <a:lstStyle/>
           <a:p>
             <a:r>
-              <a:t>UPI has significantly improved financial inclusion, especially for low-income households and small merchants, by simplifying transactions and expanding access to formal financial services.</a:t>
+              <a:t>The 1980s ramen boom in Japan led to the rise of dedicated restaurants and museums, cementing ramen's status as a culinary staple and influencing global culinary trends.</a:t>
             </a:r>
           </a:p>
         </p:txBody>
@@ -3467,7 +3463,7 @@
           <a:lstStyle/>
           <a:p>
             <a:r>
-              <a:t>The Evolution of Digital Payments in India: From Cash to UPI</a:t>
+              <a:t>The Evolution of Ramen: From Traditional Roots to Global Phenomenon</a:t>
             </a:r>
           </a:p>
         </p:txBody>
@@ -3492,1382 +3488,6 @@
       <p:grpSpPr/>
       <p:sp>
         <p:nvSpPr>
-          <p:cNvPr id="2" name="content1">
-            <a:extLst>
-              <a:ext uri="{FF2B5EF4-FFF2-40B4-BE49-F238E27FC236}">
-                <a16:creationId xmlns:a16="http://schemas.microsoft.com/office/drawing/2014/main" id="{54FB0FDB-46CC-42BE-A833-C89184E3471E}"/>
-              </a:ext>
-            </a:extLst>
-          </p:cNvPr>
-          <p:cNvSpPr txBox="1"/>
-          <p:nvPr/>
-        </p:nvSpPr>
-        <p:spPr>
-          <a:xfrm>
-            <a:off x="350251" y="3043533"/>
-            <a:ext cx="5713159" cy="646331"/>
-          </a:xfrm>
-          <a:prstGeom prst="rect">
-            <a:avLst/>
-          </a:prstGeom>
-          <a:noFill/>
-          <a:ln>
-            <a:solidFill>
-              <a:schemeClr val="bg1"/>
-            </a:solidFill>
-          </a:ln>
-        </p:spPr>
-        <p:txBody>
-          <a:bodyPr wrap="square" rtlCol="0">
-            <a:spAutoFit/>
-          </a:bodyPr>
-          <a:lstStyle/>
-          <a:p>
-            <a:r>
-              <a:t>UPI's open architecture enables seamless interoperability among banks and payment providers, enhancing user convenience in digital transactions.</a:t>
-            </a:r>
-          </a:p>
-        </p:txBody>
-      </p:sp>
-      <p:sp>
-        <p:nvSpPr>
-          <p:cNvPr id="3" name="head1">
-            <a:extLst>
-              <a:ext uri="{FF2B5EF4-FFF2-40B4-BE49-F238E27FC236}">
-                <a16:creationId xmlns:a16="http://schemas.microsoft.com/office/drawing/2014/main" id="{18484F3A-33E9-4106-BBE3-C35CDE75E4F4}"/>
-              </a:ext>
-            </a:extLst>
-          </p:cNvPr>
-          <p:cNvSpPr txBox="1"/>
-          <p:nvPr/>
-        </p:nvSpPr>
-        <p:spPr>
-          <a:xfrm>
-            <a:off x="350251" y="2441330"/>
-            <a:ext cx="5745749" cy="584775"/>
-          </a:xfrm>
-          <a:prstGeom prst="rect">
-            <a:avLst/>
-          </a:prstGeom>
-          <a:noFill/>
-        </p:spPr>
-        <p:txBody>
-          <a:bodyPr wrap="square" rtlCol="0">
-            <a:spAutoFit/>
-          </a:bodyPr>
-          <a:lstStyle/>
-          <a:p>
-            <a:r>
-              <a:t>Open Architecture Infrastructure</a:t>
-            </a:r>
-          </a:p>
-        </p:txBody>
-      </p:sp>
-      <p:sp>
-        <p:nvSpPr>
-          <p:cNvPr id="4" name="content3">
-            <a:extLst>
-              <a:ext uri="{FF2B5EF4-FFF2-40B4-BE49-F238E27FC236}">
-                <a16:creationId xmlns:a16="http://schemas.microsoft.com/office/drawing/2014/main" id="{7ED6F132-1EC3-4F89-ACC9-391787BE6AE2}"/>
-              </a:ext>
-            </a:extLst>
-          </p:cNvPr>
-          <p:cNvSpPr txBox="1"/>
-          <p:nvPr/>
-        </p:nvSpPr>
-        <p:spPr>
-          <a:xfrm>
-            <a:off x="415434" y="5525002"/>
-            <a:ext cx="5647975" cy="646331"/>
-          </a:xfrm>
-          <a:prstGeom prst="rect">
-            <a:avLst/>
-          </a:prstGeom>
-          <a:noFill/>
-          <a:ln>
-            <a:solidFill>
-              <a:schemeClr val="bg1"/>
-            </a:solidFill>
-          </a:ln>
-        </p:spPr>
-        <p:txBody>
-          <a:bodyPr wrap="square" rtlCol="0">
-            <a:spAutoFit/>
-          </a:bodyPr>
-          <a:lstStyle/>
-          <a:p>
-            <a:r>
-              <a:t>Recent UPI advancements allow credit card payments directly within the platform, catering to users who prefer credit over debit transactions.</a:t>
-            </a:r>
-          </a:p>
-        </p:txBody>
-      </p:sp>
-      <p:sp>
-        <p:nvSpPr>
-          <p:cNvPr id="5" name="head3">
-            <a:extLst>
-              <a:ext uri="{FF2B5EF4-FFF2-40B4-BE49-F238E27FC236}">
-                <a16:creationId xmlns:a16="http://schemas.microsoft.com/office/drawing/2014/main" id="{1EC6BFD2-A54A-4CFB-BE32-CB35F7C65D66}"/>
-              </a:ext>
-            </a:extLst>
-          </p:cNvPr>
-          <p:cNvSpPr txBox="1"/>
-          <p:nvPr/>
-        </p:nvSpPr>
-        <p:spPr>
-          <a:xfrm>
-            <a:off x="382842" y="4952327"/>
-            <a:ext cx="5680567" cy="584775"/>
-          </a:xfrm>
-          <a:prstGeom prst="rect">
-            <a:avLst/>
-          </a:prstGeom>
-          <a:noFill/>
-        </p:spPr>
-        <p:txBody>
-          <a:bodyPr wrap="square" rtlCol="0">
-            <a:spAutoFit/>
-          </a:bodyPr>
-          <a:lstStyle/>
-          <a:p>
-            <a:r>
-              <a:t>Integration of Credit Cards</a:t>
-            </a:r>
-          </a:p>
-        </p:txBody>
-      </p:sp>
-      <p:sp>
-        <p:nvSpPr>
-          <p:cNvPr id="6" name="content2">
-            <a:extLst>
-              <a:ext uri="{FF2B5EF4-FFF2-40B4-BE49-F238E27FC236}">
-                <a16:creationId xmlns:a16="http://schemas.microsoft.com/office/drawing/2014/main" id="{228BCD66-C14B-42CD-A438-BC7AA99965CD}"/>
-              </a:ext>
-            </a:extLst>
-          </p:cNvPr>
-          <p:cNvSpPr txBox="1"/>
-          <p:nvPr/>
-        </p:nvSpPr>
-        <p:spPr>
-          <a:xfrm>
-            <a:off x="6374296" y="3043533"/>
-            <a:ext cx="5148396" cy="646331"/>
-          </a:xfrm>
-          <a:prstGeom prst="rect">
-            <a:avLst/>
-          </a:prstGeom>
-          <a:noFill/>
-          <a:ln>
-            <a:solidFill>
-              <a:schemeClr val="bg1"/>
-            </a:solidFill>
-          </a:ln>
-        </p:spPr>
-        <p:txBody>
-          <a:bodyPr wrap="square" rtlCol="0">
-            <a:spAutoFit/>
-          </a:bodyPr>
-          <a:lstStyle/>
-          <a:p>
-            <a:r>
-              <a:t>Key UPI innovations include single-click payments, virtual addresses, and recurring payment setups, simplifying transactions and improving user experience.</a:t>
-            </a:r>
-          </a:p>
-        </p:txBody>
-      </p:sp>
-      <p:sp>
-        <p:nvSpPr>
-          <p:cNvPr id="7" name="head2">
-            <a:extLst>
-              <a:ext uri="{FF2B5EF4-FFF2-40B4-BE49-F238E27FC236}">
-                <a16:creationId xmlns:a16="http://schemas.microsoft.com/office/drawing/2014/main" id="{CD5BF12C-71C8-4652-9154-19F255752D5D}"/>
-              </a:ext>
-            </a:extLst>
-          </p:cNvPr>
-          <p:cNvSpPr txBox="1"/>
-          <p:nvPr/>
-        </p:nvSpPr>
-        <p:spPr>
-          <a:xfrm>
-            <a:off x="6341705" y="2441330"/>
-            <a:ext cx="5180986" cy="584775"/>
-          </a:xfrm>
-          <a:prstGeom prst="rect">
-            <a:avLst/>
-          </a:prstGeom>
-          <a:noFill/>
-        </p:spPr>
-        <p:txBody>
-          <a:bodyPr wrap="square" rtlCol="0">
-            <a:spAutoFit/>
-          </a:bodyPr>
-          <a:lstStyle/>
-          <a:p>
-            <a:r>
-              <a:t>Innovative Payment Features</a:t>
-            </a:r>
-          </a:p>
-        </p:txBody>
-      </p:sp>
-      <p:sp>
-        <p:nvSpPr>
-          <p:cNvPr id="9" name="head4">
-            <a:extLst>
-              <a:ext uri="{FF2B5EF4-FFF2-40B4-BE49-F238E27FC236}">
-                <a16:creationId xmlns:a16="http://schemas.microsoft.com/office/drawing/2014/main" id="{B5F1E050-5BFC-480A-9E92-7665641E2034}"/>
-              </a:ext>
-            </a:extLst>
-          </p:cNvPr>
-          <p:cNvSpPr txBox="1"/>
-          <p:nvPr/>
-        </p:nvSpPr>
-        <p:spPr>
-          <a:xfrm>
-            <a:off x="6341705" y="4952327"/>
-            <a:ext cx="5180986" cy="584775"/>
-          </a:xfrm>
-          <a:prstGeom prst="rect">
-            <a:avLst/>
-          </a:prstGeom>
-          <a:noFill/>
-        </p:spPr>
-        <p:txBody>
-          <a:bodyPr wrap="square" rtlCol="0">
-            <a:spAutoFit/>
-          </a:bodyPr>
-          <a:lstStyle/>
-          <a:p>
-            <a:r>
-              <a:t>Global Expansion of UPI</a:t>
-            </a:r>
-          </a:p>
-        </p:txBody>
-      </p:sp>
-      <p:sp>
-        <p:nvSpPr>
-          <p:cNvPr id="21" name="content4">
-            <a:extLst>
-              <a:ext uri="{FF2B5EF4-FFF2-40B4-BE49-F238E27FC236}">
-                <a16:creationId xmlns:a16="http://schemas.microsoft.com/office/drawing/2014/main" id="{CFBB8D88-C46B-4BFD-95E5-3CD2F79AB4A3}"/>
-              </a:ext>
-            </a:extLst>
-          </p:cNvPr>
-          <p:cNvSpPr txBox="1"/>
-          <p:nvPr/>
-        </p:nvSpPr>
-        <p:spPr>
-          <a:xfrm>
-            <a:off x="6374296" y="5537102"/>
-            <a:ext cx="5148396" cy="646331"/>
-          </a:xfrm>
-          <a:prstGeom prst="rect">
-            <a:avLst/>
-          </a:prstGeom>
-          <a:noFill/>
-          <a:ln>
-            <a:solidFill>
-              <a:schemeClr val="bg1"/>
-            </a:solidFill>
-          </a:ln>
-        </p:spPr>
-        <p:txBody>
-          <a:bodyPr wrap="square" rtlCol="0">
-            <a:spAutoFit/>
-          </a:bodyPr>
-          <a:lstStyle/>
-          <a:p>
-            <a:r>
-              <a:t>UPI's services have expanded to countries like Singapore, UAE, and Nepal, showcasing its potential as a global model for real-time payment systems.</a:t>
-            </a:r>
-          </a:p>
-        </p:txBody>
-      </p:sp>
-      <p:sp>
-        <p:nvSpPr>
-          <p:cNvPr id="27" name="subtopic">
-            <a:extLst>
-              <a:ext uri="{FF2B5EF4-FFF2-40B4-BE49-F238E27FC236}">
-                <a16:creationId xmlns:a16="http://schemas.microsoft.com/office/drawing/2014/main" id="{1FC39E55-DAC2-4D18-8701-DF4E171179AC}"/>
-              </a:ext>
-            </a:extLst>
-          </p:cNvPr>
-          <p:cNvSpPr txBox="1"/>
-          <p:nvPr/>
-        </p:nvSpPr>
-        <p:spPr>
-          <a:xfrm>
-            <a:off x="168257" y="330442"/>
-            <a:ext cx="10563455" cy="646331"/>
-          </a:xfrm>
-          <a:prstGeom prst="rect">
-            <a:avLst/>
-          </a:prstGeom>
-          <a:noFill/>
-        </p:spPr>
-        <p:txBody>
-          <a:bodyPr wrap="square" rtlCol="0">
-            <a:spAutoFit/>
-          </a:bodyPr>
-          <a:lstStyle/>
-          <a:p>
-            <a:r>
-              <a:t>Key Features and Innovations of UPI: How It Works</a:t>
-            </a:r>
-          </a:p>
-        </p:txBody>
-      </p:sp>
-    </p:spTree>
-  </p:cSld>
-  <p:clrMapOvr>
-    <a:masterClrMapping/>
-  </p:clrMapOvr>
-</p:sld>
-</file>
-
-<file path=ppt/slides/slide4.xml><?xml version="1.0" encoding="utf-8"?>
-<p:sld xmlns:a="http://schemas.openxmlformats.org/drawingml/2006/main" xmlns:p="http://schemas.openxmlformats.org/presentationml/2006/main" xmlns:r="http://schemas.openxmlformats.org/officeDocument/2006/relationships">
-  <p:cSld>
-    <p:spTree>
-      <p:nvGrpSpPr>
-        <p:cNvPr id="1" name=""/>
-        <p:cNvGrpSpPr/>
-        <p:nvPr/>
-      </p:nvGrpSpPr>
-      <p:grpSpPr/>
-      <p:sp>
-        <p:nvSpPr>
-          <p:cNvPr id="2" name="content1">
-            <a:extLst>
-              <a:ext uri="{FF2B5EF4-FFF2-40B4-BE49-F238E27FC236}">
-                <a16:creationId xmlns:a16="http://schemas.microsoft.com/office/drawing/2014/main" id="{54FB0FDB-46CC-42BE-A833-C89184E3471E}"/>
-              </a:ext>
-            </a:extLst>
-          </p:cNvPr>
-          <p:cNvSpPr txBox="1"/>
-          <p:nvPr/>
-        </p:nvSpPr>
-        <p:spPr>
-          <a:xfrm>
-            <a:off x="350251" y="3043533"/>
-            <a:ext cx="5713159" cy="646331"/>
-          </a:xfrm>
-          <a:prstGeom prst="rect">
-            <a:avLst/>
-          </a:prstGeom>
-          <a:noFill/>
-          <a:ln>
-            <a:solidFill>
-              <a:schemeClr val="bg1"/>
-            </a:solidFill>
-          </a:ln>
-        </p:spPr>
-        <p:txBody>
-          <a:bodyPr wrap="square" rtlCol="0">
-            <a:spAutoFit/>
-          </a:bodyPr>
-          <a:lstStyle/>
-          <a:p>
-            <a:r>
-              <a:t>UPI has boosted India's Financial Inclusion Index from 43.4 in 2017 to 64.2 in 2024, enhancing access to financial services for low-income households and small merchants.</a:t>
-            </a:r>
-          </a:p>
-        </p:txBody>
-      </p:sp>
-      <p:sp>
-        <p:nvSpPr>
-          <p:cNvPr id="3" name="head1">
-            <a:extLst>
-              <a:ext uri="{FF2B5EF4-FFF2-40B4-BE49-F238E27FC236}">
-                <a16:creationId xmlns:a16="http://schemas.microsoft.com/office/drawing/2014/main" id="{18484F3A-33E9-4106-BBE3-C35CDE75E4F4}"/>
-              </a:ext>
-            </a:extLst>
-          </p:cNvPr>
-          <p:cNvSpPr txBox="1"/>
-          <p:nvPr/>
-        </p:nvSpPr>
-        <p:spPr>
-          <a:xfrm>
-            <a:off x="350251" y="2441330"/>
-            <a:ext cx="5745749" cy="584775"/>
-          </a:xfrm>
-          <a:prstGeom prst="rect">
-            <a:avLst/>
-          </a:prstGeom>
-          <a:noFill/>
-        </p:spPr>
-        <p:txBody>
-          <a:bodyPr wrap="square" rtlCol="0">
-            <a:spAutoFit/>
-          </a:bodyPr>
-          <a:lstStyle/>
-          <a:p>
-            <a:r>
-              <a:t>Advancement in Financial Inclusion</a:t>
-            </a:r>
-          </a:p>
-        </p:txBody>
-      </p:sp>
-      <p:sp>
-        <p:nvSpPr>
-          <p:cNvPr id="4" name="content3">
-            <a:extLst>
-              <a:ext uri="{FF2B5EF4-FFF2-40B4-BE49-F238E27FC236}">
-                <a16:creationId xmlns:a16="http://schemas.microsoft.com/office/drawing/2014/main" id="{7ED6F132-1EC3-4F89-ACC9-391787BE6AE2}"/>
-              </a:ext>
-            </a:extLst>
-          </p:cNvPr>
-          <p:cNvSpPr txBox="1"/>
-          <p:nvPr/>
-        </p:nvSpPr>
-        <p:spPr>
-          <a:xfrm>
-            <a:off x="415434" y="5525002"/>
-            <a:ext cx="5647975" cy="646331"/>
-          </a:xfrm>
-          <a:prstGeom prst="rect">
-            <a:avLst/>
-          </a:prstGeom>
-          <a:noFill/>
-          <a:ln>
-            <a:solidFill>
-              <a:schemeClr val="bg1"/>
-            </a:solidFill>
-          </a:ln>
-        </p:spPr>
-        <p:txBody>
-          <a:bodyPr wrap="square" rtlCol="0">
-            <a:spAutoFit/>
-          </a:bodyPr>
-          <a:lstStyle/>
-          <a:p>
-            <a:r>
-              <a:t>Since its launch, UPI has saved the Indian economy approximately $67 billion and is projected to increase GDP by $45.6 billion (1.12%) by 2026.</a:t>
-            </a:r>
-          </a:p>
-        </p:txBody>
-      </p:sp>
-      <p:sp>
-        <p:nvSpPr>
-          <p:cNvPr id="5" name="head3">
-            <a:extLst>
-              <a:ext uri="{FF2B5EF4-FFF2-40B4-BE49-F238E27FC236}">
-                <a16:creationId xmlns:a16="http://schemas.microsoft.com/office/drawing/2014/main" id="{1EC6BFD2-A54A-4CFB-BE32-CB35F7C65D66}"/>
-              </a:ext>
-            </a:extLst>
-          </p:cNvPr>
-          <p:cNvSpPr txBox="1"/>
-          <p:nvPr/>
-        </p:nvSpPr>
-        <p:spPr>
-          <a:xfrm>
-            <a:off x="382842" y="4952327"/>
-            <a:ext cx="5680567" cy="584775"/>
-          </a:xfrm>
-          <a:prstGeom prst="rect">
-            <a:avLst/>
-          </a:prstGeom>
-          <a:noFill/>
-        </p:spPr>
-        <p:txBody>
-          <a:bodyPr wrap="square" rtlCol="0">
-            <a:spAutoFit/>
-          </a:bodyPr>
-          <a:lstStyle/>
-          <a:p>
-            <a:r>
-              <a:t>Significant Economic Contributions</a:t>
-            </a:r>
-          </a:p>
-        </p:txBody>
-      </p:sp>
-      <p:sp>
-        <p:nvSpPr>
-          <p:cNvPr id="6" name="content2">
-            <a:extLst>
-              <a:ext uri="{FF2B5EF4-FFF2-40B4-BE49-F238E27FC236}">
-                <a16:creationId xmlns:a16="http://schemas.microsoft.com/office/drawing/2014/main" id="{228BCD66-C14B-42CD-A438-BC7AA99965CD}"/>
-              </a:ext>
-            </a:extLst>
-          </p:cNvPr>
-          <p:cNvSpPr txBox="1"/>
-          <p:nvPr/>
-        </p:nvSpPr>
-        <p:spPr>
-          <a:xfrm>
-            <a:off x="6374296" y="3043533"/>
-            <a:ext cx="5148396" cy="646331"/>
-          </a:xfrm>
-          <a:prstGeom prst="rect">
-            <a:avLst/>
-          </a:prstGeom>
-          <a:noFill/>
-          <a:ln>
-            <a:solidFill>
-              <a:schemeClr val="bg1"/>
-            </a:solidFill>
-          </a:ln>
-        </p:spPr>
-        <p:txBody>
-          <a:bodyPr wrap="square" rtlCol="0">
-            <a:spAutoFit/>
-          </a:bodyPr>
-          <a:lstStyle/>
-          <a:p>
-            <a:r>
-              <a:t>UPI transactions soared from 0.09 million in July 2016 to over 16.7 billion by December 2024, integrating underserved populations into the formal economy.</a:t>
-            </a:r>
-          </a:p>
-        </p:txBody>
-      </p:sp>
-      <p:sp>
-        <p:nvSpPr>
-          <p:cNvPr id="7" name="head2">
-            <a:extLst>
-              <a:ext uri="{FF2B5EF4-FFF2-40B4-BE49-F238E27FC236}">
-                <a16:creationId xmlns:a16="http://schemas.microsoft.com/office/drawing/2014/main" id="{CD5BF12C-71C8-4652-9154-19F255752D5D}"/>
-              </a:ext>
-            </a:extLst>
-          </p:cNvPr>
-          <p:cNvSpPr txBox="1"/>
-          <p:nvPr/>
-        </p:nvSpPr>
-        <p:spPr>
-          <a:xfrm>
-            <a:off x="6341705" y="2441330"/>
-            <a:ext cx="5180986" cy="584775"/>
-          </a:xfrm>
-          <a:prstGeom prst="rect">
-            <a:avLst/>
-          </a:prstGeom>
-          <a:noFill/>
-        </p:spPr>
-        <p:txBody>
-          <a:bodyPr wrap="square" rtlCol="0">
-            <a:spAutoFit/>
-          </a:bodyPr>
-          <a:lstStyle/>
-          <a:p>
-            <a:r>
-              <a:t>Surge in Transaction Volumes</a:t>
-            </a:r>
-          </a:p>
-        </p:txBody>
-      </p:sp>
-      <p:sp>
-        <p:nvSpPr>
-          <p:cNvPr id="9" name="head4">
-            <a:extLst>
-              <a:ext uri="{FF2B5EF4-FFF2-40B4-BE49-F238E27FC236}">
-                <a16:creationId xmlns:a16="http://schemas.microsoft.com/office/drawing/2014/main" id="{B5F1E050-5BFC-480A-9E92-7665641E2034}"/>
-              </a:ext>
-            </a:extLst>
-          </p:cNvPr>
-          <p:cNvSpPr txBox="1"/>
-          <p:nvPr/>
-        </p:nvSpPr>
-        <p:spPr>
-          <a:xfrm>
-            <a:off x="6341705" y="4952327"/>
-            <a:ext cx="5180986" cy="584775"/>
-          </a:xfrm>
-          <a:prstGeom prst="rect">
-            <a:avLst/>
-          </a:prstGeom>
-          <a:noFill/>
-        </p:spPr>
-        <p:txBody>
-          <a:bodyPr wrap="square" rtlCol="0">
-            <a:spAutoFit/>
-          </a:bodyPr>
-          <a:lstStyle/>
-          <a:p>
-            <a:r>
-              <a:t>Preferred Payment Method</a:t>
-            </a:r>
-          </a:p>
-        </p:txBody>
-      </p:sp>
-      <p:sp>
-        <p:nvSpPr>
-          <p:cNvPr id="21" name="content4">
-            <a:extLst>
-              <a:ext uri="{FF2B5EF4-FFF2-40B4-BE49-F238E27FC236}">
-                <a16:creationId xmlns:a16="http://schemas.microsoft.com/office/drawing/2014/main" id="{CFBB8D88-C46B-4BFD-95E5-3CD2F79AB4A3}"/>
-              </a:ext>
-            </a:extLst>
-          </p:cNvPr>
-          <p:cNvSpPr txBox="1"/>
-          <p:nvPr/>
-        </p:nvSpPr>
-        <p:spPr>
-          <a:xfrm>
-            <a:off x="6374296" y="5537102"/>
-            <a:ext cx="5148396" cy="646331"/>
-          </a:xfrm>
-          <a:prstGeom prst="rect">
-            <a:avLst/>
-          </a:prstGeom>
-          <a:noFill/>
-          <a:ln>
-            <a:solidFill>
-              <a:schemeClr val="bg1"/>
-            </a:solidFill>
-          </a:ln>
-        </p:spPr>
-        <p:txBody>
-          <a:bodyPr wrap="square" rtlCol="0">
-            <a:spAutoFit/>
-          </a:bodyPr>
-          <a:lstStyle/>
-          <a:p>
-            <a:r>
-              <a:t>Over 43% of users favor UPI for its ease, speed, and security, driving a shift towards digital transactions and lowering transaction costs.</a:t>
-            </a:r>
-          </a:p>
-        </p:txBody>
-      </p:sp>
-      <p:sp>
-        <p:nvSpPr>
-          <p:cNvPr id="27" name="subtopic">
-            <a:extLst>
-              <a:ext uri="{FF2B5EF4-FFF2-40B4-BE49-F238E27FC236}">
-                <a16:creationId xmlns:a16="http://schemas.microsoft.com/office/drawing/2014/main" id="{1FC39E55-DAC2-4D18-8701-DF4E171179AC}"/>
-              </a:ext>
-            </a:extLst>
-          </p:cNvPr>
-          <p:cNvSpPr txBox="1"/>
-          <p:nvPr/>
-        </p:nvSpPr>
-        <p:spPr>
-          <a:xfrm>
-            <a:off x="168257" y="330442"/>
-            <a:ext cx="10563455" cy="646331"/>
-          </a:xfrm>
-          <a:prstGeom prst="rect">
-            <a:avLst/>
-          </a:prstGeom>
-          <a:noFill/>
-        </p:spPr>
-        <p:txBody>
-          <a:bodyPr wrap="square" rtlCol="0">
-            <a:spAutoFit/>
-          </a:bodyPr>
-          <a:lstStyle/>
-          <a:p>
-            <a:r>
-              <a:t>UPI's Impact on Financial Inclusion and Economic Growth</a:t>
-            </a:r>
-          </a:p>
-        </p:txBody>
-      </p:sp>
-    </p:spTree>
-  </p:cSld>
-  <p:clrMapOvr>
-    <a:masterClrMapping/>
-  </p:clrMapOvr>
-</p:sld>
-</file>
-
-<file path=ppt/slides/slide5.xml><?xml version="1.0" encoding="utf-8"?>
-<p:sld xmlns:a="http://schemas.openxmlformats.org/drawingml/2006/main" xmlns:p="http://schemas.openxmlformats.org/presentationml/2006/main" xmlns:r="http://schemas.openxmlformats.org/officeDocument/2006/relationships">
-  <p:cSld>
-    <p:spTree>
-      <p:nvGrpSpPr>
-        <p:cNvPr id="1" name=""/>
-        <p:cNvGrpSpPr/>
-        <p:nvPr/>
-      </p:nvGrpSpPr>
-      <p:grpSpPr/>
-      <p:sp>
-        <p:nvSpPr>
-          <p:cNvPr id="2" name="content1">
-            <a:extLst>
-              <a:ext uri="{FF2B5EF4-FFF2-40B4-BE49-F238E27FC236}">
-                <a16:creationId xmlns:a16="http://schemas.microsoft.com/office/drawing/2014/main" id="{54FB0FDB-46CC-42BE-A833-C89184E3471E}"/>
-              </a:ext>
-            </a:extLst>
-          </p:cNvPr>
-          <p:cNvSpPr txBox="1"/>
-          <p:nvPr/>
-        </p:nvSpPr>
-        <p:spPr>
-          <a:xfrm>
-            <a:off x="350251" y="3043533"/>
-            <a:ext cx="5713159" cy="646331"/>
-          </a:xfrm>
-          <a:prstGeom prst="rect">
-            <a:avLst/>
-          </a:prstGeom>
-          <a:noFill/>
-          <a:ln>
-            <a:solidFill>
-              <a:schemeClr val="bg1"/>
-            </a:solidFill>
-          </a:ln>
-        </p:spPr>
-        <p:txBody>
-          <a:bodyPr wrap="square" rtlCol="0">
-            <a:spAutoFit/>
-          </a:bodyPr>
-          <a:lstStyle/>
-          <a:p>
-            <a:r>
-              <a:t>UPI encounters issues like technical glitches and outages, impacting transaction success; ongoing infrastructure improvements aim to enhance reliability.</a:t>
-            </a:r>
-          </a:p>
-        </p:txBody>
-      </p:sp>
-      <p:sp>
-        <p:nvSpPr>
-          <p:cNvPr id="3" name="head1">
-            <a:extLst>
-              <a:ext uri="{FF2B5EF4-FFF2-40B4-BE49-F238E27FC236}">
-                <a16:creationId xmlns:a16="http://schemas.microsoft.com/office/drawing/2014/main" id="{18484F3A-33E9-4106-BBE3-C35CDE75E4F4}"/>
-              </a:ext>
-            </a:extLst>
-          </p:cNvPr>
-          <p:cNvSpPr txBox="1"/>
-          <p:nvPr/>
-        </p:nvSpPr>
-        <p:spPr>
-          <a:xfrm>
-            <a:off x="350251" y="2441330"/>
-            <a:ext cx="5745749" cy="584775"/>
-          </a:xfrm>
-          <a:prstGeom prst="rect">
-            <a:avLst/>
-          </a:prstGeom>
-          <a:noFill/>
-        </p:spPr>
-        <p:txBody>
-          <a:bodyPr wrap="square" rtlCol="0">
-            <a:spAutoFit/>
-          </a:bodyPr>
-          <a:lstStyle/>
-          <a:p>
-            <a:r>
-              <a:t>Technical Challenges in UPI</a:t>
-            </a:r>
-          </a:p>
-        </p:txBody>
-      </p:sp>
-      <p:sp>
-        <p:nvSpPr>
-          <p:cNvPr id="4" name="content3">
-            <a:extLst>
-              <a:ext uri="{FF2B5EF4-FFF2-40B4-BE49-F238E27FC236}">
-                <a16:creationId xmlns:a16="http://schemas.microsoft.com/office/drawing/2014/main" id="{7ED6F132-1EC3-4F89-ACC9-391787BE6AE2}"/>
-              </a:ext>
-            </a:extLst>
-          </p:cNvPr>
-          <p:cNvSpPr txBox="1"/>
-          <p:nvPr/>
-        </p:nvSpPr>
-        <p:spPr>
-          <a:xfrm>
-            <a:off x="415434" y="5525002"/>
-            <a:ext cx="5647975" cy="646331"/>
-          </a:xfrm>
-          <a:prstGeom prst="rect">
-            <a:avLst/>
-          </a:prstGeom>
-          <a:noFill/>
-          <a:ln>
-            <a:solidFill>
-              <a:schemeClr val="bg1"/>
-            </a:solidFill>
-          </a:ln>
-        </p:spPr>
-        <p:txBody>
-          <a:bodyPr wrap="square" rtlCol="0">
-            <a:spAutoFit/>
-          </a:bodyPr>
-          <a:lstStyle/>
-          <a:p>
-            <a:r>
-              <a:t>Despite high awareness of UPI, a gap exists in active usage, particularly in rural regions; targeted campaigns and incentives are crucial for building consumer trust.</a:t>
-            </a:r>
-          </a:p>
-        </p:txBody>
-      </p:sp>
-      <p:sp>
-        <p:nvSpPr>
-          <p:cNvPr id="5" name="head3">
-            <a:extLst>
-              <a:ext uri="{FF2B5EF4-FFF2-40B4-BE49-F238E27FC236}">
-                <a16:creationId xmlns:a16="http://schemas.microsoft.com/office/drawing/2014/main" id="{1EC6BFD2-A54A-4CFB-BE32-CB35F7C65D66}"/>
-              </a:ext>
-            </a:extLst>
-          </p:cNvPr>
-          <p:cNvSpPr txBox="1"/>
-          <p:nvPr/>
-        </p:nvSpPr>
-        <p:spPr>
-          <a:xfrm>
-            <a:off x="382842" y="4952327"/>
-            <a:ext cx="5680567" cy="584775"/>
-          </a:xfrm>
-          <a:prstGeom prst="rect">
-            <a:avLst/>
-          </a:prstGeom>
-          <a:noFill/>
-        </p:spPr>
-        <p:txBody>
-          <a:bodyPr wrap="square" rtlCol="0">
-            <a:spAutoFit/>
-          </a:bodyPr>
-          <a:lstStyle/>
-          <a:p>
-            <a:r>
-              <a:t>Need for Awareness Campaigns</a:t>
-            </a:r>
-          </a:p>
-        </p:txBody>
-      </p:sp>
-      <p:sp>
-        <p:nvSpPr>
-          <p:cNvPr id="6" name="content2">
-            <a:extLst>
-              <a:ext uri="{FF2B5EF4-FFF2-40B4-BE49-F238E27FC236}">
-                <a16:creationId xmlns:a16="http://schemas.microsoft.com/office/drawing/2014/main" id="{228BCD66-C14B-42CD-A438-BC7AA99965CD}"/>
-              </a:ext>
-            </a:extLst>
-          </p:cNvPr>
-          <p:cNvSpPr txBox="1"/>
-          <p:nvPr/>
-        </p:nvSpPr>
-        <p:spPr>
-          <a:xfrm>
-            <a:off x="6374296" y="3043533"/>
-            <a:ext cx="5148396" cy="646331"/>
-          </a:xfrm>
-          <a:prstGeom prst="rect">
-            <a:avLst/>
-          </a:prstGeom>
-          <a:noFill/>
-          <a:ln>
-            <a:solidFill>
-              <a:schemeClr val="bg1"/>
-            </a:solidFill>
-          </a:ln>
-        </p:spPr>
-        <p:txBody>
-          <a:bodyPr wrap="square" rtlCol="0">
-            <a:spAutoFit/>
-          </a:bodyPr>
-          <a:lstStyle/>
-          <a:p>
-            <a:r>
-              <a:t>Limited digital literacy and smartphone access in rural India hinder UPI adoption, necessitating initiatives to improve technology access and financial education.</a:t>
-            </a:r>
-          </a:p>
-        </p:txBody>
-      </p:sp>
-      <p:sp>
-        <p:nvSpPr>
-          <p:cNvPr id="7" name="head2">
-            <a:extLst>
-              <a:ext uri="{FF2B5EF4-FFF2-40B4-BE49-F238E27FC236}">
-                <a16:creationId xmlns:a16="http://schemas.microsoft.com/office/drawing/2014/main" id="{CD5BF12C-71C8-4652-9154-19F255752D5D}"/>
-              </a:ext>
-            </a:extLst>
-          </p:cNvPr>
-          <p:cNvSpPr txBox="1"/>
-          <p:nvPr/>
-        </p:nvSpPr>
-        <p:spPr>
-          <a:xfrm>
-            <a:off x="6341705" y="2441330"/>
-            <a:ext cx="5180986" cy="584775"/>
-          </a:xfrm>
-          <a:prstGeom prst="rect">
-            <a:avLst/>
-          </a:prstGeom>
-          <a:noFill/>
-        </p:spPr>
-        <p:txBody>
-          <a:bodyPr wrap="square" rtlCol="0">
-            <a:spAutoFit/>
-          </a:bodyPr>
-          <a:lstStyle/>
-          <a:p>
-            <a:r>
-              <a:t>Digital Divide in Rural Areas</a:t>
-            </a:r>
-          </a:p>
-        </p:txBody>
-      </p:sp>
-      <p:sp>
-        <p:nvSpPr>
-          <p:cNvPr id="9" name="head4">
-            <a:extLst>
-              <a:ext uri="{FF2B5EF4-FFF2-40B4-BE49-F238E27FC236}">
-                <a16:creationId xmlns:a16="http://schemas.microsoft.com/office/drawing/2014/main" id="{B5F1E050-5BFC-480A-9E92-7665641E2034}"/>
-              </a:ext>
-            </a:extLst>
-          </p:cNvPr>
-          <p:cNvSpPr txBox="1"/>
-          <p:nvPr/>
-        </p:nvSpPr>
-        <p:spPr>
-          <a:xfrm>
-            <a:off x="6341705" y="4952327"/>
-            <a:ext cx="5180986" cy="584775"/>
-          </a:xfrm>
-          <a:prstGeom prst="rect">
-            <a:avLst/>
-          </a:prstGeom>
-          <a:noFill/>
-        </p:spPr>
-        <p:txBody>
-          <a:bodyPr wrap="square" rtlCol="0">
-            <a:spAutoFit/>
-          </a:bodyPr>
-          <a:lstStyle/>
-          <a:p>
-            <a:r>
-              <a:t>Enhancements with UPI 2.0</a:t>
-            </a:r>
-          </a:p>
-        </p:txBody>
-      </p:sp>
-      <p:sp>
-        <p:nvSpPr>
-          <p:cNvPr id="21" name="content4">
-            <a:extLst>
-              <a:ext uri="{FF2B5EF4-FFF2-40B4-BE49-F238E27FC236}">
-                <a16:creationId xmlns:a16="http://schemas.microsoft.com/office/drawing/2014/main" id="{CFBB8D88-C46B-4BFD-95E5-3CD2F79AB4A3}"/>
-              </a:ext>
-            </a:extLst>
-          </p:cNvPr>
-          <p:cNvSpPr txBox="1"/>
-          <p:nvPr/>
-        </p:nvSpPr>
-        <p:spPr>
-          <a:xfrm>
-            <a:off x="6374296" y="5537102"/>
-            <a:ext cx="5148396" cy="646331"/>
-          </a:xfrm>
-          <a:prstGeom prst="rect">
-            <a:avLst/>
-          </a:prstGeom>
-          <a:noFill/>
-          <a:ln>
-            <a:solidFill>
-              <a:schemeClr val="bg1"/>
-            </a:solidFill>
-          </a:ln>
-        </p:spPr>
-        <p:txBody>
-          <a:bodyPr wrap="square" rtlCol="0">
-            <a:spAutoFit/>
-          </a:bodyPr>
-          <a:lstStyle/>
-          <a:p>
-            <a:r>
-              <a:t>UPI 2.0 introduces features like overdraft facilities to improve user experience, but ongoing investments in technology and fraud management are vital for sustainability.</a:t>
-            </a:r>
-          </a:p>
-        </p:txBody>
-      </p:sp>
-      <p:sp>
-        <p:nvSpPr>
-          <p:cNvPr id="27" name="subtopic">
-            <a:extLst>
-              <a:ext uri="{FF2B5EF4-FFF2-40B4-BE49-F238E27FC236}">
-                <a16:creationId xmlns:a16="http://schemas.microsoft.com/office/drawing/2014/main" id="{1FC39E55-DAC2-4D18-8701-DF4E171179AC}"/>
-              </a:ext>
-            </a:extLst>
-          </p:cNvPr>
-          <p:cNvSpPr txBox="1"/>
-          <p:nvPr/>
-        </p:nvSpPr>
-        <p:spPr>
-          <a:xfrm>
-            <a:off x="168257" y="330442"/>
-            <a:ext cx="10563455" cy="646331"/>
-          </a:xfrm>
-          <a:prstGeom prst="rect">
-            <a:avLst/>
-          </a:prstGeom>
-          <a:noFill/>
-        </p:spPr>
-        <p:txBody>
-          <a:bodyPr wrap="square" rtlCol="0">
-            <a:spAutoFit/>
-          </a:bodyPr>
-          <a:lstStyle/>
-          <a:p>
-            <a:r>
-              <a:t>Challenges and Solutions in UPI's Implementation and Adoption</a:t>
-            </a:r>
-          </a:p>
-        </p:txBody>
-      </p:sp>
-    </p:spTree>
-  </p:cSld>
-  <p:clrMapOvr>
-    <a:masterClrMapping/>
-  </p:clrMapOvr>
-</p:sld>
-</file>
-
-<file path=ppt/slides/slide6.xml><?xml version="1.0" encoding="utf-8"?>
-<p:sld xmlns:a="http://schemas.openxmlformats.org/drawingml/2006/main" xmlns:p="http://schemas.openxmlformats.org/presentationml/2006/main" xmlns:r="http://schemas.openxmlformats.org/officeDocument/2006/relationships">
-  <p:cSld>
-    <p:spTree>
-      <p:nvGrpSpPr>
-        <p:cNvPr id="1" name=""/>
-        <p:cNvGrpSpPr/>
-        <p:nvPr/>
-      </p:nvGrpSpPr>
-      <p:grpSpPr/>
-      <p:sp>
-        <p:nvSpPr>
-          <p:cNvPr id="2" name="content1">
-            <a:extLst>
-              <a:ext uri="{FF2B5EF4-FFF2-40B4-BE49-F238E27FC236}">
-                <a16:creationId xmlns:a16="http://schemas.microsoft.com/office/drawing/2014/main" id="{54FB0FDB-46CC-42BE-A833-C89184E3471E}"/>
-              </a:ext>
-            </a:extLst>
-          </p:cNvPr>
-          <p:cNvSpPr txBox="1"/>
-          <p:nvPr/>
-        </p:nvSpPr>
-        <p:spPr>
-          <a:xfrm>
-            <a:off x="350251" y="3043533"/>
-            <a:ext cx="5713159" cy="646331"/>
-          </a:xfrm>
-          <a:prstGeom prst="rect">
-            <a:avLst/>
-          </a:prstGeom>
-          <a:noFill/>
-          <a:ln>
-            <a:solidFill>
-              <a:schemeClr val="bg1"/>
-            </a:solidFill>
-          </a:ln>
-        </p:spPr>
-        <p:txBody>
-          <a:bodyPr wrap="square" rtlCol="0">
-            <a:spAutoFit/>
-          </a:bodyPr>
-          <a:lstStyle/>
-          <a:p>
-            <a:r>
-              <a:t>UPI aims to launch in over 20 countries by March 2029, enhancing cross-border remittances and international trade efficiency.</a:t>
-            </a:r>
-          </a:p>
-        </p:txBody>
-      </p:sp>
-      <p:sp>
-        <p:nvSpPr>
-          <p:cNvPr id="3" name="head1">
-            <a:extLst>
-              <a:ext uri="{FF2B5EF4-FFF2-40B4-BE49-F238E27FC236}">
-                <a16:creationId xmlns:a16="http://schemas.microsoft.com/office/drawing/2014/main" id="{18484F3A-33E9-4106-BBE3-C35CDE75E4F4}"/>
-              </a:ext>
-            </a:extLst>
-          </p:cNvPr>
-          <p:cNvSpPr txBox="1"/>
-          <p:nvPr/>
-        </p:nvSpPr>
-        <p:spPr>
-          <a:xfrm>
-            <a:off x="350251" y="2441330"/>
-            <a:ext cx="5745749" cy="584775"/>
-          </a:xfrm>
-          <a:prstGeom prst="rect">
-            <a:avLst/>
-          </a:prstGeom>
-          <a:noFill/>
-        </p:spPr>
-        <p:txBody>
-          <a:bodyPr wrap="square" rtlCol="0">
-            <a:spAutoFit/>
-          </a:bodyPr>
-          <a:lstStyle/>
-          <a:p>
-            <a:r>
-              <a:t>Global Expansion Plans</a:t>
-            </a:r>
-          </a:p>
-        </p:txBody>
-      </p:sp>
-      <p:sp>
-        <p:nvSpPr>
-          <p:cNvPr id="4" name="content3">
-            <a:extLst>
-              <a:ext uri="{FF2B5EF4-FFF2-40B4-BE49-F238E27FC236}">
-                <a16:creationId xmlns:a16="http://schemas.microsoft.com/office/drawing/2014/main" id="{7ED6F132-1EC3-4F89-ACC9-391787BE6AE2}"/>
-              </a:ext>
-            </a:extLst>
-          </p:cNvPr>
-          <p:cNvSpPr txBox="1"/>
-          <p:nvPr/>
-        </p:nvSpPr>
-        <p:spPr>
-          <a:xfrm>
-            <a:off x="415434" y="5525002"/>
-            <a:ext cx="5647975" cy="646331"/>
-          </a:xfrm>
-          <a:prstGeom prst="rect">
-            <a:avLst/>
-          </a:prstGeom>
-          <a:noFill/>
-          <a:ln>
-            <a:solidFill>
-              <a:schemeClr val="bg1"/>
-            </a:solidFill>
-          </a:ln>
-        </p:spPr>
-        <p:txBody>
-          <a:bodyPr wrap="square" rtlCol="0">
-            <a:spAutoFit/>
-          </a:bodyPr>
-          <a:lstStyle/>
-          <a:p>
-            <a:r>
-              <a:t>In October 2024, UPI achieved 16.58 billion transactions in a month, marking a 45% increase year-on-year due to improved banking integration.</a:t>
-            </a:r>
-          </a:p>
-        </p:txBody>
-      </p:sp>
-      <p:sp>
-        <p:nvSpPr>
-          <p:cNvPr id="5" name="head3">
-            <a:extLst>
-              <a:ext uri="{FF2B5EF4-FFF2-40B4-BE49-F238E27FC236}">
-                <a16:creationId xmlns:a16="http://schemas.microsoft.com/office/drawing/2014/main" id="{1EC6BFD2-A54A-4CFB-BE32-CB35F7C65D66}"/>
-              </a:ext>
-            </a:extLst>
-          </p:cNvPr>
-          <p:cNvSpPr txBox="1"/>
-          <p:nvPr/>
-        </p:nvSpPr>
-        <p:spPr>
-          <a:xfrm>
-            <a:off x="382842" y="4952327"/>
-            <a:ext cx="5680567" cy="584775"/>
-          </a:xfrm>
-          <a:prstGeom prst="rect">
-            <a:avLst/>
-          </a:prstGeom>
-          <a:noFill/>
-        </p:spPr>
-        <p:txBody>
-          <a:bodyPr wrap="square" rtlCol="0">
-            <a:spAutoFit/>
-          </a:bodyPr>
-          <a:lstStyle/>
-          <a:p>
-            <a:r>
-              <a:t>Record Transaction Growth</a:t>
-            </a:r>
-          </a:p>
-        </p:txBody>
-      </p:sp>
-      <p:sp>
-        <p:nvSpPr>
-          <p:cNvPr id="6" name="content2">
-            <a:extLst>
-              <a:ext uri="{FF2B5EF4-FFF2-40B4-BE49-F238E27FC236}">
-                <a16:creationId xmlns:a16="http://schemas.microsoft.com/office/drawing/2014/main" id="{228BCD66-C14B-42CD-A438-BC7AA99965CD}"/>
-              </a:ext>
-            </a:extLst>
-          </p:cNvPr>
-          <p:cNvSpPr txBox="1"/>
-          <p:nvPr/>
-        </p:nvSpPr>
-        <p:spPr>
-          <a:xfrm>
-            <a:off x="6374296" y="3043533"/>
-            <a:ext cx="5148396" cy="646331"/>
-          </a:xfrm>
-          <a:prstGeom prst="rect">
-            <a:avLst/>
-          </a:prstGeom>
-          <a:noFill/>
-          <a:ln>
-            <a:solidFill>
-              <a:schemeClr val="bg1"/>
-            </a:solidFill>
-          </a:ln>
-        </p:spPr>
-        <p:txBody>
-          <a:bodyPr wrap="square" rtlCol="0">
-            <a:spAutoFit/>
-          </a:bodyPr>
-          <a:lstStyle/>
-          <a:p>
-            <a:r>
-              <a:t>New UPI Circle allows users to delegate payment tasks to trusted contacts, while UPI Vouchers enable easy transfer of prepaid vouchers.</a:t>
-            </a:r>
-          </a:p>
-        </p:txBody>
-      </p:sp>
-      <p:sp>
-        <p:nvSpPr>
-          <p:cNvPr id="7" name="head2">
-            <a:extLst>
-              <a:ext uri="{FF2B5EF4-FFF2-40B4-BE49-F238E27FC236}">
-                <a16:creationId xmlns:a16="http://schemas.microsoft.com/office/drawing/2014/main" id="{CD5BF12C-71C8-4652-9154-19F255752D5D}"/>
-              </a:ext>
-            </a:extLst>
-          </p:cNvPr>
-          <p:cNvSpPr txBox="1"/>
-          <p:nvPr/>
-        </p:nvSpPr>
-        <p:spPr>
-          <a:xfrm>
-            <a:off x="6341705" y="2441330"/>
-            <a:ext cx="5180986" cy="584775"/>
-          </a:xfrm>
-          <a:prstGeom prst="rect">
-            <a:avLst/>
-          </a:prstGeom>
-          <a:noFill/>
-        </p:spPr>
-        <p:txBody>
-          <a:bodyPr wrap="square" rtlCol="0">
-            <a:spAutoFit/>
-          </a:bodyPr>
-          <a:lstStyle/>
-          <a:p>
-            <a:r>
-              <a:t>Innovative Features</a:t>
-            </a:r>
-          </a:p>
-        </p:txBody>
-      </p:sp>
-      <p:sp>
-        <p:nvSpPr>
-          <p:cNvPr id="9" name="head4">
-            <a:extLst>
-              <a:ext uri="{FF2B5EF4-FFF2-40B4-BE49-F238E27FC236}">
-                <a16:creationId xmlns:a16="http://schemas.microsoft.com/office/drawing/2014/main" id="{B5F1E050-5BFC-480A-9E92-7665641E2034}"/>
-              </a:ext>
-            </a:extLst>
-          </p:cNvPr>
-          <p:cNvSpPr txBox="1"/>
-          <p:nvPr/>
-        </p:nvSpPr>
-        <p:spPr>
-          <a:xfrm>
-            <a:off x="6341705" y="4952327"/>
-            <a:ext cx="5180986" cy="584775"/>
-          </a:xfrm>
-          <a:prstGeom prst="rect">
-            <a:avLst/>
-          </a:prstGeom>
-          <a:noFill/>
-        </p:spPr>
-        <p:txBody>
-          <a:bodyPr wrap="square" rtlCol="0">
-            <a:spAutoFit/>
-          </a:bodyPr>
-          <a:lstStyle/>
-          <a:p>
-            <a:r>
-              <a:t>International Adoption</a:t>
-            </a:r>
-          </a:p>
-        </p:txBody>
-      </p:sp>
-      <p:sp>
-        <p:nvSpPr>
-          <p:cNvPr id="21" name="content4">
-            <a:extLst>
-              <a:ext uri="{FF2B5EF4-FFF2-40B4-BE49-F238E27FC236}">
-                <a16:creationId xmlns:a16="http://schemas.microsoft.com/office/drawing/2014/main" id="{CFBB8D88-C46B-4BFD-95E5-3CD2F79AB4A3}"/>
-              </a:ext>
-            </a:extLst>
-          </p:cNvPr>
-          <p:cNvSpPr txBox="1"/>
-          <p:nvPr/>
-        </p:nvSpPr>
-        <p:spPr>
-          <a:xfrm>
-            <a:off x="6374296" y="5537102"/>
-            <a:ext cx="5148396" cy="646331"/>
-          </a:xfrm>
-          <a:prstGeom prst="rect">
-            <a:avLst/>
-          </a:prstGeom>
-          <a:noFill/>
-          <a:ln>
-            <a:solidFill>
-              <a:schemeClr val="bg1"/>
-            </a:solidFill>
-          </a:ln>
-        </p:spPr>
-        <p:txBody>
-          <a:bodyPr wrap="square" rtlCol="0">
-            <a:spAutoFit/>
-          </a:bodyPr>
-          <a:lstStyle/>
-          <a:p>
-            <a:r>
-              <a:t>UPI is already accepted in countries like the UAE and Singapore, with recent expansions into France and Sri Lanka, showcasing its global potential.</a:t>
-            </a:r>
-          </a:p>
-        </p:txBody>
-      </p:sp>
-      <p:sp>
-        <p:nvSpPr>
-          <p:cNvPr id="27" name="subtopic">
-            <a:extLst>
-              <a:ext uri="{FF2B5EF4-FFF2-40B4-BE49-F238E27FC236}">
-                <a16:creationId xmlns:a16="http://schemas.microsoft.com/office/drawing/2014/main" id="{1FC39E55-DAC2-4D18-8701-DF4E171179AC}"/>
-              </a:ext>
-            </a:extLst>
-          </p:cNvPr>
-          <p:cNvSpPr txBox="1"/>
-          <p:nvPr/>
-        </p:nvSpPr>
-        <p:spPr>
-          <a:xfrm>
-            <a:off x="168257" y="330442"/>
-            <a:ext cx="10563455" cy="646331"/>
-          </a:xfrm>
-          <a:prstGeom prst="rect">
-            <a:avLst/>
-          </a:prstGeom>
-          <a:noFill/>
-        </p:spPr>
-        <p:txBody>
-          <a:bodyPr wrap="square" rtlCol="0">
-            <a:spAutoFit/>
-          </a:bodyPr>
-          <a:lstStyle/>
-          <a:p>
-            <a:r>
-              <a:t>The Future of UPI: Global Expansion and Technological Advancements</a:t>
-            </a:r>
-          </a:p>
-        </p:txBody>
-      </p:sp>
-    </p:spTree>
-  </p:cSld>
-  <p:clrMapOvr>
-    <a:masterClrMapping/>
-  </p:clrMapOvr>
-</p:sld>
-</file>
-
-<file path=ppt/slides/slide7.xml><?xml version="1.0" encoding="utf-8"?>
-<p:sld xmlns:a="http://schemas.openxmlformats.org/drawingml/2006/main" xmlns:p="http://schemas.openxmlformats.org/presentationml/2006/main" xmlns:r="http://schemas.openxmlformats.org/officeDocument/2006/relationships">
-  <p:cSld>
-    <p:spTree>
-      <p:nvGrpSpPr>
-        <p:cNvPr id="1" name=""/>
-        <p:cNvGrpSpPr/>
-        <p:nvPr/>
-      </p:nvGrpSpPr>
-      <p:grpSpPr/>
-      <p:sp>
-        <p:nvSpPr>
           <p:cNvPr id="3" name="ending">
             <a:extLst>
               <a:ext uri="{FF2B5EF4-FFF2-40B4-BE49-F238E27FC236}">
@@ -4895,7 +3515,7 @@
           <a:lstStyle/>
           <a:p>
             <a:r>
-              <a:t>The journey of UPI exemplifies the transformative power of digital payments in shaping India's financial landscape.</a:t>
+              <a:t>Ramen's journey from its origins to a global phenomenon showcases its rich cultural significance and ongoing evolution.</a:t>
             </a:r>
           </a:p>
         </p:txBody>

--- a/final_output.pptx
+++ b/final_output.pptx
@@ -8,6 +8,7 @@
     <p:sldId id="256" r:id="rId7"/>
     <p:sldId id="257" r:id="rId8"/>
     <p:sldId id="258" r:id="rId9"/>
+    <p:sldId id="259" r:id="rId10"/>
   </p:sldIdLst>
   <p:sldSz cx="12192000" cy="6858000" type="screen4x3"/>
   <p:notesSz cx="6858000" cy="9144000"/>
@@ -3119,7 +3120,7 @@
           <a:lstStyle/>
           <a:p>
             <a:r>
-              <a:t>The Global Journey of Ramen</a:t>
+              <a:t>famous foods in USA</a:t>
             </a:r>
           </a:p>
         </p:txBody>
@@ -3176,7 +3177,7 @@
           <a:lstStyle/>
           <a:p>
             <a:r>
-              <a:t>Ramen traces its roots to China, where wheat noodles were enjoyed as early as the 3rd century AD, before being introduced to Japan by Chinese immigrants in the late 19th century.</a:t>
+              <a:t>The U.S. features iconic dishes like New England clam chowder and Kansas City barbecue, showcasing its diverse culinary heritage shaped by history and geography.</a:t>
             </a:r>
           </a:p>
         </p:txBody>
@@ -3210,7 +3211,7 @@
           <a:lstStyle/>
           <a:p>
             <a:r>
-              <a:t>Origins in China</a:t>
+              <a:t>Regional Culinary Icons</a:t>
             </a:r>
           </a:p>
         </p:txBody>
@@ -3249,7 +3250,7 @@
           <a:lstStyle/>
           <a:p>
             <a:r>
-              <a:t>Ramen has evolved with plant-based options, self-heating packaging, and gourmet flavors, while regional styles in Japan highlight local ingredients and inspire international fusion dishes.</a:t>
+              <a:t>American cuisine evolves through global integration, with Tex-Mex in the Southwest and Asian flavors in cities like San Francisco enriching the culinary landscape.</a:t>
             </a:r>
           </a:p>
         </p:txBody>
@@ -3283,7 +3284,7 @@
           <a:lstStyle/>
           <a:p>
             <a:r>
-              <a:t>Innovations and Variations</a:t>
+              <a:t>Global Influences on American Cuisine</a:t>
             </a:r>
           </a:p>
         </p:txBody>
@@ -3322,7 +3323,7 @@
           <a:lstStyle/>
           <a:p>
             <a:r>
-              <a:t>The ramen market is expected to reach $84.99 billion by 2030, growing at a CAGR of 7.9%, fueled by rising demand for premium, healthier options and online retail expansion.</a:t>
+              <a:t>Dishes such as Louisiana gumbo and New England lobster rolls celebrate local ingredients and reflect the cultural traditions of their regions.</a:t>
             </a:r>
           </a:p>
         </p:txBody>
@@ -3356,7 +3357,7 @@
           <a:lstStyle/>
           <a:p>
             <a:r>
-              <a:t>Global Market Growth</a:t>
+              <a:t>Distinct Regional Specialties</a:t>
             </a:r>
           </a:p>
         </p:txBody>
@@ -3390,7 +3391,7 @@
           <a:lstStyle/>
           <a:p>
             <a:r>
-              <a:t>Cultural Impact in Japan</a:t>
+              <a:t>Celebrating Food Festivals</a:t>
             </a:r>
           </a:p>
         </p:txBody>
@@ -3429,7 +3430,7 @@
           <a:lstStyle/>
           <a:p>
             <a:r>
-              <a:t>The 1980s ramen boom in Japan led to the rise of dedicated restaurants and museums, cementing ramen's status as a culinary staple and influencing global culinary trends.</a:t>
+              <a:t>Annual events like the National Shrimp Festival promote regional dishes, fostering community engagement and highlighting the significance of food in American culture.</a:t>
             </a:r>
           </a:p>
         </p:txBody>
@@ -3463,7 +3464,7 @@
           <a:lstStyle/>
           <a:p>
             <a:r>
-              <a:t>The Evolution of Ramen: From Traditional Roots to Global Phenomenon</a:t>
+              <a:t>Regional Icons: Exploring America's Culinary Diversity</a:t>
             </a:r>
           </a:p>
         </p:txBody>
@@ -3488,6 +3489,350 @@
       <p:grpSpPr/>
       <p:sp>
         <p:nvSpPr>
+          <p:cNvPr id="2" name="content1">
+            <a:extLst>
+              <a:ext uri="{FF2B5EF4-FFF2-40B4-BE49-F238E27FC236}">
+                <a16:creationId xmlns:a16="http://schemas.microsoft.com/office/drawing/2014/main" id="{54FB0FDB-46CC-42BE-A833-C89184E3471E}"/>
+              </a:ext>
+            </a:extLst>
+          </p:cNvPr>
+          <p:cNvSpPr txBox="1"/>
+          <p:nvPr/>
+        </p:nvSpPr>
+        <p:spPr>
+          <a:xfrm>
+            <a:off x="350251" y="3043533"/>
+            <a:ext cx="5713159" cy="646331"/>
+          </a:xfrm>
+          <a:prstGeom prst="rect">
+            <a:avLst/>
+          </a:prstGeom>
+          <a:noFill/>
+          <a:ln>
+            <a:solidFill>
+              <a:schemeClr val="bg1"/>
+            </a:solidFill>
+          </a:ln>
+        </p:spPr>
+        <p:txBody>
+          <a:bodyPr wrap="square" rtlCol="0">
+            <a:spAutoFit/>
+          </a:bodyPr>
+          <a:lstStyle/>
+          <a:p>
+            <a:r>
+              <a:t>Originating from Buffalo, New York, these spicy wings served with blue cheese dip are a sports bar staple, especially during the Super Bowl, reflecting America's love for bold flavors.</a:t>
+            </a:r>
+          </a:p>
+        </p:txBody>
+      </p:sp>
+      <p:sp>
+        <p:nvSpPr>
+          <p:cNvPr id="3" name="head1">
+            <a:extLst>
+              <a:ext uri="{FF2B5EF4-FFF2-40B4-BE49-F238E27FC236}">
+                <a16:creationId xmlns:a16="http://schemas.microsoft.com/office/drawing/2014/main" id="{18484F3A-33E9-4106-BBE3-C35CDE75E4F4}"/>
+              </a:ext>
+            </a:extLst>
+          </p:cNvPr>
+          <p:cNvSpPr txBox="1"/>
+          <p:nvPr/>
+        </p:nvSpPr>
+        <p:spPr>
+          <a:xfrm>
+            <a:off x="350251" y="2441330"/>
+            <a:ext cx="5745749" cy="584775"/>
+          </a:xfrm>
+          <a:prstGeom prst="rect">
+            <a:avLst/>
+          </a:prstGeom>
+          <a:noFill/>
+        </p:spPr>
+        <p:txBody>
+          <a:bodyPr wrap="square" rtlCol="0">
+            <a:spAutoFit/>
+          </a:bodyPr>
+          <a:lstStyle/>
+          <a:p>
+            <a:r>
+              <a:t>Buffalo Wings Delight</a:t>
+            </a:r>
+          </a:p>
+        </p:txBody>
+      </p:sp>
+      <p:sp>
+        <p:nvSpPr>
+          <p:cNvPr id="4" name="content3">
+            <a:extLst>
+              <a:ext uri="{FF2B5EF4-FFF2-40B4-BE49-F238E27FC236}">
+                <a16:creationId xmlns:a16="http://schemas.microsoft.com/office/drawing/2014/main" id="{7ED6F132-1EC3-4F89-ACC9-391787BE6AE2}"/>
+              </a:ext>
+            </a:extLst>
+          </p:cNvPr>
+          <p:cNvSpPr txBox="1"/>
+          <p:nvPr/>
+        </p:nvSpPr>
+        <p:spPr>
+          <a:xfrm>
+            <a:off x="415434" y="5525002"/>
+            <a:ext cx="5647975" cy="646331"/>
+          </a:xfrm>
+          <a:prstGeom prst="rect">
+            <a:avLst/>
+          </a:prstGeom>
+          <a:noFill/>
+          <a:ln>
+            <a:solidFill>
+              <a:schemeClr val="bg1"/>
+            </a:solidFill>
+          </a:ln>
+        </p:spPr>
+        <p:txBody>
+          <a:bodyPr wrap="square" rtlCol="0">
+            <a:spAutoFit/>
+          </a:bodyPr>
+          <a:lstStyle/>
+          <a:p>
+            <a:r>
+              <a:t>With over 50 billion hamburgers consumed annually, this iconic dish leads the list of popular American foods, highlighting its status as a beloved comfort food across the nation.</a:t>
+            </a:r>
+          </a:p>
+        </p:txBody>
+      </p:sp>
+      <p:sp>
+        <p:nvSpPr>
+          <p:cNvPr id="5" name="head3">
+            <a:extLst>
+              <a:ext uri="{FF2B5EF4-FFF2-40B4-BE49-F238E27FC236}">
+                <a16:creationId xmlns:a16="http://schemas.microsoft.com/office/drawing/2014/main" id="{1EC6BFD2-A54A-4CFB-BE32-CB35F7C65D66}"/>
+              </a:ext>
+            </a:extLst>
+          </p:cNvPr>
+          <p:cNvSpPr txBox="1"/>
+          <p:nvPr/>
+        </p:nvSpPr>
+        <p:spPr>
+          <a:xfrm>
+            <a:off x="382842" y="4952327"/>
+            <a:ext cx="5680567" cy="584775"/>
+          </a:xfrm>
+          <a:prstGeom prst="rect">
+            <a:avLst/>
+          </a:prstGeom>
+          <a:noFill/>
+        </p:spPr>
+        <p:txBody>
+          <a:bodyPr wrap="square" rtlCol="0">
+            <a:spAutoFit/>
+          </a:bodyPr>
+          <a:lstStyle/>
+          <a:p>
+            <a:r>
+              <a:t>America's Burger Obsession</a:t>
+            </a:r>
+          </a:p>
+        </p:txBody>
+      </p:sp>
+      <p:sp>
+        <p:nvSpPr>
+          <p:cNvPr id="6" name="content2">
+            <a:extLst>
+              <a:ext uri="{FF2B5EF4-FFF2-40B4-BE49-F238E27FC236}">
+                <a16:creationId xmlns:a16="http://schemas.microsoft.com/office/drawing/2014/main" id="{228BCD66-C14B-42CD-A438-BC7AA99965CD}"/>
+              </a:ext>
+            </a:extLst>
+          </p:cNvPr>
+          <p:cNvSpPr txBox="1"/>
+          <p:nvPr/>
+        </p:nvSpPr>
+        <p:spPr>
+          <a:xfrm>
+            <a:off x="6374296" y="3043533"/>
+            <a:ext cx="5148396" cy="646331"/>
+          </a:xfrm>
+          <a:prstGeom prst="rect">
+            <a:avLst/>
+          </a:prstGeom>
+          <a:noFill/>
+          <a:ln>
+            <a:solidFill>
+              <a:schemeClr val="bg1"/>
+            </a:solidFill>
+          </a:ln>
+        </p:spPr>
+        <p:txBody>
+          <a:bodyPr wrap="square" rtlCol="0">
+            <a:spAutoFit/>
+          </a:bodyPr>
+          <a:lstStyle/>
+          <a:p>
+            <a:r>
+              <a:t>Dishes like New England clam chowder, Louisiana gumbo, and Chicago deep-dish pizza showcase local ingredients and cultural heritage, making food travel a popular trend for authentic experiences.</a:t>
+            </a:r>
+          </a:p>
+        </p:txBody>
+      </p:sp>
+      <p:sp>
+        <p:nvSpPr>
+          <p:cNvPr id="7" name="head2">
+            <a:extLst>
+              <a:ext uri="{FF2B5EF4-FFF2-40B4-BE49-F238E27FC236}">
+                <a16:creationId xmlns:a16="http://schemas.microsoft.com/office/drawing/2014/main" id="{CD5BF12C-71C8-4652-9154-19F255752D5D}"/>
+              </a:ext>
+            </a:extLst>
+          </p:cNvPr>
+          <p:cNvSpPr txBox="1"/>
+          <p:nvPr/>
+        </p:nvSpPr>
+        <p:spPr>
+          <a:xfrm>
+            <a:off x="6341705" y="2441330"/>
+            <a:ext cx="5180986" cy="584775"/>
+          </a:xfrm>
+          <a:prstGeom prst="rect">
+            <a:avLst/>
+          </a:prstGeom>
+          <a:noFill/>
+        </p:spPr>
+        <p:txBody>
+          <a:bodyPr wrap="square" rtlCol="0">
+            <a:spAutoFit/>
+          </a:bodyPr>
+          <a:lstStyle/>
+          <a:p>
+            <a:r>
+              <a:t>Regional Culinary Treasures</a:t>
+            </a:r>
+          </a:p>
+        </p:txBody>
+      </p:sp>
+      <p:sp>
+        <p:nvSpPr>
+          <p:cNvPr id="9" name="head4">
+            <a:extLst>
+              <a:ext uri="{FF2B5EF4-FFF2-40B4-BE49-F238E27FC236}">
+                <a16:creationId xmlns:a16="http://schemas.microsoft.com/office/drawing/2014/main" id="{B5F1E050-5BFC-480A-9E92-7665641E2034}"/>
+              </a:ext>
+            </a:extLst>
+          </p:cNvPr>
+          <p:cNvSpPr txBox="1"/>
+          <p:nvPr/>
+        </p:nvSpPr>
+        <p:spPr>
+          <a:xfrm>
+            <a:off x="6341705" y="4952327"/>
+            <a:ext cx="5180986" cy="584775"/>
+          </a:xfrm>
+          <a:prstGeom prst="rect">
+            <a:avLst/>
+          </a:prstGeom>
+          <a:noFill/>
+        </p:spPr>
+        <p:txBody>
+          <a:bodyPr wrap="square" rtlCol="0">
+            <a:spAutoFit/>
+          </a:bodyPr>
+          <a:lstStyle/>
+          <a:p>
+            <a:r>
+              <a:t>Growing Food Travel Trend</a:t>
+            </a:r>
+          </a:p>
+        </p:txBody>
+      </p:sp>
+      <p:sp>
+        <p:nvSpPr>
+          <p:cNvPr id="21" name="content4">
+            <a:extLst>
+              <a:ext uri="{FF2B5EF4-FFF2-40B4-BE49-F238E27FC236}">
+                <a16:creationId xmlns:a16="http://schemas.microsoft.com/office/drawing/2014/main" id="{CFBB8D88-C46B-4BFD-95E5-3CD2F79AB4A3}"/>
+              </a:ext>
+            </a:extLst>
+          </p:cNvPr>
+          <p:cNvSpPr txBox="1"/>
+          <p:nvPr/>
+        </p:nvSpPr>
+        <p:spPr>
+          <a:xfrm>
+            <a:off x="6374296" y="5537102"/>
+            <a:ext cx="5148396" cy="646331"/>
+          </a:xfrm>
+          <a:prstGeom prst="rect">
+            <a:avLst/>
+          </a:prstGeom>
+          <a:noFill/>
+          <a:ln>
+            <a:solidFill>
+              <a:schemeClr val="bg1"/>
+            </a:solidFill>
+          </a:ln>
+        </p:spPr>
+        <p:txBody>
+          <a:bodyPr wrap="square" rtlCol="0">
+            <a:spAutoFit/>
+          </a:bodyPr>
+          <a:lstStyle/>
+          <a:p>
+            <a:r>
+              <a:t>Travelers are increasingly seeking regional specialties to connect with local culture, supported by a rise in restaurants focusing on authentic culinary experiences.</a:t>
+            </a:r>
+          </a:p>
+        </p:txBody>
+      </p:sp>
+      <p:sp>
+        <p:nvSpPr>
+          <p:cNvPr id="27" name="subtopic">
+            <a:extLst>
+              <a:ext uri="{FF2B5EF4-FFF2-40B4-BE49-F238E27FC236}">
+                <a16:creationId xmlns:a16="http://schemas.microsoft.com/office/drawing/2014/main" id="{1FC39E55-DAC2-4D18-8701-DF4E171179AC}"/>
+              </a:ext>
+            </a:extLst>
+          </p:cNvPr>
+          <p:cNvSpPr txBox="1"/>
+          <p:nvPr/>
+        </p:nvSpPr>
+        <p:spPr>
+          <a:xfrm>
+            <a:off x="168257" y="330442"/>
+            <a:ext cx="10563455" cy="646331"/>
+          </a:xfrm>
+          <a:prstGeom prst="rect">
+            <a:avLst/>
+          </a:prstGeom>
+          <a:noFill/>
+        </p:spPr>
+        <p:txBody>
+          <a:bodyPr wrap="square" rtlCol="0">
+            <a:spAutoFit/>
+          </a:bodyPr>
+          <a:lstStyle/>
+          <a:p>
+            <a:r>
+              <a:t>Signature Dishes: The Must-Try Foods Across the USA</a:t>
+            </a:r>
+          </a:p>
+        </p:txBody>
+      </p:sp>
+    </p:spTree>
+  </p:cSld>
+  <p:clrMapOvr>
+    <a:masterClrMapping/>
+  </p:clrMapOvr>
+</p:sld>
+</file>
+
+<file path=ppt/slides/slide4.xml><?xml version="1.0" encoding="utf-8"?>
+<p:sld xmlns:a="http://schemas.openxmlformats.org/drawingml/2006/main" xmlns:p="http://schemas.openxmlformats.org/presentationml/2006/main" xmlns:r="http://schemas.openxmlformats.org/officeDocument/2006/relationships">
+  <p:cSld>
+    <p:spTree>
+      <p:nvGrpSpPr>
+        <p:cNvPr id="1" name=""/>
+        <p:cNvGrpSpPr/>
+        <p:nvPr/>
+      </p:nvGrpSpPr>
+      <p:grpSpPr/>
+      <p:sp>
+        <p:nvSpPr>
           <p:cNvPr id="3" name="ending">
             <a:extLst>
               <a:ext uri="{FF2B5EF4-FFF2-40B4-BE49-F238E27FC236}">
@@ -3515,7 +3860,7 @@
           <a:lstStyle/>
           <a:p>
             <a:r>
-              <a:t>Ramen's journey from its origins to a global phenomenon showcases its rich cultural significance and ongoing evolution.</a:t>
+              <a:t>Thank you for exploring famous foods in USA.</a:t>
             </a:r>
           </a:p>
         </p:txBody>

--- a/final_output.pptx
+++ b/final_output.pptx
@@ -3120,7 +3120,7 @@
           <a:lstStyle/>
           <a:p>
             <a:r>
-              <a:t>famous foods in USA</a:t>
+              <a:t>Sea of thieves pc game</a:t>
             </a:r>
           </a:p>
         </p:txBody>
@@ -3177,7 +3177,7 @@
           <a:lstStyle/>
           <a:p>
             <a:r>
-              <a:t>The U.S. features iconic dishes like New England clam chowder and Kansas City barbecue, showcasing its diverse culinary heritage shaped by history and geography.</a:t>
+              <a:t>The introduction of the "Tall Tales" campaign shifted gameplay from competitive to cooperative, enhancing player engagement through story-driven quests.</a:t>
             </a:r>
           </a:p>
         </p:txBody>
@@ -3211,7 +3211,7 @@
           <a:lstStyle/>
           <a:p>
             <a:r>
-              <a:t>Regional Culinary Icons</a:t>
+              <a:t>Narrative-Driven Gameplay</a:t>
             </a:r>
           </a:p>
         </p:txBody>
@@ -3250,7 +3250,7 @@
           <a:lstStyle/>
           <a:p>
             <a:r>
-              <a:t>American cuisine evolves through global integration, with Tex-Mex in the Southwest and Asian flavors in cities like San Francisco enriching the culinary landscape.</a:t>
+              <a:t>Players can choose to cooperate or compete, leading to unique experiences and organic discovery of game mechanics during their adventures.</a:t>
             </a:r>
           </a:p>
         </p:txBody>
@@ -3284,7 +3284,7 @@
           <a:lstStyle/>
           <a:p>
             <a:r>
-              <a:t>Global Influences on American Cuisine</a:t>
+              <a:t>Emergent Player Interaction</a:t>
             </a:r>
           </a:p>
         </p:txBody>
@@ -3323,7 +3323,7 @@
           <a:lstStyle/>
           <a:p>
             <a:r>
-              <a:t>Dishes such as Louisiana gumbo and New England lobster rolls celebrate local ingredients and reflect the cultural traditions of their regions.</a:t>
+              <a:t>Season 21 removed the "Dive To" option, encouraging players to sail to destinations and fostering more interaction and exploration among crews.</a:t>
             </a:r>
           </a:p>
         </p:txBody>
@@ -3357,7 +3357,7 @@
           <a:lstStyle/>
           <a:p>
             <a:r>
-              <a:t>Distinct Regional Specialties</a:t>
+              <a:t>Dynamic Voyage Changes</a:t>
             </a:r>
           </a:p>
         </p:txBody>
@@ -3391,7 +3391,7 @@
           <a:lstStyle/>
           <a:p>
             <a:r>
-              <a:t>Celebrating Food Festivals</a:t>
+              <a:t>Ongoing Usability Improvements</a:t>
             </a:r>
           </a:p>
         </p:txBody>
@@ -3430,7 +3430,7 @@
           <a:lstStyle/>
           <a:p>
             <a:r>
-              <a:t>Annual events like the National Shrimp Festival promote regional dishes, fostering community engagement and highlighting the significance of food in American culture.</a:t>
+              <a:t>Regular updates have refined weapon mechanics and ship operations, reflecting the developers' commitment to enhancing gameplay based on community feedback.</a:t>
             </a:r>
           </a:p>
         </p:txBody>
@@ -3464,7 +3464,7 @@
           <a:lstStyle/>
           <a:p>
             <a:r>
-              <a:t>Regional Icons: Exploring America's Culinary Diversity</a:t>
+              <a:t>The Evolution of Gameplay Mechanics in Sea of Thieves</a:t>
             </a:r>
           </a:p>
         </p:txBody>
@@ -3521,7 +3521,7 @@
           <a:lstStyle/>
           <a:p>
             <a:r>
-              <a:t>Originating from Buffalo, New York, these spicy wings served with blue cheese dip are a sports bar staple, especially during the Super Bowl, reflecting America's love for bold flavors.</a:t>
+              <a:t>Sea of Thieves features a dedicated Community Hub for players to share creations, join programs, and access fan resources, fostering interaction and a sense of belonging.</a:t>
             </a:r>
           </a:p>
         </p:txBody>
@@ -3555,7 +3555,7 @@
           <a:lstStyle/>
           <a:p>
             <a:r>
-              <a:t>Buffalo Wings Delight</a:t>
+              <a:t>Community Hub Engagement</a:t>
             </a:r>
           </a:p>
         </p:txBody>
@@ -3594,7 +3594,7 @@
           <a:lstStyle/>
           <a:p>
             <a:r>
-              <a:t>With over 50 billion hamburgers consumed annually, this iconic dish leads the list of popular American foods, highlighting its status as a beloved comfort food across the nation.</a:t>
+              <a:t>Developers actively integrate community suggestions through the Insider Programme, promoting transparency by lifting the NDA for open discussions on game development.</a:t>
             </a:r>
           </a:p>
         </p:txBody>
@@ -3628,7 +3628,7 @@
           <a:lstStyle/>
           <a:p>
             <a:r>
-              <a:t>America's Burger Obsession</a:t>
+              <a:t>Incorporating Player Feedback</a:t>
             </a:r>
           </a:p>
         </p:txBody>
@@ -3667,7 +3667,7 @@
           <a:lstStyle/>
           <a:p>
             <a:r>
-              <a:t>Dishes like New England clam chowder, Louisiana gumbo, and Chicago deep-dish pizza showcase local ingredients and cultural heritage, making food travel a popular trend for authentic experiences.</a:t>
+              <a:t>The game hosts themed seasonal updates, like the "Community Weekend," which offers bonuses and challenges, exemplified by the 72-hour event during Season 20.</a:t>
             </a:r>
           </a:p>
         </p:txBody>
@@ -3701,7 +3701,7 @@
           <a:lstStyle/>
           <a:p>
             <a:r>
-              <a:t>Regional Culinary Treasures</a:t>
+              <a:t>Seasonal Event Highlights</a:t>
             </a:r>
           </a:p>
         </p:txBody>
@@ -3735,7 +3735,7 @@
           <a:lstStyle/>
           <a:p>
             <a:r>
-              <a:t>Growing Food Travel Trend</a:t>
+              <a:t>Innovative Seasonal Rewards</a:t>
             </a:r>
           </a:p>
         </p:txBody>
@@ -3774,7 +3774,7 @@
           <a:lstStyle/>
           <a:p>
             <a:r>
-              <a:t>Travelers are increasingly seeking regional specialties to connect with local culture, supported by a rise in restaurants focusing on authentic culinary experiences.</a:t>
+              <a:t>Seasonal events, such as the "Festival of Fishing," provide unique cosmetics and bonuses, enhancing gameplay and encouraging player participation during limited-time events.</a:t>
             </a:r>
           </a:p>
         </p:txBody>
@@ -3808,7 +3808,7 @@
           <a:lstStyle/>
           <a:p>
             <a:r>
-              <a:t>Signature Dishes: The Must-Try Foods Across the USA</a:t>
+              <a:t>Community Engagement and Seasonal Content Updates in Sea of Thieves</a:t>
             </a:r>
           </a:p>
         </p:txBody>
@@ -3860,7 +3860,7 @@
           <a:lstStyle/>
           <a:p>
             <a:r>
-              <a:t>Thank you for exploring famous foods in USA.</a:t>
+              <a:t>Thank you for exploring Sea of thieves pc game.</a:t>
             </a:r>
           </a:p>
         </p:txBody>
